--- a/slide/pratica/09/Aula09 - Introducao a Circuitos Digitais.pptx
+++ b/slide/pratica/09/Aula09 - Introducao a Circuitos Digitais.pptx
@@ -4,6 +4,9 @@
   <p:sldMasterIdLst>
     <p:sldMasterId id="2147483648" r:id="rId1"/>
   </p:sldMasterIdLst>
+  <p:notesMasterIdLst>
+    <p:notesMasterId r:id="rId32"/>
+  </p:notesMasterIdLst>
   <p:sldIdLst>
     <p:sldId id="256" r:id="rId2"/>
     <p:sldId id="257" r:id="rId3"/>
@@ -36,9 +39,6 @@
     <p:sldId id="284" r:id="rId30"/>
     <p:sldId id="285" r:id="rId31"/>
   </p:sldIdLst>
-  <p:notesMasterIdLst>
-    <p:notesMasterId r:id="rId32"/>
-  </p:notesMasterIdLst>
   <p:sldSz cx="12192000" cy="6858000"/>
   <p:notesSz cx="6858000" cy="12192000"/>
   <p:defaultTextStyle>
@@ -133,6 +133,11 @@
       </a:defRPr>
     </a:lvl9pPr>
   </p:defaultTextStyle>
+  <p:extLst>
+    <p:ext uri="{EFAFB233-063F-42B5-8137-9DF3F51BA10A}">
+      <p15:sldGuideLst xmlns:p15="http://schemas.microsoft.com/office/powerpoint/2012/main"/>
+    </p:ext>
+  </p:extLst>
 </p:presentation>
 </file>
 
@@ -158,234 +163,10 @@
           <a:chExt cx="0" cy="0"/>
         </a:xfrm>
       </p:grpSpPr>
-      <p:sp>
-        <p:nvSpPr>
-          <p:cNvPr id="2" name="Header Placeholder 1"/>
-          <p:cNvSpPr>
-            <a:spLocks noGrp="1"/>
-          </p:cNvSpPr>
-          <p:nvPr>
-            <p:ph type="hdr" sz="quarter"/>
-          </p:nvPr>
-        </p:nvSpPr>
-        <p:spPr>
-          <a:xfrm>
-            <a:off x="0" y="0"/>
-            <a:ext cx="2971800" cy="458788"/>
-          </a:xfrm>
-          <a:prstGeom prst="rect">
-            <a:avLst/>
-          </a:prstGeom>
-        </p:spPr>
-        <p:txBody>
-          <a:bodyPr vert="horz" lIns="91440" tIns="45720" rIns="91440" bIns="45720" rtlCol="0"/>
-          <a:lstStyle>
-            <a:lvl1pPr algn="l">
-              <a:defRPr sz="1200"/>
-            </a:lvl1pPr>
-          </a:lstStyle>
-          <a:p>
-            <a:endParaRPr lang="en-US"/>
-          </a:p>
-        </p:txBody>
-      </p:sp>
-      <p:sp>
-        <p:nvSpPr>
-          <p:cNvPr id="3" name="Date Placeholder 2"/>
-          <p:cNvSpPr>
-            <a:spLocks noGrp="1"/>
-          </p:cNvSpPr>
-          <p:nvPr>
-            <p:ph type="dt" idx="1"/>
-          </p:nvPr>
-        </p:nvSpPr>
-        <p:spPr>
-          <a:xfrm>
-            <a:off x="3884613" y="0"/>
-            <a:ext cx="2971800" cy="458788"/>
-          </a:xfrm>
-          <a:prstGeom prst="rect">
-            <a:avLst/>
-          </a:prstGeom>
-        </p:spPr>
-        <p:txBody>
-          <a:bodyPr vert="horz" lIns="91440" tIns="45720" rIns="91440" bIns="45720" rtlCol="0"/>
-          <a:lstStyle>
-            <a:lvl1pPr algn="r">
-              <a:defRPr sz="1200"/>
-            </a:lvl1pPr>
-          </a:lstStyle>
-          <a:p>
-            <a:fld id="{5282F153-3F37-0F45-9E97-73ACFA13230C}" type="datetimeFigureOut">
-              <a:rPr lang="en-US"/>
-              <a:t>7/23/19</a:t>
-            </a:fld>
-            <a:endParaRPr lang="en-US"/>
-          </a:p>
-        </p:txBody>
-      </p:sp>
-      <p:sp>
-        <p:nvSpPr>
-          <p:cNvPr id="4" name="Slide Image Placeholder 3"/>
-          <p:cNvSpPr>
-            <a:spLocks noGrp="1" noRot="1" noChangeAspect="1"/>
-          </p:cNvSpPr>
-          <p:nvPr>
-            <p:ph type="sldImg" idx="2"/>
-          </p:nvPr>
-        </p:nvSpPr>
-        <p:spPr>
-          <a:xfrm>
-            <a:off x="685800" y="1143000"/>
-            <a:ext cx="5486400" cy="3086100"/>
-          </a:xfrm>
-          <a:prstGeom prst="rect">
-            <a:avLst/>
-          </a:prstGeom>
-          <a:noFill/>
-          <a:ln w="12700">
-            <a:solidFill>
-              <a:prstClr val="black"/>
-            </a:solidFill>
-          </a:ln>
-        </p:spPr>
-        <p:txBody>
-          <a:bodyPr vert="horz" lIns="91440" tIns="45720" rIns="91440" bIns="45720" rtlCol="0" anchor="ctr"/>
-          <a:lstStyle/>
-          <a:p>
-            <a:endParaRPr lang="en-US"/>
-          </a:p>
-        </p:txBody>
-      </p:sp>
-      <p:sp>
-        <p:nvSpPr>
-          <p:cNvPr id="5" name="Notes Placeholder 4"/>
-          <p:cNvSpPr>
-            <a:spLocks noGrp="1"/>
-          </p:cNvSpPr>
-          <p:nvPr>
-            <p:ph type="body" sz="quarter" idx="3"/>
-          </p:nvPr>
-        </p:nvSpPr>
-        <p:spPr>
-          <a:xfrm>
-            <a:off x="685800" y="4400550"/>
-            <a:ext cx="5486400" cy="3600450"/>
-          </a:xfrm>
-          <a:prstGeom prst="rect">
-            <a:avLst/>
-          </a:prstGeom>
-        </p:spPr>
-        <p:txBody>
-          <a:bodyPr vert="horz" lIns="91440" tIns="45720" rIns="91440" bIns="45720" rtlCol="0"/>
-          <a:lstStyle/>
-          <a:p>
-            <a:pPr lvl="0"/>
-            <a:r>
-              <a:rPr lang="en-US"/>
-              <a:t>Click to edit Master text styles</a:t>
-            </a:r>
-          </a:p>
-          <a:p>
-            <a:pPr lvl="1"/>
-            <a:r>
-              <a:rPr lang="en-US"/>
-              <a:t>Second level</a:t>
-            </a:r>
-          </a:p>
-          <a:p>
-            <a:pPr lvl="2"/>
-            <a:r>
-              <a:rPr lang="en-US"/>
-              <a:t>Third level</a:t>
-            </a:r>
-          </a:p>
-          <a:p>
-            <a:pPr lvl="3"/>
-            <a:r>
-              <a:rPr lang="en-US"/>
-              <a:t>Fourth level</a:t>
-            </a:r>
-          </a:p>
-          <a:p>
-            <a:pPr lvl="4"/>
-            <a:r>
-              <a:rPr lang="en-US"/>
-              <a:t>Fifth level</a:t>
-            </a:r>
-          </a:p>
-        </p:txBody>
-      </p:sp>
-      <p:sp>
-        <p:nvSpPr>
-          <p:cNvPr id="6" name="Footer Placeholder 5"/>
-          <p:cNvSpPr>
-            <a:spLocks noGrp="1"/>
-          </p:cNvSpPr>
-          <p:nvPr>
-            <p:ph type="ftr" sz="quarter" idx="4"/>
-          </p:nvPr>
-        </p:nvSpPr>
-        <p:spPr>
-          <a:xfrm>
-            <a:off x="0" y="8685213"/>
-            <a:ext cx="2971800" cy="458787"/>
-          </a:xfrm>
-          <a:prstGeom prst="rect">
-            <a:avLst/>
-          </a:prstGeom>
-        </p:spPr>
-        <p:txBody>
-          <a:bodyPr vert="horz" lIns="91440" tIns="45720" rIns="91440" bIns="45720" rtlCol="0" anchor="b"/>
-          <a:lstStyle>
-            <a:lvl1pPr algn="l">
-              <a:defRPr sz="1200"/>
-            </a:lvl1pPr>
-          </a:lstStyle>
-          <a:p>
-            <a:endParaRPr lang="en-US"/>
-          </a:p>
-        </p:txBody>
-      </p:sp>
-      <p:sp>
-        <p:nvSpPr>
-          <p:cNvPr id="7" name="Slide Number Placeholder 6"/>
-          <p:cNvSpPr>
-            <a:spLocks noGrp="1"/>
-          </p:cNvSpPr>
-          <p:nvPr>
-            <p:ph type="sldNum" sz="quarter" idx="5"/>
-          </p:nvPr>
-        </p:nvSpPr>
-        <p:spPr>
-          <a:xfrm>
-            <a:off x="3884613" y="8685213"/>
-            <a:ext cx="2971800" cy="458787"/>
-          </a:xfrm>
-          <a:prstGeom prst="rect">
-            <a:avLst/>
-          </a:prstGeom>
-        </p:spPr>
-        <p:txBody>
-          <a:bodyPr vert="horz" lIns="91440" tIns="45720" rIns="91440" bIns="45720" rtlCol="0" anchor="b"/>
-          <a:lstStyle>
-            <a:lvl1pPr algn="r">
-              <a:defRPr sz="1200"/>
-            </a:lvl1pPr>
-          </a:lstStyle>
-          <a:p>
-            <a:fld id="{CE5E9CC1-C706-0F49-92D6-E571CC5EEA8F}" type="slidenum">
-              <a:rPr lang="en-US"/>
-              <a:t>‹#›</a:t>
-            </a:fld>
-            <a:endParaRPr lang="en-US"/>
-          </a:p>
-        </p:txBody>
-      </p:sp>
     </p:spTree>
     <p:extLst>
       <p:ext uri="{BB962C8B-B14F-4D97-AF65-F5344CB8AC3E}">
-        <p14:creationId xmlns:p14="http://schemas.microsoft.com/office/powerpoint/2010/main" val="1024086991"/>
+        <p14:creationId xmlns:p14="http://schemas.microsoft.com/office/powerpoint/2010/main" val="1843044105"/>
       </p:ext>
     </p:extLst>
   </p:cSld>
@@ -533,7 +314,6 @@
               <a:rPr lang="en-US" dirty="0"/>
               <a:t>Aula sem elo direto de continuidade na apresentação — segue direto do que já vimos de álgebra booleana (Aula 06) e K-maps (Aula 07).</a:t>
             </a:r>
-            <a:endParaRPr lang="en-US" dirty="0"/>
           </a:p>
         </p:txBody>
       </p:sp>
@@ -621,7 +401,6 @@
               <a:rPr lang="en-US" dirty="0"/>
               <a:t>É um circuito combinacional puro: sem realimentação, sem memória — a saída depende só da entrada atual.</a:t>
             </a:r>
-            <a:endParaRPr lang="en-US" dirty="0"/>
           </a:p>
         </p:txBody>
       </p:sp>
@@ -709,7 +488,6 @@
               <a:rPr lang="en-US" dirty="0"/>
               <a:t>Reforçar: todo circuito "novo" daqui pra frente vai ser recombinação de portas que a turma já domina.</a:t>
             </a:r>
-            <a:endParaRPr lang="en-US" dirty="0"/>
           </a:p>
         </p:txBody>
       </p:sp>
@@ -797,7 +575,6 @@
               <a:rPr lang="en-US" dirty="0"/>
               <a:t>Mesma base de sempre: ^ é XOR, &amp; é AND, em Python e em C#.</a:t>
             </a:r>
-            <a:endParaRPr lang="en-US" dirty="0"/>
           </a:p>
         </p:txBody>
       </p:sp>
@@ -885,7 +662,6 @@
               <a:rPr lang="en-US" dirty="0"/>
               <a:t>Rodar de verdade: as 4 linhas de saída batem com a tabela do Slide 9.</a:t>
             </a:r>
-            <a:endParaRPr lang="en-US" dirty="0"/>
           </a:p>
         </p:txBody>
       </p:sp>
@@ -973,7 +749,6 @@
               <a:rPr lang="en-US" dirty="0"/>
               <a:t>8 linhas porque agora são 3 variáveis de entrada — mesmo princípio de sempre.</a:t>
             </a:r>
-            <a:endParaRPr lang="en-US" dirty="0"/>
           </a:p>
         </p:txBody>
       </p:sp>
@@ -1061,7 +836,6 @@
               <a:rPr lang="en-US" dirty="0"/>
               <a:t>Confirmar mentalmente com uma linha da tabela do Slide 14, por exemplo A=1,B=1,Cin=1: S=1, Cout=1.</a:t>
             </a:r>
-            <a:endParaRPr lang="en-US" dirty="0"/>
           </a:p>
         </p:txBody>
       </p:sp>
@@ -1149,7 +923,6 @@
               <a:rPr lang="en-US" dirty="0"/>
               <a:t>Exatamente o que o Exercício 4 pede para implementar em código — este diagrama é o gabarito visual.</a:t>
             </a:r>
-            <a:endParaRPr lang="en-US" dirty="0"/>
           </a:p>
         </p:txBody>
       </p:sp>
@@ -1237,7 +1010,6 @@
               <a:rPr lang="en-US" dirty="0"/>
               <a:t>Esse encadeamento é literalmente como somamos à mão: unidade, depois dezena, carregando o "vai um".</a:t>
             </a:r>
-            <a:endParaRPr lang="en-US" dirty="0"/>
           </a:p>
         </p:txBody>
       </p:sp>
@@ -1325,7 +1097,6 @@
               <a:rPr lang="en-US" dirty="0"/>
               <a:t>Boa hora para perguntar: onde mais a turma já usou um desses sem perceber?</a:t>
             </a:r>
-            <a:endParaRPr lang="en-US" dirty="0"/>
           </a:p>
         </p:txBody>
       </p:sp>
@@ -1413,7 +1184,6 @@
               <a:rPr lang="en-US" dirty="0"/>
               <a:t>Cada exercício tem gabarito no slide seguinte — resolver antes de virar a página.</a:t>
             </a:r>
-            <a:endParaRPr lang="en-US" dirty="0"/>
           </a:p>
         </p:txBody>
       </p:sp>
@@ -1501,7 +1271,6 @@
               <a:rPr lang="en-US" dirty="0"/>
               <a:t>Esta é a aula em que tudo o que foi abstrato até aqui vira componente físico de verdade.</a:t>
             </a:r>
-            <a:endParaRPr lang="en-US" dirty="0"/>
           </a:p>
         </p:txBody>
       </p:sp>
@@ -1589,7 +1358,6 @@
               <a:rPr lang="en-US" dirty="0"/>
               <a:t>Esta fórmula já apareceu no Slide 9 da Aula 07 — a resposta deve soar familiar.</a:t>
             </a:r>
-            <a:endParaRPr lang="en-US" dirty="0"/>
           </a:p>
         </p:txBody>
       </p:sp>
@@ -1677,7 +1445,6 @@
               <a:rPr lang="en-US" dirty="0"/>
               <a:t>Reforçar: nem todo circuito precisa de várias portas — às vezes a simplificação leva de volta a uma única.</a:t>
             </a:r>
-            <a:endParaRPr lang="en-US" dirty="0"/>
           </a:p>
         </p:txBody>
       </p:sp>
@@ -1765,7 +1532,6 @@
               <a:rPr lang="en-US" dirty="0"/>
               <a:t>Rodar half_adder(a,b) para as 4 combinações e comparar linha por linha.</a:t>
             </a:r>
-            <a:endParaRPr lang="en-US" dirty="0"/>
           </a:p>
         </p:txBody>
       </p:sp>
@@ -1853,7 +1619,6 @@
               <a:rPr lang="en-US" dirty="0"/>
               <a:t>Se bateu igual, a implementação está correta — se não, o erro está em trocar XOR por AND ou vice-versa.</a:t>
             </a:r>
-            <a:endParaRPr lang="en-US" dirty="0"/>
           </a:p>
         </p:txBody>
       </p:sp>
@@ -1941,7 +1706,6 @@
               <a:rPr lang="en-US" dirty="0"/>
               <a:t>A tabela do Slide 6 já dá a resposta pronta — o exercício é só traduzir para código.</a:t>
             </a:r>
-            <a:endParaRPr lang="en-US" dirty="0"/>
           </a:p>
         </p:txBody>
       </p:sp>
@@ -2029,7 +1793,6 @@
               <a:rPr lang="en-US" dirty="0"/>
               <a:t>Cada função usa só nand() e as funções já definidas antes dela — nenhum operador booleano "de fora" é usado.</a:t>
             </a:r>
-            <a:endParaRPr lang="en-US" dirty="0"/>
           </a:p>
         </p:txBody>
       </p:sp>
@@ -2117,7 +1880,6 @@
               <a:rPr lang="en-US" dirty="0"/>
               <a:t>O gabarito está no próximo slide — deixar a turma tentar completar as duas linhas antes de revelar.</a:t>
             </a:r>
-            <a:endParaRPr lang="en-US" dirty="0"/>
           </a:p>
         </p:txBody>
       </p:sp>
@@ -2205,7 +1967,6 @@
               <a:rPr lang="en-US" dirty="0"/>
               <a:t>As 8 combinações devem bater exatamente com a tabela do Slide 14.</a:t>
             </a:r>
-            <a:endParaRPr lang="en-US" dirty="0"/>
           </a:p>
         </p:txBody>
       </p:sp>
@@ -2293,7 +2054,6 @@
               <a:rPr lang="en-US" dirty="0"/>
               <a:t>Nand2Tetris é a referência que literalmente parte de NAND e chega a um computador completo, jogo de palavras incluído.</a:t>
             </a:r>
-            <a:endParaRPr lang="en-US" dirty="0"/>
           </a:p>
         </p:txBody>
       </p:sp>
@@ -2381,7 +2141,6 @@
               <a:rPr lang="en-US" dirty="0"/>
               <a:t>Links exatamente como fornecidos pelo professor — nenhuma URL foi inventada.</a:t>
             </a:r>
-            <a:endParaRPr lang="en-US" dirty="0"/>
           </a:p>
         </p:txBody>
       </p:sp>
@@ -2469,7 +2228,6 @@
               <a:rPr lang="en-US" dirty="0"/>
               <a:t>Não é conteúdo novo de lógica — é a mesma matemática, agora com um pé no mundo físico.</a:t>
             </a:r>
-            <a:endParaRPr lang="en-US" dirty="0"/>
           </a:p>
         </p:txBody>
       </p:sp>
@@ -2557,7 +2315,6 @@
               <a:rPr lang="en-US" dirty="0"/>
               <a:t>Fechamento sem teaser de próxima aula — a numeração do material fonte (Aula 09) não encadeia diretamente com a Aula 07 desta série.</a:t>
             </a:r>
-            <a:endParaRPr lang="en-US" dirty="0"/>
           </a:p>
         </p:txBody>
       </p:sp>
@@ -2645,7 +2402,6 @@
               <a:rPr lang="en-US" dirty="0"/>
               <a:t>Reforçar que os símbolos são os mesmos da Aula 04 — só o contexto muda, de proposição para porta.</a:t>
             </a:r>
-            <a:endParaRPr lang="en-US" dirty="0"/>
           </a:p>
         </p:txBody>
       </p:sp>
@@ -2733,7 +2489,6 @@
               <a:rPr lang="en-US" dirty="0"/>
               <a:t>É a mesma ideia do Nand2Tetris — construir um computador inteiro a partir de uma única porta.</a:t>
             </a:r>
-            <a:endParaRPr lang="en-US" dirty="0"/>
           </a:p>
         </p:txBody>
       </p:sp>
@@ -2821,7 +2576,6 @@
               <a:rPr lang="en-US" dirty="0"/>
               <a:t>AND fica pronto negando o resultado do NAND duas vezes — a segunda negação vem do próprio NAND aplicado ao já-negado.</a:t>
             </a:r>
-            <a:endParaRPr lang="en-US" dirty="0"/>
           </a:p>
         </p:txBody>
       </p:sp>
@@ -2909,7 +2663,6 @@
               <a:rPr lang="en-US" dirty="0"/>
               <a:t>Esta é a mesma checagem cruzada que fizemos com álgebra e K-map nas aulas anteriores — só que agora provando algo sobre hardware.</a:t>
             </a:r>
-            <a:endParaRPr lang="en-US" dirty="0"/>
           </a:p>
         </p:txBody>
       </p:sp>
@@ -2997,7 +2750,6 @@
               <a:rPr lang="en-US" dirty="0"/>
               <a:t>Vale apontar para trás no material: cada seta desse fluxo já foi ensinada como aula própria.</a:t>
             </a:r>
-            <a:endParaRPr lang="en-US" dirty="0"/>
           </a:p>
         </p:txBody>
       </p:sp>
@@ -3085,7 +2837,6 @@
               <a:rPr lang="en-US" dirty="0"/>
               <a:t>Das colunas saem as duas expressões diretamente, igual sempre fizemos com SOP.</a:t>
             </a:r>
-            <a:endParaRPr lang="en-US" dirty="0"/>
           </a:p>
         </p:txBody>
       </p:sp>
@@ -3158,6 +2909,11 @@
 <file path=ppt/slideMasters/slideMaster1.xml><?xml version="1.0" encoding="utf-8"?>
 <p:sldMaster xmlns:a="http://schemas.openxmlformats.org/drawingml/2006/main" xmlns:r="http://schemas.openxmlformats.org/officeDocument/2006/relationships" xmlns:p="http://schemas.openxmlformats.org/presentationml/2006/main">
   <p:cSld>
+    <p:bg>
+      <p:bgRef idx="1001">
+        <a:schemeClr val="bg1"/>
+      </p:bgRef>
+    </p:bg>
     <p:spTree>
       <p:nvGrpSpPr>
         <p:cNvPr id="1" name=""/>
@@ -3440,6 +3196,7 @@
         <a:solidFill>
           <a:srgbClr val="141B41"/>
         </a:solidFill>
+        <a:effectLst/>
       </p:bgPr>
     </p:bg>
     <p:spTree>
@@ -3506,14 +3263,14 @@
       </p:sp>
       <p:pic>
         <p:nvPicPr>
-          <p:cNvPr id="4" name="Image 0" descr="preencoded.png">    </p:cNvPr>
+          <p:cNvPr id="4" name="Image 0" descr="preencoded.png"/>
           <p:cNvPicPr>
             <a:picLocks noChangeAspect="1"/>
           </p:cNvPicPr>
           <p:nvPr/>
         </p:nvPicPr>
         <p:blipFill>
-          <a:blip r:embed="rId1">
+          <a:blip r:embed="rId3">
             <a:alphaModFix amt="22000"/>
           </a:blip>
           <a:stretch>
@@ -3551,11 +3308,11 @@
           <a:bodyPr wrap="square" lIns="0" tIns="0" rIns="0" bIns="0" rtlCol="0" anchor="ctr"/>
           <a:lstStyle/>
           <a:p>
-            <a:pPr indent="0" marL="0">
+            <a:pPr marL="0" indent="0">
               <a:buNone/>
             </a:pPr>
             <a:r>
-              <a:rPr lang="en-US" sz="1400" b="1" spc="300" kern="0" dirty="0">
+              <a:rPr lang="en-US" sz="1400" b="1" kern="0" spc="300" dirty="0">
                 <a:solidFill>
                   <a:srgbClr val="2FE6C7"/>
                 </a:solidFill>
@@ -3590,7 +3347,7 @@
           <a:bodyPr wrap="square" lIns="0" tIns="0" rIns="0" bIns="0" rtlCol="0" anchor="ctr"/>
           <a:lstStyle/>
           <a:p>
-            <a:pPr indent="0" marL="0">
+            <a:pPr marL="0" indent="0">
               <a:buNone/>
             </a:pPr>
             <a:r>
@@ -3629,7 +3386,7 @@
           <a:bodyPr wrap="square" lIns="0" tIns="0" rIns="0" bIns="0" rtlCol="0" anchor="ctr"/>
           <a:lstStyle/>
           <a:p>
-            <a:pPr indent="0" marL="0">
+            <a:pPr marL="0" indent="0">
               <a:buNone/>
             </a:pPr>
             <a:r>
@@ -3668,7 +3425,7 @@
           <a:bodyPr wrap="square" lIns="0" tIns="0" rIns="0" bIns="0" rtlCol="0" anchor="ctr"/>
           <a:lstStyle/>
           <a:p>
-            <a:pPr indent="0" marL="0">
+            <a:pPr marL="0" indent="0">
               <a:lnSpc>
                 <a:spcPts val="1800"/>
               </a:lnSpc>
@@ -3710,7 +3467,7 @@
           <a:bodyPr wrap="square" lIns="0" tIns="0" rIns="0" bIns="0" rtlCol="0" anchor="ctr"/>
           <a:lstStyle/>
           <a:p>
-            <a:pPr indent="0" marL="0">
+            <a:pPr marL="0" indent="0">
               <a:buNone/>
             </a:pPr>
             <a:r>
@@ -3744,6 +3501,7 @@
         <a:solidFill>
           <a:srgbClr val="FFFFFF"/>
         </a:solidFill>
+        <a:effectLst/>
       </p:bgPr>
     </p:bg>
     <p:spTree>
@@ -3781,11 +3539,11 @@
           <a:bodyPr wrap="square" lIns="0" tIns="0" rIns="0" bIns="0" rtlCol="0" anchor="ctr"/>
           <a:lstStyle/>
           <a:p>
-            <a:pPr algn="l" indent="0" marL="0">
+            <a:pPr marL="0" indent="0" algn="l">
               <a:buNone/>
             </a:pPr>
             <a:r>
-              <a:rPr lang="en-US" sz="1200" b="1" spc="200" kern="0" dirty="0">
+              <a:rPr lang="en-US" sz="1200" b="1" kern="0" spc="200" dirty="0">
                 <a:solidFill>
                   <a:srgbClr val="6C4BC1"/>
                 </a:solidFill>
@@ -3820,7 +3578,7 @@
           <a:bodyPr wrap="square" lIns="0" tIns="0" rIns="0" bIns="0" rtlCol="0" anchor="ctr"/>
           <a:lstStyle/>
           <a:p>
-            <a:pPr indent="0" marL="0">
+            <a:pPr marL="0" indent="0">
               <a:buNone/>
             </a:pPr>
             <a:r>
@@ -3859,7 +3617,7 @@
           <a:bodyPr wrap="square" lIns="0" tIns="0" rIns="0" bIns="0" rtlCol="0" anchor="ctr"/>
           <a:lstStyle/>
           <a:p>
-            <a:pPr indent="0" marL="0">
+            <a:pPr marL="0" indent="0">
               <a:buNone/>
             </a:pPr>
             <a:r>
@@ -3920,7 +3678,7 @@
           <a:bodyPr wrap="square" lIns="0" tIns="0" rIns="0" bIns="0" rtlCol="0" anchor="ctr"/>
           <a:lstStyle/>
           <a:p>
-            <a:pPr algn="ctr" indent="0" marL="0">
+            <a:pPr marL="0" indent="0" algn="ctr">
               <a:buNone/>
             </a:pPr>
             <a:r>
@@ -3959,7 +3717,7 @@
           <a:bodyPr wrap="square" lIns="0" tIns="0" rIns="0" bIns="0" rtlCol="0" anchor="ctr"/>
           <a:lstStyle/>
           <a:p>
-            <a:pPr algn="ctr" indent="0" marL="0">
+            <a:pPr marL="0" indent="0" algn="ctr">
               <a:buNone/>
             </a:pPr>
             <a:r>
@@ -4020,7 +3778,7 @@
           <a:bodyPr wrap="square" lIns="0" tIns="0" rIns="0" bIns="0" rtlCol="0" anchor="ctr"/>
           <a:lstStyle/>
           <a:p>
-            <a:pPr algn="ctr" indent="0" marL="0">
+            <a:pPr marL="0" indent="0" algn="ctr">
               <a:buNone/>
             </a:pPr>
             <a:r>
@@ -4059,7 +3817,7 @@
           <a:bodyPr wrap="square" lIns="0" tIns="0" rIns="0" bIns="0" rtlCol="0" anchor="ctr"/>
           <a:lstStyle/>
           <a:p>
-            <a:pPr algn="ctr" indent="0" marL="0">
+            <a:pPr marL="0" indent="0" algn="ctr">
               <a:buNone/>
             </a:pPr>
             <a:r>
@@ -4118,7 +3876,7 @@
           <a:bodyPr wrap="square" lIns="0" tIns="0" rIns="0" bIns="0" rtlCol="0" anchor="ctr"/>
           <a:lstStyle/>
           <a:p>
-            <a:pPr algn="ctr" indent="0" marL="0">
+            <a:pPr marL="0" indent="0" algn="ctr">
               <a:buNone/>
             </a:pPr>
             <a:r>
@@ -4179,7 +3937,7 @@
           <a:bodyPr wrap="square" lIns="0" tIns="0" rIns="0" bIns="0" rtlCol="0" anchor="ctr"/>
           <a:lstStyle/>
           <a:p>
-            <a:pPr algn="ctr" indent="0" marL="0">
+            <a:pPr marL="0" indent="0" algn="ctr">
               <a:buNone/>
             </a:pPr>
             <a:r>
@@ -4218,7 +3976,7 @@
           <a:bodyPr wrap="square" lIns="0" tIns="0" rIns="0" bIns="0" rtlCol="0" anchor="ctr"/>
           <a:lstStyle/>
           <a:p>
-            <a:pPr algn="ctr" indent="0" marL="0">
+            <a:pPr marL="0" indent="0" algn="ctr">
               <a:buNone/>
             </a:pPr>
             <a:r>
@@ -4279,7 +4037,7 @@
           <a:bodyPr wrap="square" lIns="0" tIns="0" rIns="0" bIns="0" rtlCol="0" anchor="ctr"/>
           <a:lstStyle/>
           <a:p>
-            <a:pPr algn="ctr" indent="0" marL="0">
+            <a:pPr marL="0" indent="0" algn="ctr">
               <a:buNone/>
             </a:pPr>
             <a:r>
@@ -4318,7 +4076,7 @@
           <a:bodyPr wrap="square" lIns="0" tIns="0" rIns="0" bIns="0" rtlCol="0" anchor="ctr"/>
           <a:lstStyle/>
           <a:p>
-            <a:pPr algn="ctr" indent="0" marL="0">
+            <a:pPr marL="0" indent="0" algn="ctr">
               <a:buNone/>
             </a:pPr>
             <a:r>
@@ -4377,7 +4135,7 @@
           <a:bodyPr wrap="square" lIns="0" tIns="0" rIns="0" bIns="0" rtlCol="0" anchor="ctr"/>
           <a:lstStyle/>
           <a:p>
-            <a:pPr algn="ctr" indent="0" marL="0">
+            <a:pPr marL="0" indent="0" algn="ctr">
               <a:buNone/>
             </a:pPr>
             <a:r>
@@ -4416,7 +4174,7 @@
           <a:bodyPr wrap="square" lIns="0" tIns="0" rIns="0" bIns="0" rtlCol="0" anchor="ctr"/>
           <a:lstStyle/>
           <a:p>
-            <a:pPr algn="ctr" indent="0" marL="0">
+            <a:pPr marL="0" indent="0" algn="ctr">
               <a:buNone/>
             </a:pPr>
             <a:r>
@@ -4455,7 +4213,7 @@
           <a:bodyPr wrap="square" lIns="0" tIns="0" rIns="0" bIns="0" rtlCol="0" anchor="ctr"/>
           <a:lstStyle/>
           <a:p>
-            <a:pPr algn="r" indent="0" marL="0">
+            <a:pPr marL="0" indent="0" algn="r">
               <a:buNone/>
             </a:pPr>
             <a:r>
@@ -4489,6 +4247,7 @@
         <a:solidFill>
           <a:srgbClr val="141B41"/>
         </a:solidFill>
+        <a:effectLst/>
       </p:bgPr>
     </p:bg>
     <p:spTree>
@@ -4526,11 +4285,11 @@
           <a:bodyPr wrap="square" lIns="0" tIns="0" rIns="0" bIns="0" rtlCol="0" anchor="ctr"/>
           <a:lstStyle/>
           <a:p>
-            <a:pPr algn="l" indent="0" marL="0">
+            <a:pPr marL="0" indent="0" algn="l">
               <a:buNone/>
             </a:pPr>
             <a:r>
-              <a:rPr lang="en-US" sz="1200" b="1" spc="200" kern="0" dirty="0">
+              <a:rPr lang="en-US" sz="1200" b="1" kern="0" spc="200" dirty="0">
                 <a:solidFill>
                   <a:srgbClr val="2FE6C7"/>
                 </a:solidFill>
@@ -4566,14 +4325,14 @@
       </p:sp>
       <p:pic>
         <p:nvPicPr>
-          <p:cNvPr id="4" name="Image 0" descr="preencoded.png">    </p:cNvPr>
+          <p:cNvPr id="4" name="Image 0" descr="preencoded.png"/>
           <p:cNvPicPr>
             <a:picLocks noChangeAspect="1"/>
           </p:cNvPicPr>
           <p:nvPr/>
         </p:nvPicPr>
         <p:blipFill>
-          <a:blip r:embed="rId1"/>
+          <a:blip r:embed="rId3"/>
           <a:stretch>
             <a:fillRect/>
           </a:stretch>
@@ -4609,7 +4368,7 @@
           <a:bodyPr wrap="square" lIns="0" tIns="0" rIns="0" bIns="0" rtlCol="0" anchor="ctr"/>
           <a:lstStyle/>
           <a:p>
-            <a:pPr indent="0" marL="0">
+            <a:pPr marL="0" indent="0">
               <a:buNone/>
             </a:pPr>
             <a:r>
@@ -4648,7 +4407,7 @@
           <a:bodyPr wrap="square" lIns="0" tIns="0" rIns="0" bIns="0" rtlCol="0" anchor="ctr"/>
           <a:lstStyle/>
           <a:p>
-            <a:pPr indent="0" marL="0">
+            <a:pPr marL="0" indent="0">
               <a:lnSpc>
                 <a:spcPts val="2200"/>
               </a:lnSpc>
@@ -4712,7 +4471,7 @@
           <a:bodyPr wrap="square" lIns="0" tIns="0" rIns="0" bIns="0" rtlCol="0" anchor="ctr"/>
           <a:lstStyle/>
           <a:p>
-            <a:pPr algn="ctr" indent="0" marL="0">
+            <a:pPr marL="0" indent="0" algn="ctr">
               <a:buNone/>
             </a:pPr>
             <a:r>
@@ -4751,7 +4510,7 @@
           <a:bodyPr wrap="square" lIns="0" tIns="0" rIns="0" bIns="0" rtlCol="0" anchor="ctr"/>
           <a:lstStyle/>
           <a:p>
-            <a:pPr algn="r" indent="0" marL="0">
+            <a:pPr marL="0" indent="0" algn="r">
               <a:buNone/>
             </a:pPr>
             <a:r>
@@ -4785,6 +4544,7 @@
         <a:solidFill>
           <a:srgbClr val="6C4BC1"/>
         </a:solidFill>
+        <a:effectLst/>
       </p:bgPr>
     </p:bg>
     <p:spTree>
@@ -4871,14 +4631,14 @@
       </p:sp>
       <p:pic>
         <p:nvPicPr>
-          <p:cNvPr id="5" name="Image 0" descr="preencoded.png">    </p:cNvPr>
+          <p:cNvPr id="5" name="Image 0" descr="preencoded.png"/>
           <p:cNvPicPr>
             <a:picLocks noChangeAspect="1"/>
           </p:cNvPicPr>
           <p:nvPr/>
         </p:nvPicPr>
         <p:blipFill>
-          <a:blip r:embed="rId1"/>
+          <a:blip r:embed="rId3"/>
           <a:stretch>
             <a:fillRect/>
           </a:stretch>
@@ -4914,7 +4674,7 @@
           <a:bodyPr wrap="square" lIns="0" tIns="0" rIns="0" bIns="0" rtlCol="0" anchor="ctr"/>
           <a:lstStyle/>
           <a:p>
-            <a:pPr algn="ctr" indent="0" marL="0">
+            <a:pPr marL="0" indent="0" algn="ctr">
               <a:buNone/>
             </a:pPr>
             <a:r>
@@ -4953,7 +4713,7 @@
           <a:bodyPr wrap="square" lIns="0" tIns="0" rIns="0" bIns="0" rtlCol="0" anchor="ctr"/>
           <a:lstStyle/>
           <a:p>
-            <a:pPr algn="ctr" indent="0" marL="0">
+            <a:pPr marL="0" indent="0" algn="ctr">
               <a:lnSpc>
                 <a:spcPts val="2200"/>
               </a:lnSpc>
@@ -4990,6 +4750,7 @@
         <a:solidFill>
           <a:srgbClr val="FFFFFF"/>
         </a:solidFill>
+        <a:effectLst/>
       </p:bgPr>
     </p:bg>
     <p:spTree>
@@ -5027,11 +4788,11 @@
           <a:bodyPr wrap="square" lIns="0" tIns="0" rIns="0" bIns="0" rtlCol="0" anchor="ctr"/>
           <a:lstStyle/>
           <a:p>
-            <a:pPr algn="l" indent="0" marL="0">
+            <a:pPr marL="0" indent="0" algn="l">
               <a:buNone/>
             </a:pPr>
             <a:r>
-              <a:rPr lang="en-US" sz="1200" b="1" spc="200" kern="0" dirty="0">
+              <a:rPr lang="en-US" sz="1200" b="1" kern="0" spc="200" dirty="0">
                 <a:solidFill>
                   <a:srgbClr val="6C4BC1"/>
                 </a:solidFill>
@@ -5066,7 +4827,7 @@
           <a:bodyPr wrap="square" lIns="0" tIns="0" rIns="0" bIns="0" rtlCol="0" anchor="ctr"/>
           <a:lstStyle/>
           <a:p>
-            <a:pPr indent="0" marL="0">
+            <a:pPr marL="0" indent="0">
               <a:buNone/>
             </a:pPr>
             <a:r>
@@ -5105,7 +4866,7 @@
           <a:bodyPr wrap="square" lIns="0" tIns="0" rIns="0" bIns="0" rtlCol="0" anchor="ctr"/>
           <a:lstStyle/>
           <a:p>
-            <a:pPr indent="0" marL="0">
+            <a:pPr marL="0" indent="0">
               <a:buNone/>
             </a:pPr>
             <a:r>
@@ -5226,7 +4987,7 @@
           <a:bodyPr wrap="square" lIns="0" tIns="0" rIns="0" bIns="0" rtlCol="0" anchor="ctr"/>
           <a:lstStyle/>
           <a:p>
-            <a:pPr indent="0" marL="0">
+            <a:pPr marL="0" indent="0">
               <a:buNone/>
             </a:pPr>
             <a:r>
@@ -5246,14 +5007,14 @@
       </p:sp>
       <p:pic>
         <p:nvPicPr>
-          <p:cNvPr id="10" name="Image 0" descr="preencoded.png">    </p:cNvPr>
+          <p:cNvPr id="10" name="Image 0" descr="preencoded.png"/>
           <p:cNvPicPr>
             <a:picLocks noChangeAspect="1"/>
           </p:cNvPicPr>
           <p:nvPr/>
         </p:nvPicPr>
         <p:blipFill>
-          <a:blip r:embed="rId1"/>
+          <a:blip r:embed="rId3"/>
           <a:stretch>
             <a:fillRect/>
           </a:stretch>
@@ -5289,7 +5050,7 @@
           <a:bodyPr wrap="square" lIns="0" tIns="0" rIns="0" bIns="0" rtlCol="0" anchor="ctr"/>
           <a:lstStyle/>
           <a:p>
-            <a:pPr indent="0" marL="0">
+            <a:pPr marL="0" indent="0">
               <a:buNone/>
             </a:pPr>
             <a:r>
@@ -5303,9 +5064,6 @@
               </a:rPr>
               <a:t>static (int soma, int carry) </a:t>
             </a:r>
-            <a:pPr indent="0" marL="0">
-              <a:buNone/>
-            </a:pPr>
             <a:r>
               <a:rPr lang="en-US" sz="1200" dirty="0">
                 <a:solidFill>
@@ -5342,7 +5100,7 @@
           <a:bodyPr wrap="square" lIns="0" tIns="0" rIns="0" bIns="0" rtlCol="0" anchor="ctr"/>
           <a:lstStyle/>
           <a:p>
-            <a:pPr indent="0" marL="0">
+            <a:pPr marL="0" indent="0">
               <a:buNone/>
             </a:pPr>
             <a:r>
@@ -5381,7 +5139,7 @@
           <a:bodyPr wrap="square" lIns="0" tIns="0" rIns="0" bIns="0" rtlCol="0" anchor="ctr"/>
           <a:lstStyle/>
           <a:p>
-            <a:pPr indent="0" marL="0">
+            <a:pPr marL="0" indent="0">
               <a:buNone/>
             </a:pPr>
             <a:r>
@@ -5420,7 +5178,7 @@
           <a:bodyPr wrap="square" lIns="0" tIns="0" rIns="0" bIns="0" rtlCol="0" anchor="ctr"/>
           <a:lstStyle/>
           <a:p>
-            <a:pPr indent="0" marL="0">
+            <a:pPr marL="0" indent="0">
               <a:buNone/>
             </a:pPr>
             <a:r>
@@ -5459,7 +5217,7 @@
           <a:bodyPr wrap="square" lIns="0" tIns="0" rIns="0" bIns="0" rtlCol="0" anchor="ctr"/>
           <a:lstStyle/>
           <a:p>
-            <a:pPr indent="0" marL="0">
+            <a:pPr marL="0" indent="0">
               <a:buNone/>
             </a:pPr>
             <a:r>
@@ -5498,7 +5256,7 @@
           <a:bodyPr wrap="square" lIns="0" tIns="0" rIns="0" bIns="0" rtlCol="0" anchor="ctr"/>
           <a:lstStyle/>
           <a:p>
-            <a:pPr indent="0" marL="0">
+            <a:pPr marL="0" indent="0">
               <a:buNone/>
             </a:pPr>
             <a:r>
@@ -5537,7 +5295,7 @@
           <a:bodyPr wrap="square" lIns="0" tIns="0" rIns="0" bIns="0" rtlCol="0" anchor="ctr"/>
           <a:lstStyle/>
           <a:p>
-            <a:pPr indent="0" marL="0">
+            <a:pPr marL="0" indent="0">
               <a:buNone/>
             </a:pPr>
             <a:r>
@@ -5658,7 +5416,7 @@
           <a:bodyPr wrap="square" lIns="0" tIns="0" rIns="0" bIns="0" rtlCol="0" anchor="ctr"/>
           <a:lstStyle/>
           <a:p>
-            <a:pPr indent="0" marL="0">
+            <a:pPr marL="0" indent="0">
               <a:buNone/>
             </a:pPr>
             <a:r>
@@ -5678,14 +5436,14 @@
       </p:sp>
       <p:pic>
         <p:nvPicPr>
-          <p:cNvPr id="23" name="Image 1" descr="preencoded.png">    </p:cNvPr>
+          <p:cNvPr id="23" name="Image 1" descr="preencoded.png"/>
           <p:cNvPicPr>
             <a:picLocks noChangeAspect="1"/>
           </p:cNvPicPr>
           <p:nvPr/>
         </p:nvPicPr>
         <p:blipFill>
-          <a:blip r:embed="rId2"/>
+          <a:blip r:embed="rId4"/>
           <a:stretch>
             <a:fillRect/>
           </a:stretch>
@@ -5721,7 +5479,7 @@
           <a:bodyPr wrap="square" lIns="0" tIns="0" rIns="0" bIns="0" rtlCol="0" anchor="ctr"/>
           <a:lstStyle/>
           <a:p>
-            <a:pPr indent="0" marL="0">
+            <a:pPr marL="0" indent="0">
               <a:buNone/>
             </a:pPr>
             <a:r>
@@ -5735,9 +5493,6 @@
               </a:rPr>
               <a:t>def </a:t>
             </a:r>
-            <a:pPr indent="0" marL="0">
-              <a:buNone/>
-            </a:pPr>
             <a:r>
               <a:rPr lang="en-US" sz="1200" dirty="0">
                 <a:solidFill>
@@ -5774,7 +5529,7 @@
           <a:bodyPr wrap="square" lIns="0" tIns="0" rIns="0" bIns="0" rtlCol="0" anchor="ctr"/>
           <a:lstStyle/>
           <a:p>
-            <a:pPr indent="0" marL="0">
+            <a:pPr marL="0" indent="0">
               <a:buNone/>
             </a:pPr>
             <a:r>
@@ -5788,9 +5543,6 @@
               </a:rPr>
               <a:t>    soma  = a ^ b        </a:t>
             </a:r>
-            <a:pPr indent="0" marL="0">
-              <a:buNone/>
-            </a:pPr>
             <a:r>
               <a:rPr lang="en-US" sz="1200" dirty="0">
                 <a:solidFill>
@@ -5827,7 +5579,7 @@
           <a:bodyPr wrap="square" lIns="0" tIns="0" rIns="0" bIns="0" rtlCol="0" anchor="ctr"/>
           <a:lstStyle/>
           <a:p>
-            <a:pPr indent="0" marL="0">
+            <a:pPr marL="0" indent="0">
               <a:buNone/>
             </a:pPr>
             <a:r>
@@ -5841,9 +5593,6 @@
               </a:rPr>
               <a:t>    carry = a &amp; b        </a:t>
             </a:r>
-            <a:pPr indent="0" marL="0">
-              <a:buNone/>
-            </a:pPr>
             <a:r>
               <a:rPr lang="en-US" sz="1200" dirty="0">
                 <a:solidFill>
@@ -5880,7 +5629,7 @@
           <a:bodyPr wrap="square" lIns="0" tIns="0" rIns="0" bIns="0" rtlCol="0" anchor="ctr"/>
           <a:lstStyle/>
           <a:p>
-            <a:pPr indent="0" marL="0">
+            <a:pPr marL="0" indent="0">
               <a:buNone/>
             </a:pPr>
             <a:r>
@@ -5894,9 +5643,6 @@
               </a:rPr>
               <a:t>    return </a:t>
             </a:r>
-            <a:pPr indent="0" marL="0">
-              <a:buNone/>
-            </a:pPr>
             <a:r>
               <a:rPr lang="en-US" sz="1200" dirty="0">
                 <a:solidFill>
@@ -5933,7 +5679,7 @@
           <a:bodyPr wrap="square" lIns="0" tIns="0" rIns="0" bIns="0" rtlCol="0" anchor="ctr"/>
           <a:lstStyle/>
           <a:p>
-            <a:pPr indent="0" marL="0">
+            <a:pPr marL="0" indent="0">
               <a:buNone/>
             </a:pPr>
             <a:r>
@@ -5972,7 +5718,7 @@
           <a:bodyPr wrap="square" lIns="0" tIns="0" rIns="0" bIns="0" rtlCol="0" anchor="ctr"/>
           <a:lstStyle/>
           <a:p>
-            <a:pPr indent="0" marL="0">
+            <a:pPr marL="0" indent="0">
               <a:buNone/>
             </a:pPr>
             <a:r>
@@ -5986,9 +5732,6 @@
               </a:rPr>
               <a:t>for </a:t>
             </a:r>
-            <a:pPr indent="0" marL="0">
-              <a:buNone/>
-            </a:pPr>
             <a:r>
               <a:rPr lang="en-US" sz="1200" dirty="0">
                 <a:solidFill>
@@ -6000,9 +5743,6 @@
               </a:rPr>
               <a:t>a </a:t>
             </a:r>
-            <a:pPr indent="0" marL="0">
-              <a:buNone/>
-            </a:pPr>
             <a:r>
               <a:rPr lang="en-US" sz="1200" dirty="0">
                 <a:solidFill>
@@ -6014,9 +5754,6 @@
               </a:rPr>
               <a:t>in </a:t>
             </a:r>
-            <a:pPr indent="0" marL="0">
-              <a:buNone/>
-            </a:pPr>
             <a:r>
               <a:rPr lang="en-US" sz="1200" dirty="0">
                 <a:solidFill>
@@ -6053,7 +5790,7 @@
           <a:bodyPr wrap="square" lIns="0" tIns="0" rIns="0" bIns="0" rtlCol="0" anchor="ctr"/>
           <a:lstStyle/>
           <a:p>
-            <a:pPr indent="0" marL="0">
+            <a:pPr marL="0" indent="0">
               <a:buNone/>
             </a:pPr>
             <a:r>
@@ -6067,9 +5804,6 @@
               </a:rPr>
               <a:t>    for </a:t>
             </a:r>
-            <a:pPr indent="0" marL="0">
-              <a:buNone/>
-            </a:pPr>
             <a:r>
               <a:rPr lang="en-US" sz="1200" dirty="0">
                 <a:solidFill>
@@ -6081,9 +5815,6 @@
               </a:rPr>
               <a:t>b </a:t>
             </a:r>
-            <a:pPr indent="0" marL="0">
-              <a:buNone/>
-            </a:pPr>
             <a:r>
               <a:rPr lang="en-US" sz="1200" dirty="0">
                 <a:solidFill>
@@ -6095,9 +5826,6 @@
               </a:rPr>
               <a:t>in </a:t>
             </a:r>
-            <a:pPr indent="0" marL="0">
-              <a:buNone/>
-            </a:pPr>
             <a:r>
               <a:rPr lang="en-US" sz="1200" dirty="0">
                 <a:solidFill>
@@ -6134,7 +5862,7 @@
           <a:bodyPr wrap="square" lIns="0" tIns="0" rIns="0" bIns="0" rtlCol="0" anchor="ctr"/>
           <a:lstStyle/>
           <a:p>
-            <a:pPr indent="0" marL="0">
+            <a:pPr marL="0" indent="0">
               <a:buNone/>
             </a:pPr>
             <a:r>
@@ -6148,9 +5876,6 @@
               </a:rPr>
               <a:t>        print(a, b, </a:t>
             </a:r>
-            <a:pPr indent="0" marL="0">
-              <a:buNone/>
-            </a:pPr>
             <a:r>
               <a:rPr lang="en-US" sz="1200" dirty="0">
                 <a:solidFill>
@@ -6162,9 +5887,6 @@
               </a:rPr>
               <a:t>"-&gt;"</a:t>
             </a:r>
-            <a:pPr indent="0" marL="0">
-              <a:buNone/>
-            </a:pPr>
             <a:r>
               <a:rPr lang="en-US" sz="1200" dirty="0">
                 <a:solidFill>
@@ -6201,7 +5923,7 @@
           <a:bodyPr wrap="square" lIns="0" tIns="0" rIns="0" bIns="0" rtlCol="0" anchor="ctr"/>
           <a:lstStyle/>
           <a:p>
-            <a:pPr algn="r" indent="0" marL="0">
+            <a:pPr marL="0" indent="0" algn="r">
               <a:buNone/>
             </a:pPr>
             <a:r>
@@ -6235,6 +5957,7 @@
         <a:solidFill>
           <a:srgbClr val="FFFFFF"/>
         </a:solidFill>
+        <a:effectLst/>
       </p:bgPr>
     </p:bg>
     <p:spTree>
@@ -6272,11 +5995,11 @@
           <a:bodyPr wrap="square" lIns="0" tIns="0" rIns="0" bIns="0" rtlCol="0" anchor="ctr"/>
           <a:lstStyle/>
           <a:p>
-            <a:pPr algn="l" indent="0" marL="0">
+            <a:pPr marL="0" indent="0" algn="l">
               <a:buNone/>
             </a:pPr>
             <a:r>
-              <a:rPr lang="en-US" sz="1200" b="1" spc="200" kern="0" dirty="0">
+              <a:rPr lang="en-US" sz="1200" b="1" kern="0" spc="200" dirty="0">
                 <a:solidFill>
                   <a:srgbClr val="6C4BC1"/>
                 </a:solidFill>
@@ -6312,14 +6035,14 @@
       </p:sp>
       <p:pic>
         <p:nvPicPr>
-          <p:cNvPr id="4" name="Image 0" descr="preencoded.png">    </p:cNvPr>
+          <p:cNvPr id="4" name="Image 0" descr="preencoded.png"/>
           <p:cNvPicPr>
             <a:picLocks noChangeAspect="1"/>
           </p:cNvPicPr>
           <p:nvPr/>
         </p:nvPicPr>
         <p:blipFill>
-          <a:blip r:embed="rId1"/>
+          <a:blip r:embed="rId3"/>
           <a:stretch>
             <a:fillRect/>
           </a:stretch>
@@ -6355,7 +6078,7 @@
           <a:bodyPr wrap="square" lIns="0" tIns="0" rIns="0" bIns="0" rtlCol="0" anchor="ctr"/>
           <a:lstStyle/>
           <a:p>
-            <a:pPr indent="0" marL="0">
+            <a:pPr marL="0" indent="0">
               <a:buNone/>
             </a:pPr>
             <a:r>
@@ -6394,7 +6117,7 @@
           <a:bodyPr wrap="square" lIns="0" tIns="0" rIns="0" bIns="0" rtlCol="0" anchor="ctr"/>
           <a:lstStyle/>
           <a:p>
-            <a:pPr indent="0" marL="0">
+            <a:pPr marL="0" indent="0">
               <a:buNone/>
             </a:pPr>
             <a:r>
@@ -6435,11 +6158,41 @@
             <a:tbl>
               <a:tblPr/>
               <a:tblGrid>
-                <a:gridCol w="1371600"/>
-                <a:gridCol w="1371600"/>
-                <a:gridCol w="1371600"/>
-                <a:gridCol w="1371600"/>
-                <a:gridCol w="1371600"/>
+                <a:gridCol w="1371600">
+                  <a:extLst>
+                    <a:ext uri="{9D8B030D-6E8A-4147-A177-3AD203B41FA5}">
+                      <a16:colId xmlns:a16="http://schemas.microsoft.com/office/drawing/2014/main" val="20000"/>
+                    </a:ext>
+                  </a:extLst>
+                </a:gridCol>
+                <a:gridCol w="1371600">
+                  <a:extLst>
+                    <a:ext uri="{9D8B030D-6E8A-4147-A177-3AD203B41FA5}">
+                      <a16:colId xmlns:a16="http://schemas.microsoft.com/office/drawing/2014/main" val="20001"/>
+                    </a:ext>
+                  </a:extLst>
+                </a:gridCol>
+                <a:gridCol w="1371600">
+                  <a:extLst>
+                    <a:ext uri="{9D8B030D-6E8A-4147-A177-3AD203B41FA5}">
+                      <a16:colId xmlns:a16="http://schemas.microsoft.com/office/drawing/2014/main" val="20002"/>
+                    </a:ext>
+                  </a:extLst>
+                </a:gridCol>
+                <a:gridCol w="1371600">
+                  <a:extLst>
+                    <a:ext uri="{9D8B030D-6E8A-4147-A177-3AD203B41FA5}">
+                      <a16:colId xmlns:a16="http://schemas.microsoft.com/office/drawing/2014/main" val="20003"/>
+                    </a:ext>
+                  </a:extLst>
+                </a:gridCol>
+                <a:gridCol w="1371600">
+                  <a:extLst>
+                    <a:ext uri="{9D8B030D-6E8A-4147-A177-3AD203B41FA5}">
+                      <a16:colId xmlns:a16="http://schemas.microsoft.com/office/drawing/2014/main" val="20004"/>
+                    </a:ext>
+                  </a:extLst>
+                </a:gridCol>
               </a:tblGrid>
               <a:tr h="411480">
                 <a:tc>
@@ -6447,7 +6200,7 @@
                     <a:bodyPr/>
                     <a:lstStyle/>
                     <a:p>
-                      <a:pPr algn="ctr" indent="0" marL="0">
+                      <a:pPr marL="0" indent="0" algn="ctr">
                         <a:buNone/>
                       </a:pPr>
                       <a:r>
@@ -6468,7 +6221,7 @@
                       </a:endParaRPr>
                     </a:p>
                   </a:txBody>
-                  <a:tcPr marL="91440" marR="91440" marT="45720" marB="45720" anchor="ctr">
+                  <a:tcPr anchor="ctr">
                     <a:lnL w="38100" cap="flat" cmpd="sng" algn="ctr">
                       <a:solidFill>
                         <a:srgbClr val="FFFFFF"/>
@@ -6515,7 +6268,7 @@
                     <a:bodyPr/>
                     <a:lstStyle/>
                     <a:p>
-                      <a:pPr algn="ctr" indent="0" marL="0">
+                      <a:pPr marL="0" indent="0" algn="ctr">
                         <a:buNone/>
                       </a:pPr>
                       <a:r>
@@ -6536,7 +6289,7 @@
                       </a:endParaRPr>
                     </a:p>
                   </a:txBody>
-                  <a:tcPr marL="91440" marR="91440" marT="45720" marB="45720" anchor="ctr">
+                  <a:tcPr anchor="ctr">
                     <a:lnL w="38100" cap="flat" cmpd="sng" algn="ctr">
                       <a:solidFill>
                         <a:srgbClr val="FFFFFF"/>
@@ -6583,7 +6336,7 @@
                     <a:bodyPr/>
                     <a:lstStyle/>
                     <a:p>
-                      <a:pPr algn="ctr" indent="0" marL="0">
+                      <a:pPr marL="0" indent="0" algn="ctr">
                         <a:buNone/>
                       </a:pPr>
                       <a:r>
@@ -6604,7 +6357,7 @@
                       </a:endParaRPr>
                     </a:p>
                   </a:txBody>
-                  <a:tcPr marL="91440" marR="91440" marT="45720" marB="45720" anchor="ctr">
+                  <a:tcPr anchor="ctr">
                     <a:lnL w="38100" cap="flat" cmpd="sng" algn="ctr">
                       <a:solidFill>
                         <a:srgbClr val="FFFFFF"/>
@@ -6651,7 +6404,7 @@
                     <a:bodyPr/>
                     <a:lstStyle/>
                     <a:p>
-                      <a:pPr algn="ctr" indent="0" marL="0">
+                      <a:pPr marL="0" indent="0" algn="ctr">
                         <a:buNone/>
                       </a:pPr>
                       <a:r>
@@ -6672,7 +6425,7 @@
                       </a:endParaRPr>
                     </a:p>
                   </a:txBody>
-                  <a:tcPr marL="91440" marR="91440" marT="45720" marB="45720" anchor="ctr">
+                  <a:tcPr anchor="ctr">
                     <a:lnL w="38100" cap="flat" cmpd="sng" algn="ctr">
                       <a:solidFill>
                         <a:srgbClr val="FFFFFF"/>
@@ -6719,7 +6472,7 @@
                     <a:bodyPr/>
                     <a:lstStyle/>
                     <a:p>
-                      <a:pPr algn="ctr" indent="0" marL="0">
+                      <a:pPr marL="0" indent="0" algn="ctr">
                         <a:buNone/>
                       </a:pPr>
                       <a:r>
@@ -6740,7 +6493,7 @@
                       </a:endParaRPr>
                     </a:p>
                   </a:txBody>
-                  <a:tcPr marL="91440" marR="91440" marT="45720" marB="45720" anchor="ctr">
+                  <a:tcPr anchor="ctr">
                     <a:lnL w="38100" cap="flat" cmpd="sng" algn="ctr">
                       <a:solidFill>
                         <a:srgbClr val="FFFFFF"/>
@@ -6782,6 +6535,11 @@
                     </a:solidFill>
                   </a:tcPr>
                 </a:tc>
+                <a:extLst>
+                  <a:ext uri="{0D108BD9-81ED-4DB2-BD59-A6C34878D82A}">
+                    <a16:rowId xmlns:a16="http://schemas.microsoft.com/office/drawing/2014/main" val="10000"/>
+                  </a:ext>
+                </a:extLst>
               </a:tr>
               <a:tr h="384048">
                 <a:tc>
@@ -6789,7 +6547,7 @@
                     <a:bodyPr/>
                     <a:lstStyle/>
                     <a:p>
-                      <a:pPr algn="ctr" indent="0" marL="0">
+                      <a:pPr marL="0" indent="0" algn="ctr">
                         <a:buNone/>
                       </a:pPr>
                       <a:r>
@@ -6810,7 +6568,7 @@
                       </a:endParaRPr>
                     </a:p>
                   </a:txBody>
-                  <a:tcPr marL="91440" marR="91440" marT="45720" marB="45720" anchor="ctr">
+                  <a:tcPr anchor="ctr">
                     <a:lnL w="38100" cap="flat" cmpd="sng" algn="ctr">
                       <a:solidFill>
                         <a:srgbClr val="FFFFFF"/>
@@ -6857,7 +6615,7 @@
                     <a:bodyPr/>
                     <a:lstStyle/>
                     <a:p>
-                      <a:pPr algn="ctr" indent="0" marL="0">
+                      <a:pPr marL="0" indent="0" algn="ctr">
                         <a:buNone/>
                       </a:pPr>
                       <a:r>
@@ -6878,7 +6636,7 @@
                       </a:endParaRPr>
                     </a:p>
                   </a:txBody>
-                  <a:tcPr marL="91440" marR="91440" marT="45720" marB="45720" anchor="ctr">
+                  <a:tcPr anchor="ctr">
                     <a:lnL w="38100" cap="flat" cmpd="sng" algn="ctr">
                       <a:solidFill>
                         <a:srgbClr val="FFFFFF"/>
@@ -6925,7 +6683,7 @@
                     <a:bodyPr/>
                     <a:lstStyle/>
                     <a:p>
-                      <a:pPr algn="ctr" indent="0" marL="0">
+                      <a:pPr marL="0" indent="0" algn="ctr">
                         <a:buNone/>
                       </a:pPr>
                       <a:r>
@@ -6946,7 +6704,7 @@
                       </a:endParaRPr>
                     </a:p>
                   </a:txBody>
-                  <a:tcPr marL="91440" marR="91440" marT="45720" marB="45720" anchor="ctr">
+                  <a:tcPr anchor="ctr">
                     <a:lnL w="38100" cap="flat" cmpd="sng" algn="ctr">
                       <a:solidFill>
                         <a:srgbClr val="FFFFFF"/>
@@ -6993,7 +6751,7 @@
                     <a:bodyPr/>
                     <a:lstStyle/>
                     <a:p>
-                      <a:pPr algn="ctr" indent="0" marL="0">
+                      <a:pPr marL="0" indent="0" algn="ctr">
                         <a:buNone/>
                       </a:pPr>
                       <a:r>
@@ -7014,7 +6772,7 @@
                       </a:endParaRPr>
                     </a:p>
                   </a:txBody>
-                  <a:tcPr marL="91440" marR="91440" marT="45720" marB="45720" anchor="ctr">
+                  <a:tcPr anchor="ctr">
                     <a:lnL w="38100" cap="flat" cmpd="sng" algn="ctr">
                       <a:solidFill>
                         <a:srgbClr val="FFFFFF"/>
@@ -7061,7 +6819,7 @@
                     <a:bodyPr/>
                     <a:lstStyle/>
                     <a:p>
-                      <a:pPr algn="ctr" indent="0" marL="0">
+                      <a:pPr marL="0" indent="0" algn="ctr">
                         <a:buNone/>
                       </a:pPr>
                       <a:r>
@@ -7082,7 +6840,7 @@
                       </a:endParaRPr>
                     </a:p>
                   </a:txBody>
-                  <a:tcPr marL="91440" marR="91440" marT="45720" marB="45720" anchor="ctr">
+                  <a:tcPr anchor="ctr">
                     <a:lnL w="38100" cap="flat" cmpd="sng" algn="ctr">
                       <a:solidFill>
                         <a:srgbClr val="FFFFFF"/>
@@ -7124,6 +6882,11 @@
                     </a:solidFill>
                   </a:tcPr>
                 </a:tc>
+                <a:extLst>
+                  <a:ext uri="{0D108BD9-81ED-4DB2-BD59-A6C34878D82A}">
+                    <a16:rowId xmlns:a16="http://schemas.microsoft.com/office/drawing/2014/main" val="10001"/>
+                  </a:ext>
+                </a:extLst>
               </a:tr>
               <a:tr h="384048">
                 <a:tc>
@@ -7131,7 +6894,7 @@
                     <a:bodyPr/>
                     <a:lstStyle/>
                     <a:p>
-                      <a:pPr algn="ctr" indent="0" marL="0">
+                      <a:pPr marL="0" indent="0" algn="ctr">
                         <a:buNone/>
                       </a:pPr>
                       <a:r>
@@ -7152,7 +6915,7 @@
                       </a:endParaRPr>
                     </a:p>
                   </a:txBody>
-                  <a:tcPr marL="91440" marR="91440" marT="45720" marB="45720" anchor="ctr">
+                  <a:tcPr anchor="ctr">
                     <a:lnL w="38100" cap="flat" cmpd="sng" algn="ctr">
                       <a:solidFill>
                         <a:srgbClr val="FFFFFF"/>
@@ -7199,7 +6962,7 @@
                     <a:bodyPr/>
                     <a:lstStyle/>
                     <a:p>
-                      <a:pPr algn="ctr" indent="0" marL="0">
+                      <a:pPr marL="0" indent="0" algn="ctr">
                         <a:buNone/>
                       </a:pPr>
                       <a:r>
@@ -7220,7 +6983,7 @@
                       </a:endParaRPr>
                     </a:p>
                   </a:txBody>
-                  <a:tcPr marL="91440" marR="91440" marT="45720" marB="45720" anchor="ctr">
+                  <a:tcPr anchor="ctr">
                     <a:lnL w="38100" cap="flat" cmpd="sng" algn="ctr">
                       <a:solidFill>
                         <a:srgbClr val="FFFFFF"/>
@@ -7267,7 +7030,7 @@
                     <a:bodyPr/>
                     <a:lstStyle/>
                     <a:p>
-                      <a:pPr algn="ctr" indent="0" marL="0">
+                      <a:pPr marL="0" indent="0" algn="ctr">
                         <a:buNone/>
                       </a:pPr>
                       <a:r>
@@ -7288,7 +7051,7 @@
                       </a:endParaRPr>
                     </a:p>
                   </a:txBody>
-                  <a:tcPr marL="91440" marR="91440" marT="45720" marB="45720" anchor="ctr">
+                  <a:tcPr anchor="ctr">
                     <a:lnL w="38100" cap="flat" cmpd="sng" algn="ctr">
                       <a:solidFill>
                         <a:srgbClr val="FFFFFF"/>
@@ -7335,7 +7098,7 @@
                     <a:bodyPr/>
                     <a:lstStyle/>
                     <a:p>
-                      <a:pPr algn="ctr" indent="0" marL="0">
+                      <a:pPr marL="0" indent="0" algn="ctr">
                         <a:buNone/>
                       </a:pPr>
                       <a:r>
@@ -7356,7 +7119,7 @@
                       </a:endParaRPr>
                     </a:p>
                   </a:txBody>
-                  <a:tcPr marL="91440" marR="91440" marT="45720" marB="45720" anchor="ctr">
+                  <a:tcPr anchor="ctr">
                     <a:lnL w="38100" cap="flat" cmpd="sng" algn="ctr">
                       <a:solidFill>
                         <a:srgbClr val="FFFFFF"/>
@@ -7403,7 +7166,7 @@
                     <a:bodyPr/>
                     <a:lstStyle/>
                     <a:p>
-                      <a:pPr algn="ctr" indent="0" marL="0">
+                      <a:pPr marL="0" indent="0" algn="ctr">
                         <a:buNone/>
                       </a:pPr>
                       <a:r>
@@ -7424,7 +7187,7 @@
                       </a:endParaRPr>
                     </a:p>
                   </a:txBody>
-                  <a:tcPr marL="91440" marR="91440" marT="45720" marB="45720" anchor="ctr">
+                  <a:tcPr anchor="ctr">
                     <a:lnL w="38100" cap="flat" cmpd="sng" algn="ctr">
                       <a:solidFill>
                         <a:srgbClr val="FFFFFF"/>
@@ -7466,6 +7229,11 @@
                     </a:solidFill>
                   </a:tcPr>
                 </a:tc>
+                <a:extLst>
+                  <a:ext uri="{0D108BD9-81ED-4DB2-BD59-A6C34878D82A}">
+                    <a16:rowId xmlns:a16="http://schemas.microsoft.com/office/drawing/2014/main" val="10002"/>
+                  </a:ext>
+                </a:extLst>
               </a:tr>
               <a:tr h="384048">
                 <a:tc>
@@ -7473,7 +7241,7 @@
                     <a:bodyPr/>
                     <a:lstStyle/>
                     <a:p>
-                      <a:pPr algn="ctr" indent="0" marL="0">
+                      <a:pPr marL="0" indent="0" algn="ctr">
                         <a:buNone/>
                       </a:pPr>
                       <a:r>
@@ -7494,7 +7262,7 @@
                       </a:endParaRPr>
                     </a:p>
                   </a:txBody>
-                  <a:tcPr marL="91440" marR="91440" marT="45720" marB="45720" anchor="ctr">
+                  <a:tcPr anchor="ctr">
                     <a:lnL w="38100" cap="flat" cmpd="sng" algn="ctr">
                       <a:solidFill>
                         <a:srgbClr val="FFFFFF"/>
@@ -7541,7 +7309,7 @@
                     <a:bodyPr/>
                     <a:lstStyle/>
                     <a:p>
-                      <a:pPr algn="ctr" indent="0" marL="0">
+                      <a:pPr marL="0" indent="0" algn="ctr">
                         <a:buNone/>
                       </a:pPr>
                       <a:r>
@@ -7562,7 +7330,7 @@
                       </a:endParaRPr>
                     </a:p>
                   </a:txBody>
-                  <a:tcPr marL="91440" marR="91440" marT="45720" marB="45720" anchor="ctr">
+                  <a:tcPr anchor="ctr">
                     <a:lnL w="38100" cap="flat" cmpd="sng" algn="ctr">
                       <a:solidFill>
                         <a:srgbClr val="FFFFFF"/>
@@ -7609,7 +7377,7 @@
                     <a:bodyPr/>
                     <a:lstStyle/>
                     <a:p>
-                      <a:pPr algn="ctr" indent="0" marL="0">
+                      <a:pPr marL="0" indent="0" algn="ctr">
                         <a:buNone/>
                       </a:pPr>
                       <a:r>
@@ -7630,7 +7398,7 @@
                       </a:endParaRPr>
                     </a:p>
                   </a:txBody>
-                  <a:tcPr marL="91440" marR="91440" marT="45720" marB="45720" anchor="ctr">
+                  <a:tcPr anchor="ctr">
                     <a:lnL w="38100" cap="flat" cmpd="sng" algn="ctr">
                       <a:solidFill>
                         <a:srgbClr val="FFFFFF"/>
@@ -7677,7 +7445,7 @@
                     <a:bodyPr/>
                     <a:lstStyle/>
                     <a:p>
-                      <a:pPr algn="ctr" indent="0" marL="0">
+                      <a:pPr marL="0" indent="0" algn="ctr">
                         <a:buNone/>
                       </a:pPr>
                       <a:r>
@@ -7698,7 +7466,7 @@
                       </a:endParaRPr>
                     </a:p>
                   </a:txBody>
-                  <a:tcPr marL="91440" marR="91440" marT="45720" marB="45720" anchor="ctr">
+                  <a:tcPr anchor="ctr">
                     <a:lnL w="38100" cap="flat" cmpd="sng" algn="ctr">
                       <a:solidFill>
                         <a:srgbClr val="FFFFFF"/>
@@ -7745,7 +7513,7 @@
                     <a:bodyPr/>
                     <a:lstStyle/>
                     <a:p>
-                      <a:pPr algn="ctr" indent="0" marL="0">
+                      <a:pPr marL="0" indent="0" algn="ctr">
                         <a:buNone/>
                       </a:pPr>
                       <a:r>
@@ -7766,7 +7534,7 @@
                       </a:endParaRPr>
                     </a:p>
                   </a:txBody>
-                  <a:tcPr marL="91440" marR="91440" marT="45720" marB="45720" anchor="ctr">
+                  <a:tcPr anchor="ctr">
                     <a:lnL w="38100" cap="flat" cmpd="sng" algn="ctr">
                       <a:solidFill>
                         <a:srgbClr val="FFFFFF"/>
@@ -7808,6 +7576,11 @@
                     </a:solidFill>
                   </a:tcPr>
                 </a:tc>
+                <a:extLst>
+                  <a:ext uri="{0D108BD9-81ED-4DB2-BD59-A6C34878D82A}">
+                    <a16:rowId xmlns:a16="http://schemas.microsoft.com/office/drawing/2014/main" val="10003"/>
+                  </a:ext>
+                </a:extLst>
               </a:tr>
               <a:tr h="384048">
                 <a:tc>
@@ -7815,7 +7588,7 @@
                     <a:bodyPr/>
                     <a:lstStyle/>
                     <a:p>
-                      <a:pPr algn="ctr" indent="0" marL="0">
+                      <a:pPr marL="0" indent="0" algn="ctr">
                         <a:buNone/>
                       </a:pPr>
                       <a:r>
@@ -7836,7 +7609,7 @@
                       </a:endParaRPr>
                     </a:p>
                   </a:txBody>
-                  <a:tcPr marL="91440" marR="91440" marT="45720" marB="45720" anchor="ctr">
+                  <a:tcPr anchor="ctr">
                     <a:lnL w="38100" cap="flat" cmpd="sng" algn="ctr">
                       <a:solidFill>
                         <a:srgbClr val="FFFFFF"/>
@@ -7883,7 +7656,7 @@
                     <a:bodyPr/>
                     <a:lstStyle/>
                     <a:p>
-                      <a:pPr algn="ctr" indent="0" marL="0">
+                      <a:pPr marL="0" indent="0" algn="ctr">
                         <a:buNone/>
                       </a:pPr>
                       <a:r>
@@ -7904,7 +7677,7 @@
                       </a:endParaRPr>
                     </a:p>
                   </a:txBody>
-                  <a:tcPr marL="91440" marR="91440" marT="45720" marB="45720" anchor="ctr">
+                  <a:tcPr anchor="ctr">
                     <a:lnL w="38100" cap="flat" cmpd="sng" algn="ctr">
                       <a:solidFill>
                         <a:srgbClr val="FFFFFF"/>
@@ -7951,7 +7724,7 @@
                     <a:bodyPr/>
                     <a:lstStyle/>
                     <a:p>
-                      <a:pPr algn="ctr" indent="0" marL="0">
+                      <a:pPr marL="0" indent="0" algn="ctr">
                         <a:buNone/>
                       </a:pPr>
                       <a:r>
@@ -7972,7 +7745,7 @@
                       </a:endParaRPr>
                     </a:p>
                   </a:txBody>
-                  <a:tcPr marL="91440" marR="91440" marT="45720" marB="45720" anchor="ctr">
+                  <a:tcPr anchor="ctr">
                     <a:lnL w="38100" cap="flat" cmpd="sng" algn="ctr">
                       <a:solidFill>
                         <a:srgbClr val="FFFFFF"/>
@@ -8019,7 +7792,7 @@
                     <a:bodyPr/>
                     <a:lstStyle/>
                     <a:p>
-                      <a:pPr algn="ctr" indent="0" marL="0">
+                      <a:pPr marL="0" indent="0" algn="ctr">
                         <a:buNone/>
                       </a:pPr>
                       <a:r>
@@ -8040,7 +7813,7 @@
                       </a:endParaRPr>
                     </a:p>
                   </a:txBody>
-                  <a:tcPr marL="91440" marR="91440" marT="45720" marB="45720" anchor="ctr">
+                  <a:tcPr anchor="ctr">
                     <a:lnL w="38100" cap="flat" cmpd="sng" algn="ctr">
                       <a:solidFill>
                         <a:srgbClr val="FFFFFF"/>
@@ -8087,7 +7860,7 @@
                     <a:bodyPr/>
                     <a:lstStyle/>
                     <a:p>
-                      <a:pPr algn="ctr" indent="0" marL="0">
+                      <a:pPr marL="0" indent="0" algn="ctr">
                         <a:buNone/>
                       </a:pPr>
                       <a:r>
@@ -8108,7 +7881,7 @@
                       </a:endParaRPr>
                     </a:p>
                   </a:txBody>
-                  <a:tcPr marL="91440" marR="91440" marT="45720" marB="45720" anchor="ctr">
+                  <a:tcPr anchor="ctr">
                     <a:lnL w="38100" cap="flat" cmpd="sng" algn="ctr">
                       <a:solidFill>
                         <a:srgbClr val="FFFFFF"/>
@@ -8150,6 +7923,11 @@
                     </a:solidFill>
                   </a:tcPr>
                 </a:tc>
+                <a:extLst>
+                  <a:ext uri="{0D108BD9-81ED-4DB2-BD59-A6C34878D82A}">
+                    <a16:rowId xmlns:a16="http://schemas.microsoft.com/office/drawing/2014/main" val="10004"/>
+                  </a:ext>
+                </a:extLst>
               </a:tr>
               <a:tr h="384048">
                 <a:tc>
@@ -8157,7 +7935,7 @@
                     <a:bodyPr/>
                     <a:lstStyle/>
                     <a:p>
-                      <a:pPr algn="ctr" indent="0" marL="0">
+                      <a:pPr marL="0" indent="0" algn="ctr">
                         <a:buNone/>
                       </a:pPr>
                       <a:r>
@@ -8178,7 +7956,7 @@
                       </a:endParaRPr>
                     </a:p>
                   </a:txBody>
-                  <a:tcPr marL="91440" marR="91440" marT="45720" marB="45720" anchor="ctr">
+                  <a:tcPr anchor="ctr">
                     <a:lnL w="38100" cap="flat" cmpd="sng" algn="ctr">
                       <a:solidFill>
                         <a:srgbClr val="FFFFFF"/>
@@ -8225,7 +8003,7 @@
                     <a:bodyPr/>
                     <a:lstStyle/>
                     <a:p>
-                      <a:pPr algn="ctr" indent="0" marL="0">
+                      <a:pPr marL="0" indent="0" algn="ctr">
                         <a:buNone/>
                       </a:pPr>
                       <a:r>
@@ -8246,7 +8024,7 @@
                       </a:endParaRPr>
                     </a:p>
                   </a:txBody>
-                  <a:tcPr marL="91440" marR="91440" marT="45720" marB="45720" anchor="ctr">
+                  <a:tcPr anchor="ctr">
                     <a:lnL w="38100" cap="flat" cmpd="sng" algn="ctr">
                       <a:solidFill>
                         <a:srgbClr val="FFFFFF"/>
@@ -8293,7 +8071,7 @@
                     <a:bodyPr/>
                     <a:lstStyle/>
                     <a:p>
-                      <a:pPr algn="ctr" indent="0" marL="0">
+                      <a:pPr marL="0" indent="0" algn="ctr">
                         <a:buNone/>
                       </a:pPr>
                       <a:r>
@@ -8314,7 +8092,7 @@
                       </a:endParaRPr>
                     </a:p>
                   </a:txBody>
-                  <a:tcPr marL="91440" marR="91440" marT="45720" marB="45720" anchor="ctr">
+                  <a:tcPr anchor="ctr">
                     <a:lnL w="38100" cap="flat" cmpd="sng" algn="ctr">
                       <a:solidFill>
                         <a:srgbClr val="FFFFFF"/>
@@ -8361,7 +8139,7 @@
                     <a:bodyPr/>
                     <a:lstStyle/>
                     <a:p>
-                      <a:pPr algn="ctr" indent="0" marL="0">
+                      <a:pPr marL="0" indent="0" algn="ctr">
                         <a:buNone/>
                       </a:pPr>
                       <a:r>
@@ -8382,7 +8160,7 @@
                       </a:endParaRPr>
                     </a:p>
                   </a:txBody>
-                  <a:tcPr marL="91440" marR="91440" marT="45720" marB="45720" anchor="ctr">
+                  <a:tcPr anchor="ctr">
                     <a:lnL w="38100" cap="flat" cmpd="sng" algn="ctr">
                       <a:solidFill>
                         <a:srgbClr val="FFFFFF"/>
@@ -8429,7 +8207,7 @@
                     <a:bodyPr/>
                     <a:lstStyle/>
                     <a:p>
-                      <a:pPr algn="ctr" indent="0" marL="0">
+                      <a:pPr marL="0" indent="0" algn="ctr">
                         <a:buNone/>
                       </a:pPr>
                       <a:r>
@@ -8450,7 +8228,7 @@
                       </a:endParaRPr>
                     </a:p>
                   </a:txBody>
-                  <a:tcPr marL="91440" marR="91440" marT="45720" marB="45720" anchor="ctr">
+                  <a:tcPr anchor="ctr">
                     <a:lnL w="38100" cap="flat" cmpd="sng" algn="ctr">
                       <a:solidFill>
                         <a:srgbClr val="FFFFFF"/>
@@ -8492,6 +8270,11 @@
                     </a:solidFill>
                   </a:tcPr>
                 </a:tc>
+                <a:extLst>
+                  <a:ext uri="{0D108BD9-81ED-4DB2-BD59-A6C34878D82A}">
+                    <a16:rowId xmlns:a16="http://schemas.microsoft.com/office/drawing/2014/main" val="10005"/>
+                  </a:ext>
+                </a:extLst>
               </a:tr>
               <a:tr h="384048">
                 <a:tc>
@@ -8499,7 +8282,7 @@
                     <a:bodyPr/>
                     <a:lstStyle/>
                     <a:p>
-                      <a:pPr algn="ctr" indent="0" marL="0">
+                      <a:pPr marL="0" indent="0" algn="ctr">
                         <a:buNone/>
                       </a:pPr>
                       <a:r>
@@ -8520,7 +8303,7 @@
                       </a:endParaRPr>
                     </a:p>
                   </a:txBody>
-                  <a:tcPr marL="91440" marR="91440" marT="45720" marB="45720" anchor="ctr">
+                  <a:tcPr anchor="ctr">
                     <a:lnL w="38100" cap="flat" cmpd="sng" algn="ctr">
                       <a:solidFill>
                         <a:srgbClr val="FFFFFF"/>
@@ -8567,7 +8350,7 @@
                     <a:bodyPr/>
                     <a:lstStyle/>
                     <a:p>
-                      <a:pPr algn="ctr" indent="0" marL="0">
+                      <a:pPr marL="0" indent="0" algn="ctr">
                         <a:buNone/>
                       </a:pPr>
                       <a:r>
@@ -8588,7 +8371,7 @@
                       </a:endParaRPr>
                     </a:p>
                   </a:txBody>
-                  <a:tcPr marL="91440" marR="91440" marT="45720" marB="45720" anchor="ctr">
+                  <a:tcPr anchor="ctr">
                     <a:lnL w="38100" cap="flat" cmpd="sng" algn="ctr">
                       <a:solidFill>
                         <a:srgbClr val="FFFFFF"/>
@@ -8635,7 +8418,7 @@
                     <a:bodyPr/>
                     <a:lstStyle/>
                     <a:p>
-                      <a:pPr algn="ctr" indent="0" marL="0">
+                      <a:pPr marL="0" indent="0" algn="ctr">
                         <a:buNone/>
                       </a:pPr>
                       <a:r>
@@ -8656,7 +8439,7 @@
                       </a:endParaRPr>
                     </a:p>
                   </a:txBody>
-                  <a:tcPr marL="91440" marR="91440" marT="45720" marB="45720" anchor="ctr">
+                  <a:tcPr anchor="ctr">
                     <a:lnL w="38100" cap="flat" cmpd="sng" algn="ctr">
                       <a:solidFill>
                         <a:srgbClr val="FFFFFF"/>
@@ -8703,7 +8486,7 @@
                     <a:bodyPr/>
                     <a:lstStyle/>
                     <a:p>
-                      <a:pPr algn="ctr" indent="0" marL="0">
+                      <a:pPr marL="0" indent="0" algn="ctr">
                         <a:buNone/>
                       </a:pPr>
                       <a:r>
@@ -8724,7 +8507,7 @@
                       </a:endParaRPr>
                     </a:p>
                   </a:txBody>
-                  <a:tcPr marL="91440" marR="91440" marT="45720" marB="45720" anchor="ctr">
+                  <a:tcPr anchor="ctr">
                     <a:lnL w="38100" cap="flat" cmpd="sng" algn="ctr">
                       <a:solidFill>
                         <a:srgbClr val="FFFFFF"/>
@@ -8771,7 +8554,7 @@
                     <a:bodyPr/>
                     <a:lstStyle/>
                     <a:p>
-                      <a:pPr algn="ctr" indent="0" marL="0">
+                      <a:pPr marL="0" indent="0" algn="ctr">
                         <a:buNone/>
                       </a:pPr>
                       <a:r>
@@ -8792,7 +8575,7 @@
                       </a:endParaRPr>
                     </a:p>
                   </a:txBody>
-                  <a:tcPr marL="91440" marR="91440" marT="45720" marB="45720" anchor="ctr">
+                  <a:tcPr anchor="ctr">
                     <a:lnL w="38100" cap="flat" cmpd="sng" algn="ctr">
                       <a:solidFill>
                         <a:srgbClr val="FFFFFF"/>
@@ -8834,6 +8617,11 @@
                     </a:solidFill>
                   </a:tcPr>
                 </a:tc>
+                <a:extLst>
+                  <a:ext uri="{0D108BD9-81ED-4DB2-BD59-A6C34878D82A}">
+                    <a16:rowId xmlns:a16="http://schemas.microsoft.com/office/drawing/2014/main" val="10006"/>
+                  </a:ext>
+                </a:extLst>
               </a:tr>
               <a:tr h="384048">
                 <a:tc>
@@ -8841,7 +8629,7 @@
                     <a:bodyPr/>
                     <a:lstStyle/>
                     <a:p>
-                      <a:pPr algn="ctr" indent="0" marL="0">
+                      <a:pPr marL="0" indent="0" algn="ctr">
                         <a:buNone/>
                       </a:pPr>
                       <a:r>
@@ -8862,7 +8650,7 @@
                       </a:endParaRPr>
                     </a:p>
                   </a:txBody>
-                  <a:tcPr marL="91440" marR="91440" marT="45720" marB="45720" anchor="ctr">
+                  <a:tcPr anchor="ctr">
                     <a:lnL w="38100" cap="flat" cmpd="sng" algn="ctr">
                       <a:solidFill>
                         <a:srgbClr val="FFFFFF"/>
@@ -8909,7 +8697,7 @@
                     <a:bodyPr/>
                     <a:lstStyle/>
                     <a:p>
-                      <a:pPr algn="ctr" indent="0" marL="0">
+                      <a:pPr marL="0" indent="0" algn="ctr">
                         <a:buNone/>
                       </a:pPr>
                       <a:r>
@@ -8930,7 +8718,7 @@
                       </a:endParaRPr>
                     </a:p>
                   </a:txBody>
-                  <a:tcPr marL="91440" marR="91440" marT="45720" marB="45720" anchor="ctr">
+                  <a:tcPr anchor="ctr">
                     <a:lnL w="38100" cap="flat" cmpd="sng" algn="ctr">
                       <a:solidFill>
                         <a:srgbClr val="FFFFFF"/>
@@ -8977,7 +8765,7 @@
                     <a:bodyPr/>
                     <a:lstStyle/>
                     <a:p>
-                      <a:pPr algn="ctr" indent="0" marL="0">
+                      <a:pPr marL="0" indent="0" algn="ctr">
                         <a:buNone/>
                       </a:pPr>
                       <a:r>
@@ -8998,7 +8786,7 @@
                       </a:endParaRPr>
                     </a:p>
                   </a:txBody>
-                  <a:tcPr marL="91440" marR="91440" marT="45720" marB="45720" anchor="ctr">
+                  <a:tcPr anchor="ctr">
                     <a:lnL w="38100" cap="flat" cmpd="sng" algn="ctr">
                       <a:solidFill>
                         <a:srgbClr val="FFFFFF"/>
@@ -9045,7 +8833,7 @@
                     <a:bodyPr/>
                     <a:lstStyle/>
                     <a:p>
-                      <a:pPr algn="ctr" indent="0" marL="0">
+                      <a:pPr marL="0" indent="0" algn="ctr">
                         <a:buNone/>
                       </a:pPr>
                       <a:r>
@@ -9066,7 +8854,7 @@
                       </a:endParaRPr>
                     </a:p>
                   </a:txBody>
-                  <a:tcPr marL="91440" marR="91440" marT="45720" marB="45720" anchor="ctr">
+                  <a:tcPr anchor="ctr">
                     <a:lnL w="38100" cap="flat" cmpd="sng" algn="ctr">
                       <a:solidFill>
                         <a:srgbClr val="FFFFFF"/>
@@ -9113,7 +8901,7 @@
                     <a:bodyPr/>
                     <a:lstStyle/>
                     <a:p>
-                      <a:pPr algn="ctr" indent="0" marL="0">
+                      <a:pPr marL="0" indent="0" algn="ctr">
                         <a:buNone/>
                       </a:pPr>
                       <a:r>
@@ -9134,7 +8922,7 @@
                       </a:endParaRPr>
                     </a:p>
                   </a:txBody>
-                  <a:tcPr marL="91440" marR="91440" marT="45720" marB="45720" anchor="ctr">
+                  <a:tcPr anchor="ctr">
                     <a:lnL w="38100" cap="flat" cmpd="sng" algn="ctr">
                       <a:solidFill>
                         <a:srgbClr val="FFFFFF"/>
@@ -9176,6 +8964,11 @@
                     </a:solidFill>
                   </a:tcPr>
                 </a:tc>
+                <a:extLst>
+                  <a:ext uri="{0D108BD9-81ED-4DB2-BD59-A6C34878D82A}">
+                    <a16:rowId xmlns:a16="http://schemas.microsoft.com/office/drawing/2014/main" val="10007"/>
+                  </a:ext>
+                </a:extLst>
               </a:tr>
               <a:tr h="384048">
                 <a:tc>
@@ -9183,7 +8976,7 @@
                     <a:bodyPr/>
                     <a:lstStyle/>
                     <a:p>
-                      <a:pPr algn="ctr" indent="0" marL="0">
+                      <a:pPr marL="0" indent="0" algn="ctr">
                         <a:buNone/>
                       </a:pPr>
                       <a:r>
@@ -9204,7 +8997,7 @@
                       </a:endParaRPr>
                     </a:p>
                   </a:txBody>
-                  <a:tcPr marL="91440" marR="91440" marT="45720" marB="45720" anchor="ctr">
+                  <a:tcPr anchor="ctr">
                     <a:lnL w="38100" cap="flat" cmpd="sng" algn="ctr">
                       <a:solidFill>
                         <a:srgbClr val="FFFFFF"/>
@@ -9251,7 +9044,7 @@
                     <a:bodyPr/>
                     <a:lstStyle/>
                     <a:p>
-                      <a:pPr algn="ctr" indent="0" marL="0">
+                      <a:pPr marL="0" indent="0" algn="ctr">
                         <a:buNone/>
                       </a:pPr>
                       <a:r>
@@ -9272,7 +9065,7 @@
                       </a:endParaRPr>
                     </a:p>
                   </a:txBody>
-                  <a:tcPr marL="91440" marR="91440" marT="45720" marB="45720" anchor="ctr">
+                  <a:tcPr anchor="ctr">
                     <a:lnL w="38100" cap="flat" cmpd="sng" algn="ctr">
                       <a:solidFill>
                         <a:srgbClr val="FFFFFF"/>
@@ -9319,7 +9112,7 @@
                     <a:bodyPr/>
                     <a:lstStyle/>
                     <a:p>
-                      <a:pPr algn="ctr" indent="0" marL="0">
+                      <a:pPr marL="0" indent="0" algn="ctr">
                         <a:buNone/>
                       </a:pPr>
                       <a:r>
@@ -9340,7 +9133,7 @@
                       </a:endParaRPr>
                     </a:p>
                   </a:txBody>
-                  <a:tcPr marL="91440" marR="91440" marT="45720" marB="45720" anchor="ctr">
+                  <a:tcPr anchor="ctr">
                     <a:lnL w="38100" cap="flat" cmpd="sng" algn="ctr">
                       <a:solidFill>
                         <a:srgbClr val="FFFFFF"/>
@@ -9387,7 +9180,7 @@
                     <a:bodyPr/>
                     <a:lstStyle/>
                     <a:p>
-                      <a:pPr algn="ctr" indent="0" marL="0">
+                      <a:pPr marL="0" indent="0" algn="ctr">
                         <a:buNone/>
                       </a:pPr>
                       <a:r>
@@ -9408,7 +9201,7 @@
                       </a:endParaRPr>
                     </a:p>
                   </a:txBody>
-                  <a:tcPr marL="91440" marR="91440" marT="45720" marB="45720" anchor="ctr">
+                  <a:tcPr anchor="ctr">
                     <a:lnL w="38100" cap="flat" cmpd="sng" algn="ctr">
                       <a:solidFill>
                         <a:srgbClr val="FFFFFF"/>
@@ -9455,7 +9248,7 @@
                     <a:bodyPr/>
                     <a:lstStyle/>
                     <a:p>
-                      <a:pPr algn="ctr" indent="0" marL="0">
+                      <a:pPr marL="0" indent="0" algn="ctr">
                         <a:buNone/>
                       </a:pPr>
                       <a:r>
@@ -9476,7 +9269,7 @@
                       </a:endParaRPr>
                     </a:p>
                   </a:txBody>
-                  <a:tcPr marL="91440" marR="91440" marT="45720" marB="45720" anchor="ctr">
+                  <a:tcPr anchor="ctr">
                     <a:lnL w="38100" cap="flat" cmpd="sng" algn="ctr">
                       <a:solidFill>
                         <a:srgbClr val="FFFFFF"/>
@@ -9518,6 +9311,11 @@
                     </a:solidFill>
                   </a:tcPr>
                 </a:tc>
+                <a:extLst>
+                  <a:ext uri="{0D108BD9-81ED-4DB2-BD59-A6C34878D82A}">
+                    <a16:rowId xmlns:a16="http://schemas.microsoft.com/office/drawing/2014/main" val="10008"/>
+                  </a:ext>
+                </a:extLst>
               </a:tr>
             </a:tbl>
           </a:graphicData>
@@ -9544,7 +9342,7 @@
           <a:bodyPr wrap="square" lIns="0" tIns="0" rIns="0" bIns="0" rtlCol="0" anchor="ctr"/>
           <a:lstStyle/>
           <a:p>
-            <a:pPr algn="r" indent="0" marL="0">
+            <a:pPr marL="0" indent="0" algn="r">
               <a:buNone/>
             </a:pPr>
             <a:r>
@@ -9578,6 +9376,7 @@
         <a:solidFill>
           <a:srgbClr val="FFFFFF"/>
         </a:solidFill>
+        <a:effectLst/>
       </p:bgPr>
     </p:bg>
     <p:spTree>
@@ -9615,11 +9414,11 @@
           <a:bodyPr wrap="square" lIns="0" tIns="0" rIns="0" bIns="0" rtlCol="0" anchor="ctr"/>
           <a:lstStyle/>
           <a:p>
-            <a:pPr algn="l" indent="0" marL="0">
+            <a:pPr marL="0" indent="0" algn="l">
               <a:buNone/>
             </a:pPr>
             <a:r>
-              <a:rPr lang="en-US" sz="1200" b="1" spc="200" kern="0" dirty="0">
+              <a:rPr lang="en-US" sz="1200" b="1" kern="0" spc="200" dirty="0">
                 <a:solidFill>
                   <a:srgbClr val="6C4BC1"/>
                 </a:solidFill>
@@ -9654,7 +9453,7 @@
           <a:bodyPr wrap="square" lIns="0" tIns="0" rIns="0" bIns="0" rtlCol="0" anchor="ctr"/>
           <a:lstStyle/>
           <a:p>
-            <a:pPr indent="0" marL="0">
+            <a:pPr marL="0" indent="0">
               <a:buNone/>
             </a:pPr>
             <a:r>
@@ -9715,7 +9514,7 @@
           <a:bodyPr wrap="square" lIns="0" tIns="0" rIns="0" bIns="0" rtlCol="0" anchor="ctr"/>
           <a:lstStyle/>
           <a:p>
-            <a:pPr algn="ctr" indent="0" marL="0">
+            <a:pPr marL="0" indent="0" algn="ctr">
               <a:buNone/>
             </a:pPr>
             <a:r>
@@ -9776,7 +9575,7 @@
           <a:bodyPr wrap="square" lIns="0" tIns="0" rIns="0" bIns="0" rtlCol="0" anchor="ctr"/>
           <a:lstStyle/>
           <a:p>
-            <a:pPr algn="ctr" indent="0" marL="0">
+            <a:pPr marL="0" indent="0" algn="ctr">
               <a:buNone/>
             </a:pPr>
             <a:r>
@@ -9815,7 +9614,7 @@
           <a:bodyPr wrap="square" lIns="0" tIns="0" rIns="0" bIns="0" rtlCol="0" anchor="ctr"/>
           <a:lstStyle/>
           <a:p>
-            <a:pPr algn="ctr" indent="0" marL="0">
+            <a:pPr marL="0" indent="0" algn="ctr">
               <a:lnSpc>
                 <a:spcPts val="1800"/>
               </a:lnSpc>
@@ -9857,7 +9656,7 @@
           <a:bodyPr wrap="square" lIns="0" tIns="0" rIns="0" bIns="0" rtlCol="0" anchor="ctr"/>
           <a:lstStyle/>
           <a:p>
-            <a:pPr algn="r" indent="0" marL="0">
+            <a:pPr marL="0" indent="0" algn="r">
               <a:buNone/>
             </a:pPr>
             <a:r>
@@ -9891,6 +9690,7 @@
         <a:solidFill>
           <a:srgbClr val="FFFFFF"/>
         </a:solidFill>
+        <a:effectLst/>
       </p:bgPr>
     </p:bg>
     <p:spTree>
@@ -9928,11 +9728,11 @@
           <a:bodyPr wrap="square" lIns="0" tIns="0" rIns="0" bIns="0" rtlCol="0" anchor="ctr"/>
           <a:lstStyle/>
           <a:p>
-            <a:pPr algn="l" indent="0" marL="0">
+            <a:pPr marL="0" indent="0" algn="l">
               <a:buNone/>
             </a:pPr>
             <a:r>
-              <a:rPr lang="en-US" sz="1200" b="1" spc="200" kern="0" dirty="0">
+              <a:rPr lang="en-US" sz="1200" b="1" kern="0" spc="200" dirty="0">
                 <a:solidFill>
                   <a:srgbClr val="6C4BC1"/>
                 </a:solidFill>
@@ -9967,7 +9767,7 @@
           <a:bodyPr wrap="square" lIns="0" tIns="0" rIns="0" bIns="0" rtlCol="0" anchor="ctr"/>
           <a:lstStyle/>
           <a:p>
-            <a:pPr indent="0" marL="0">
+            <a:pPr marL="0" indent="0">
               <a:buNone/>
             </a:pPr>
             <a:r>
@@ -10006,7 +9806,7 @@
           <a:bodyPr wrap="square" lIns="0" tIns="0" rIns="0" bIns="0" rtlCol="0" anchor="ctr"/>
           <a:lstStyle/>
           <a:p>
-            <a:pPr indent="0" marL="0">
+            <a:pPr marL="0" indent="0">
               <a:buNone/>
             </a:pPr>
             <a:r>
@@ -10067,7 +9867,7 @@
           <a:bodyPr wrap="square" lIns="0" tIns="0" rIns="0" bIns="0" rtlCol="0" anchor="ctr"/>
           <a:lstStyle/>
           <a:p>
-            <a:pPr algn="ctr" indent="0" marL="0">
+            <a:pPr marL="0" indent="0" algn="ctr">
               <a:buNone/>
             </a:pPr>
             <a:r>
@@ -10106,7 +9906,7 @@
           <a:bodyPr wrap="square" lIns="0" tIns="0" rIns="0" bIns="0" rtlCol="0" anchor="ctr"/>
           <a:lstStyle/>
           <a:p>
-            <a:pPr algn="ctr" indent="0" marL="0">
+            <a:pPr marL="0" indent="0" algn="ctr">
               <a:buNone/>
             </a:pPr>
             <a:r>
@@ -10167,7 +9967,7 @@
           <a:bodyPr wrap="square" lIns="0" tIns="0" rIns="0" bIns="0" rtlCol="0" anchor="ctr"/>
           <a:lstStyle/>
           <a:p>
-            <a:pPr algn="ctr" indent="0" marL="0">
+            <a:pPr marL="0" indent="0" algn="ctr">
               <a:buNone/>
             </a:pPr>
             <a:r>
@@ -10206,7 +10006,7 @@
           <a:bodyPr wrap="square" lIns="0" tIns="0" rIns="0" bIns="0" rtlCol="0" anchor="ctr"/>
           <a:lstStyle/>
           <a:p>
-            <a:pPr algn="ctr" indent="0" marL="0">
+            <a:pPr marL="0" indent="0" algn="ctr">
               <a:buNone/>
             </a:pPr>
             <a:r>
@@ -10265,7 +10065,7 @@
           <a:bodyPr wrap="square" lIns="0" tIns="0" rIns="0" bIns="0" rtlCol="0" anchor="ctr"/>
           <a:lstStyle/>
           <a:p>
-            <a:pPr algn="ctr" indent="0" marL="0">
+            <a:pPr marL="0" indent="0" algn="ctr">
               <a:buNone/>
             </a:pPr>
             <a:r>
@@ -10326,7 +10126,7 @@
           <a:bodyPr wrap="square" lIns="0" tIns="0" rIns="0" bIns="0" rtlCol="0" anchor="ctr"/>
           <a:lstStyle/>
           <a:p>
-            <a:pPr algn="ctr" indent="0" marL="0">
+            <a:pPr marL="0" indent="0" algn="ctr">
               <a:buNone/>
             </a:pPr>
             <a:r>
@@ -10365,7 +10165,7 @@
           <a:bodyPr wrap="square" lIns="0" tIns="0" rIns="0" bIns="0" rtlCol="0" anchor="ctr"/>
           <a:lstStyle/>
           <a:p>
-            <a:pPr algn="ctr" indent="0" marL="0">
+            <a:pPr marL="0" indent="0" algn="ctr">
               <a:buNone/>
             </a:pPr>
             <a:r>
@@ -10426,7 +10226,7 @@
           <a:bodyPr wrap="square" lIns="0" tIns="0" rIns="0" bIns="0" rtlCol="0" anchor="ctr"/>
           <a:lstStyle/>
           <a:p>
-            <a:pPr algn="ctr" indent="0" marL="0">
+            <a:pPr marL="0" indent="0" algn="ctr">
               <a:buNone/>
             </a:pPr>
             <a:r>
@@ -10465,7 +10265,7 @@
           <a:bodyPr wrap="square" lIns="0" tIns="0" rIns="0" bIns="0" rtlCol="0" anchor="ctr"/>
           <a:lstStyle/>
           <a:p>
-            <a:pPr algn="ctr" indent="0" marL="0">
+            <a:pPr marL="0" indent="0" algn="ctr">
               <a:buNone/>
             </a:pPr>
             <a:r>
@@ -10524,7 +10324,7 @@
           <a:bodyPr wrap="square" lIns="0" tIns="0" rIns="0" bIns="0" rtlCol="0" anchor="ctr"/>
           <a:lstStyle/>
           <a:p>
-            <a:pPr algn="ctr" indent="0" marL="0">
+            <a:pPr marL="0" indent="0" algn="ctr">
               <a:buNone/>
             </a:pPr>
             <a:r>
@@ -10585,7 +10385,7 @@
           <a:bodyPr wrap="square" lIns="0" tIns="0" rIns="0" bIns="0" rtlCol="0" anchor="ctr"/>
           <a:lstStyle/>
           <a:p>
-            <a:pPr algn="ctr" indent="0" marL="0">
+            <a:pPr marL="0" indent="0" algn="ctr">
               <a:buNone/>
             </a:pPr>
             <a:r>
@@ -10624,7 +10424,7 @@
           <a:bodyPr wrap="square" lIns="0" tIns="0" rIns="0" bIns="0" rtlCol="0" anchor="ctr"/>
           <a:lstStyle/>
           <a:p>
-            <a:pPr algn="ctr" indent="0" marL="0">
+            <a:pPr marL="0" indent="0" algn="ctr">
               <a:buNone/>
             </a:pPr>
             <a:r>
@@ -10685,7 +10485,7 @@
           <a:bodyPr wrap="square" lIns="0" tIns="0" rIns="0" bIns="0" rtlCol="0" anchor="ctr"/>
           <a:lstStyle/>
           <a:p>
-            <a:pPr algn="ctr" indent="0" marL="0">
+            <a:pPr marL="0" indent="0" algn="ctr">
               <a:buNone/>
             </a:pPr>
             <a:r>
@@ -10724,7 +10524,7 @@
           <a:bodyPr wrap="square" lIns="0" tIns="0" rIns="0" bIns="0" rtlCol="0" anchor="ctr"/>
           <a:lstStyle/>
           <a:p>
-            <a:pPr algn="ctr" indent="0" marL="0">
+            <a:pPr marL="0" indent="0" algn="ctr">
               <a:buNone/>
             </a:pPr>
             <a:r>
@@ -10783,7 +10583,7 @@
           <a:bodyPr wrap="square" lIns="0" tIns="0" rIns="0" bIns="0" rtlCol="0" anchor="ctr"/>
           <a:lstStyle/>
           <a:p>
-            <a:pPr algn="ctr" indent="0" marL="0">
+            <a:pPr marL="0" indent="0" algn="ctr">
               <a:buNone/>
             </a:pPr>
             <a:r>
@@ -10822,7 +10622,7 @@
           <a:bodyPr wrap="square" lIns="0" tIns="0" rIns="0" bIns="0" rtlCol="0" anchor="ctr"/>
           <a:lstStyle/>
           <a:p>
-            <a:pPr algn="ctr" indent="0" marL="0">
+            <a:pPr marL="0" indent="0" algn="ctr">
               <a:buNone/>
             </a:pPr>
             <a:r>
@@ -10861,7 +10661,7 @@
           <a:bodyPr wrap="square" lIns="0" tIns="0" rIns="0" bIns="0" rtlCol="0" anchor="ctr"/>
           <a:lstStyle/>
           <a:p>
-            <a:pPr algn="r" indent="0" marL="0">
+            <a:pPr marL="0" indent="0" algn="r">
               <a:buNone/>
             </a:pPr>
             <a:r>
@@ -10895,6 +10695,7 @@
         <a:solidFill>
           <a:srgbClr val="141B41"/>
         </a:solidFill>
+        <a:effectLst/>
       </p:bgPr>
     </p:bg>
     <p:spTree>
@@ -10932,11 +10733,11 @@
           <a:bodyPr wrap="square" lIns="0" tIns="0" rIns="0" bIns="0" rtlCol="0" anchor="ctr"/>
           <a:lstStyle/>
           <a:p>
-            <a:pPr algn="l" indent="0" marL="0">
+            <a:pPr marL="0" indent="0" algn="l">
               <a:buNone/>
             </a:pPr>
             <a:r>
-              <a:rPr lang="en-US" sz="1200" b="1" spc="200" kern="0" dirty="0">
+              <a:rPr lang="en-US" sz="1200" b="1" kern="0" spc="200" dirty="0">
                 <a:solidFill>
                   <a:srgbClr val="2FE6C7"/>
                 </a:solidFill>
@@ -10972,14 +10773,14 @@
       </p:sp>
       <p:pic>
         <p:nvPicPr>
-          <p:cNvPr id="4" name="Image 0" descr="preencoded.png">    </p:cNvPr>
+          <p:cNvPr id="4" name="Image 0" descr="preencoded.png"/>
           <p:cNvPicPr>
             <a:picLocks noChangeAspect="1"/>
           </p:cNvPicPr>
           <p:nvPr/>
         </p:nvPicPr>
         <p:blipFill>
-          <a:blip r:embed="rId1"/>
+          <a:blip r:embed="rId3"/>
           <a:stretch>
             <a:fillRect/>
           </a:stretch>
@@ -11015,7 +10816,7 @@
           <a:bodyPr wrap="square" lIns="0" tIns="0" rIns="0" bIns="0" rtlCol="0" anchor="ctr"/>
           <a:lstStyle/>
           <a:p>
-            <a:pPr indent="0" marL="0">
+            <a:pPr marL="0" indent="0">
               <a:buNone/>
             </a:pPr>
             <a:r>
@@ -11054,7 +10855,7 @@
           <a:bodyPr wrap="square" lIns="0" tIns="0" rIns="0" bIns="0" rtlCol="0" anchor="ctr"/>
           <a:lstStyle/>
           <a:p>
-            <a:pPr indent="0" marL="0">
+            <a:pPr marL="0" indent="0">
               <a:lnSpc>
                 <a:spcPts val="2100"/>
               </a:lnSpc>
@@ -11123,7 +10924,7 @@
           <a:bodyPr wrap="square" lIns="0" tIns="0" rIns="0" bIns="0" rtlCol="0" anchor="ctr"/>
           <a:lstStyle/>
           <a:p>
-            <a:pPr algn="ctr" indent="0" marL="0">
+            <a:pPr marL="0" indent="0" algn="ctr">
               <a:buNone/>
             </a:pPr>
             <a:r>
@@ -11162,7 +10963,7 @@
           <a:bodyPr wrap="square" lIns="0" tIns="0" rIns="0" bIns="0" rtlCol="0" anchor="ctr"/>
           <a:lstStyle/>
           <a:p>
-            <a:pPr algn="ctr" indent="0" marL="0">
+            <a:pPr marL="0" indent="0" algn="ctr">
               <a:buNone/>
             </a:pPr>
             <a:r>
@@ -11201,7 +11002,7 @@
           <a:bodyPr wrap="square" lIns="0" tIns="0" rIns="0" bIns="0" rtlCol="0" anchor="ctr"/>
           <a:lstStyle/>
           <a:p>
-            <a:pPr algn="ctr" indent="0" marL="0">
+            <a:pPr marL="0" indent="0" algn="ctr">
               <a:buNone/>
             </a:pPr>
             <a:r>
@@ -11267,7 +11068,7 @@
           <a:bodyPr wrap="square" lIns="0" tIns="0" rIns="0" bIns="0" rtlCol="0" anchor="ctr"/>
           <a:lstStyle/>
           <a:p>
-            <a:pPr algn="ctr" indent="0" marL="0">
+            <a:pPr marL="0" indent="0" algn="ctr">
               <a:buNone/>
             </a:pPr>
             <a:r>
@@ -11306,7 +11107,7 @@
           <a:bodyPr wrap="square" lIns="0" tIns="0" rIns="0" bIns="0" rtlCol="0" anchor="ctr"/>
           <a:lstStyle/>
           <a:p>
-            <a:pPr algn="ctr" indent="0" marL="0">
+            <a:pPr marL="0" indent="0" algn="ctr">
               <a:buNone/>
             </a:pPr>
             <a:r>
@@ -11345,7 +11146,7 @@
           <a:bodyPr wrap="square" lIns="0" tIns="0" rIns="0" bIns="0" rtlCol="0" anchor="ctr"/>
           <a:lstStyle/>
           <a:p>
-            <a:pPr algn="ctr" indent="0" marL="0">
+            <a:pPr marL="0" indent="0" algn="ctr">
               <a:buNone/>
             </a:pPr>
             <a:r>
@@ -11411,7 +11212,7 @@
           <a:bodyPr wrap="square" lIns="0" tIns="0" rIns="0" bIns="0" rtlCol="0" anchor="ctr"/>
           <a:lstStyle/>
           <a:p>
-            <a:pPr algn="ctr" indent="0" marL="0">
+            <a:pPr marL="0" indent="0" algn="ctr">
               <a:buNone/>
             </a:pPr>
             <a:r>
@@ -11450,7 +11251,7 @@
           <a:bodyPr wrap="square" lIns="0" tIns="0" rIns="0" bIns="0" rtlCol="0" anchor="ctr"/>
           <a:lstStyle/>
           <a:p>
-            <a:pPr algn="ctr" indent="0" marL="0">
+            <a:pPr marL="0" indent="0" algn="ctr">
               <a:buNone/>
             </a:pPr>
             <a:r>
@@ -11489,7 +11290,7 @@
           <a:bodyPr wrap="square" lIns="0" tIns="0" rIns="0" bIns="0" rtlCol="0" anchor="ctr"/>
           <a:lstStyle/>
           <a:p>
-            <a:pPr algn="ctr" indent="0" marL="0">
+            <a:pPr marL="0" indent="0" algn="ctr">
               <a:buNone/>
             </a:pPr>
             <a:r>
@@ -11555,7 +11356,7 @@
           <a:bodyPr wrap="square" lIns="0" tIns="0" rIns="0" bIns="0" rtlCol="0" anchor="ctr"/>
           <a:lstStyle/>
           <a:p>
-            <a:pPr algn="ctr" indent="0" marL="0">
+            <a:pPr marL="0" indent="0" algn="ctr">
               <a:buNone/>
             </a:pPr>
             <a:r>
@@ -11594,7 +11395,7 @@
           <a:bodyPr wrap="square" lIns="0" tIns="0" rIns="0" bIns="0" rtlCol="0" anchor="ctr"/>
           <a:lstStyle/>
           <a:p>
-            <a:pPr algn="ctr" indent="0" marL="0">
+            <a:pPr marL="0" indent="0" algn="ctr">
               <a:buNone/>
             </a:pPr>
             <a:r>
@@ -11633,7 +11434,7 @@
           <a:bodyPr wrap="square" lIns="0" tIns="0" rIns="0" bIns="0" rtlCol="0" anchor="ctr"/>
           <a:lstStyle/>
           <a:p>
-            <a:pPr algn="r" indent="0" marL="0">
+            <a:pPr marL="0" indent="0" algn="r">
               <a:buNone/>
             </a:pPr>
             <a:r>
@@ -11667,6 +11468,7 @@
         <a:solidFill>
           <a:srgbClr val="FFFFFF"/>
         </a:solidFill>
+        <a:effectLst/>
       </p:bgPr>
     </p:bg>
     <p:spTree>
@@ -11704,11 +11506,11 @@
           <a:bodyPr wrap="square" lIns="0" tIns="0" rIns="0" bIns="0" rtlCol="0" anchor="ctr"/>
           <a:lstStyle/>
           <a:p>
-            <a:pPr algn="l" indent="0" marL="0">
+            <a:pPr marL="0" indent="0" algn="l">
               <a:buNone/>
             </a:pPr>
             <a:r>
-              <a:rPr lang="en-US" sz="1200" b="1" spc="200" kern="0" dirty="0">
+              <a:rPr lang="en-US" sz="1200" b="1" kern="0" spc="200" dirty="0">
                 <a:solidFill>
                   <a:srgbClr val="6C4BC1"/>
                 </a:solidFill>
@@ -11744,14 +11546,14 @@
       </p:sp>
       <p:pic>
         <p:nvPicPr>
-          <p:cNvPr id="4" name="Image 0" descr="preencoded.png">    </p:cNvPr>
+          <p:cNvPr id="4" name="Image 0" descr="preencoded.png"/>
           <p:cNvPicPr>
             <a:picLocks noChangeAspect="1"/>
           </p:cNvPicPr>
           <p:nvPr/>
         </p:nvPicPr>
         <p:blipFill>
-          <a:blip r:embed="rId1"/>
+          <a:blip r:embed="rId3"/>
           <a:stretch>
             <a:fillRect/>
           </a:stretch>
@@ -11787,7 +11589,7 @@
           <a:bodyPr wrap="square" lIns="0" tIns="0" rIns="0" bIns="0" rtlCol="0" anchor="ctr"/>
           <a:lstStyle/>
           <a:p>
-            <a:pPr indent="0" marL="0">
+            <a:pPr marL="0" indent="0">
               <a:buNone/>
             </a:pPr>
             <a:r>
@@ -11848,7 +11650,7 @@
           <a:bodyPr wrap="square" lIns="0" tIns="0" rIns="0" bIns="0" rtlCol="0" anchor="ctr"/>
           <a:lstStyle/>
           <a:p>
-            <a:pPr indent="0" marL="0">
+            <a:pPr marL="0" indent="0">
               <a:lnSpc>
                 <a:spcPts val="1900"/>
               </a:lnSpc>
@@ -11890,7 +11692,7 @@
           <a:bodyPr wrap="square" lIns="0" tIns="0" rIns="0" bIns="0" rtlCol="0" anchor="ctr"/>
           <a:lstStyle/>
           <a:p>
-            <a:pPr indent="0" marL="0">
+            <a:pPr marL="0" indent="0">
               <a:lnSpc>
                 <a:spcPts val="1900"/>
               </a:lnSpc>
@@ -11954,7 +11756,7 @@
           <a:bodyPr wrap="square" lIns="0" tIns="0" rIns="0" bIns="0" rtlCol="0" anchor="ctr"/>
           <a:lstStyle/>
           <a:p>
-            <a:pPr indent="0" marL="0">
+            <a:pPr marL="0" indent="0">
               <a:lnSpc>
                 <a:spcPts val="1900"/>
               </a:lnSpc>
@@ -11996,7 +11798,7 @@
           <a:bodyPr wrap="square" lIns="0" tIns="0" rIns="0" bIns="0" rtlCol="0" anchor="ctr"/>
           <a:lstStyle/>
           <a:p>
-            <a:pPr indent="0" marL="0">
+            <a:pPr marL="0" indent="0">
               <a:lnSpc>
                 <a:spcPts val="1900"/>
               </a:lnSpc>
@@ -12060,7 +11862,7 @@
           <a:bodyPr wrap="square" lIns="0" tIns="0" rIns="0" bIns="0" rtlCol="0" anchor="ctr"/>
           <a:lstStyle/>
           <a:p>
-            <a:pPr indent="0" marL="0">
+            <a:pPr marL="0" indent="0">
               <a:lnSpc>
                 <a:spcPts val="1900"/>
               </a:lnSpc>
@@ -12102,7 +11904,7 @@
           <a:bodyPr wrap="square" lIns="0" tIns="0" rIns="0" bIns="0" rtlCol="0" anchor="ctr"/>
           <a:lstStyle/>
           <a:p>
-            <a:pPr indent="0" marL="0">
+            <a:pPr marL="0" indent="0">
               <a:lnSpc>
                 <a:spcPts val="1900"/>
               </a:lnSpc>
@@ -12144,7 +11946,7 @@
           <a:bodyPr wrap="square" lIns="0" tIns="0" rIns="0" bIns="0" rtlCol="0" anchor="ctr"/>
           <a:lstStyle/>
           <a:p>
-            <a:pPr algn="r" indent="0" marL="0">
+            <a:pPr marL="0" indent="0" algn="r">
               <a:buNone/>
             </a:pPr>
             <a:r>
@@ -12178,6 +11980,7 @@
         <a:solidFill>
           <a:srgbClr val="6C4BC1"/>
         </a:solidFill>
+        <a:effectLst/>
       </p:bgPr>
     </p:bg>
     <p:spTree>
@@ -12264,14 +12067,14 @@
       </p:sp>
       <p:pic>
         <p:nvPicPr>
-          <p:cNvPr id="5" name="Image 0" descr="preencoded.png">    </p:cNvPr>
+          <p:cNvPr id="5" name="Image 0" descr="preencoded.png"/>
           <p:cNvPicPr>
             <a:picLocks noChangeAspect="1"/>
           </p:cNvPicPr>
           <p:nvPr/>
         </p:nvPicPr>
         <p:blipFill>
-          <a:blip r:embed="rId1"/>
+          <a:blip r:embed="rId3"/>
           <a:stretch>
             <a:fillRect/>
           </a:stretch>
@@ -12307,7 +12110,7 @@
           <a:bodyPr wrap="square" lIns="0" tIns="0" rIns="0" bIns="0" rtlCol="0" anchor="ctr"/>
           <a:lstStyle/>
           <a:p>
-            <a:pPr algn="ctr" indent="0" marL="0">
+            <a:pPr marL="0" indent="0" algn="ctr">
               <a:buNone/>
             </a:pPr>
             <a:r>
@@ -12346,7 +12149,7 @@
           <a:bodyPr wrap="square" lIns="0" tIns="0" rIns="0" bIns="0" rtlCol="0" anchor="ctr"/>
           <a:lstStyle/>
           <a:p>
-            <a:pPr algn="ctr" indent="0" marL="0">
+            <a:pPr marL="0" indent="0" algn="ctr">
               <a:buNone/>
             </a:pPr>
             <a:r>
@@ -12380,6 +12183,7 @@
         <a:solidFill>
           <a:srgbClr val="FFFFFF"/>
         </a:solidFill>
+        <a:effectLst/>
       </p:bgPr>
     </p:bg>
     <p:spTree>
@@ -12417,11 +12221,11 @@
           <a:bodyPr wrap="square" lIns="0" tIns="0" rIns="0" bIns="0" rtlCol="0" anchor="ctr"/>
           <a:lstStyle/>
           <a:p>
-            <a:pPr algn="l" indent="0" marL="0">
+            <a:pPr marL="0" indent="0" algn="l">
               <a:buNone/>
             </a:pPr>
             <a:r>
-              <a:rPr lang="en-US" sz="1200" b="1" spc="200" kern="0" dirty="0">
+              <a:rPr lang="en-US" sz="1200" b="1" kern="0" spc="200" dirty="0">
                 <a:solidFill>
                   <a:srgbClr val="6C4BC1"/>
                 </a:solidFill>
@@ -12456,7 +12260,7 @@
           <a:bodyPr wrap="square" lIns="0" tIns="0" rIns="0" bIns="0" rtlCol="0" anchor="ctr"/>
           <a:lstStyle/>
           <a:p>
-            <a:pPr indent="0" marL="0">
+            <a:pPr marL="0" indent="0">
               <a:buNone/>
             </a:pPr>
             <a:r>
@@ -12496,257 +12300,7 @@
       </p:sp>
       <p:pic>
         <p:nvPicPr>
-          <p:cNvPr id="5" name="Image 0" descr="preencoded.png">    </p:cNvPr>
-          <p:cNvPicPr>
-            <a:picLocks noChangeAspect="1"/>
-          </p:cNvPicPr>
-          <p:nvPr/>
-        </p:nvPicPr>
-        <p:blipFill>
-          <a:blip r:embed="rId1"/>
-          <a:stretch>
-            <a:fillRect/>
-          </a:stretch>
-        </p:blipFill>
-        <p:spPr>
-          <a:xfrm>
-            <a:off x="786384" y="2112264"/>
-            <a:ext cx="310896" cy="310896"/>
-          </a:xfrm>
-          <a:prstGeom prst="rect">
-            <a:avLst/>
-          </a:prstGeom>
-        </p:spPr>
-      </p:pic>
-      <p:sp>
-        <p:nvSpPr>
-          <p:cNvPr id="6" name="Text 3"/>
-          <p:cNvSpPr/>
-          <p:nvPr/>
-        </p:nvSpPr>
-        <p:spPr>
-          <a:xfrm>
-            <a:off x="1463040" y="1920240"/>
-            <a:ext cx="9692640" cy="457200"/>
-          </a:xfrm>
-          <a:prstGeom prst="rect">
-            <a:avLst/>
-          </a:prstGeom>
-          <a:noFill/>
-          <a:ln/>
-        </p:spPr>
-        <p:txBody>
-          <a:bodyPr wrap="square" lIns="0" tIns="0" rIns="0" bIns="0" rtlCol="0" anchor="ctr"/>
-          <a:lstStyle/>
-          <a:p>
-            <a:pPr indent="0" marL="0">
-              <a:lnSpc>
-                <a:spcPts val="2000"/>
-              </a:lnSpc>
-              <a:buNone/>
-            </a:pPr>
-            <a:r>
-              <a:rPr lang="en-US" sz="1650" b="1" dirty="0">
-                <a:solidFill>
-                  <a:srgbClr val="1B1B2F"/>
-                </a:solidFill>
-                <a:latin typeface="Calibri" pitchFamily="34" charset="0"/>
-                <a:ea typeface="Calibri" pitchFamily="34" charset="-122"/>
-                <a:cs typeface="Calibri" pitchFamily="34" charset="-120"/>
-              </a:rPr>
-              <a:t>Portas lógicas e seus símbolos</a:t>
-            </a:r>
-            <a:endParaRPr lang="en-US" sz="1650" dirty="0"/>
-          </a:p>
-        </p:txBody>
-      </p:sp>
-      <p:sp>
-        <p:nvSpPr>
-          <p:cNvPr id="7" name="Text 4"/>
-          <p:cNvSpPr/>
-          <p:nvPr/>
-        </p:nvSpPr>
-        <p:spPr>
-          <a:xfrm>
-            <a:off x="1463040" y="2386584"/>
-            <a:ext cx="9692640" cy="411480"/>
-          </a:xfrm>
-          <a:prstGeom prst="rect">
-            <a:avLst/>
-          </a:prstGeom>
-          <a:noFill/>
-          <a:ln/>
-        </p:spPr>
-        <p:txBody>
-          <a:bodyPr wrap="square" lIns="0" tIns="0" rIns="0" bIns="0" rtlCol="0" anchor="ctr"/>
-          <a:lstStyle/>
-          <a:p>
-            <a:pPr indent="0" marL="0">
-              <a:buNone/>
-            </a:pPr>
-            <a:r>
-              <a:rPr lang="en-US" sz="1300" dirty="0">
-                <a:solidFill>
-                  <a:srgbClr val="6B6B80"/>
-                </a:solidFill>
-                <a:latin typeface="Calibri" pitchFamily="34" charset="0"/>
-                <a:ea typeface="Calibri" pitchFamily="34" charset="-122"/>
-                <a:cs typeface="Calibri" pitchFamily="34" charset="-120"/>
-              </a:rPr>
-              <a:t>Cada operação booleana, agora como componente físico.</a:t>
-            </a:r>
-            <a:endParaRPr lang="en-US" sz="1300" dirty="0"/>
-          </a:p>
-        </p:txBody>
-      </p:sp>
-      <p:sp>
-        <p:nvSpPr>
-          <p:cNvPr id="8" name="Shape 5"/>
-          <p:cNvSpPr/>
-          <p:nvPr/>
-        </p:nvSpPr>
-        <p:spPr>
-          <a:xfrm>
-            <a:off x="640080" y="3081528"/>
-            <a:ext cx="603504" cy="603504"/>
-          </a:xfrm>
-          <a:prstGeom prst="ellipse">
-            <a:avLst/>
-          </a:prstGeom>
-          <a:solidFill>
-            <a:srgbClr val="6C4BC1"/>
-          </a:solidFill>
-          <a:ln/>
-        </p:spPr>
-      </p:sp>
-      <p:pic>
-        <p:nvPicPr>
-          <p:cNvPr id="9" name="Image 1" descr="preencoded.png">    </p:cNvPr>
-          <p:cNvPicPr>
-            <a:picLocks noChangeAspect="1"/>
-          </p:cNvPicPr>
-          <p:nvPr/>
-        </p:nvPicPr>
-        <p:blipFill>
-          <a:blip r:embed="rId2"/>
-          <a:stretch>
-            <a:fillRect/>
-          </a:stretch>
-        </p:blipFill>
-        <p:spPr>
-          <a:xfrm>
-            <a:off x="786384" y="3227832"/>
-            <a:ext cx="310896" cy="310896"/>
-          </a:xfrm>
-          <a:prstGeom prst="rect">
-            <a:avLst/>
-          </a:prstGeom>
-        </p:spPr>
-      </p:pic>
-      <p:sp>
-        <p:nvSpPr>
-          <p:cNvPr id="10" name="Text 6"/>
-          <p:cNvSpPr/>
-          <p:nvPr/>
-        </p:nvSpPr>
-        <p:spPr>
-          <a:xfrm>
-            <a:off x="1463040" y="3035808"/>
-            <a:ext cx="9692640" cy="457200"/>
-          </a:xfrm>
-          <a:prstGeom prst="rect">
-            <a:avLst/>
-          </a:prstGeom>
-          <a:noFill/>
-          <a:ln/>
-        </p:spPr>
-        <p:txBody>
-          <a:bodyPr wrap="square" lIns="0" tIns="0" rIns="0" bIns="0" rtlCol="0" anchor="ctr"/>
-          <a:lstStyle/>
-          <a:p>
-            <a:pPr indent="0" marL="0">
-              <a:lnSpc>
-                <a:spcPts val="2000"/>
-              </a:lnSpc>
-              <a:buNone/>
-            </a:pPr>
-            <a:r>
-              <a:rPr lang="en-US" sz="1650" b="1" dirty="0">
-                <a:solidFill>
-                  <a:srgbClr val="1B1B2F"/>
-                </a:solidFill>
-                <a:latin typeface="Calibri" pitchFamily="34" charset="0"/>
-                <a:ea typeface="Calibri" pitchFamily="34" charset="-122"/>
-                <a:cs typeface="Calibri" pitchFamily="34" charset="-120"/>
-              </a:rPr>
-              <a:t>Da tabela-verdade ao circuito</a:t>
-            </a:r>
-            <a:endParaRPr lang="en-US" sz="1650" dirty="0"/>
-          </a:p>
-        </p:txBody>
-      </p:sp>
-      <p:sp>
-        <p:nvSpPr>
-          <p:cNvPr id="11" name="Text 7"/>
-          <p:cNvSpPr/>
-          <p:nvPr/>
-        </p:nvSpPr>
-        <p:spPr>
-          <a:xfrm>
-            <a:off x="1463040" y="3502152"/>
-            <a:ext cx="9692640" cy="411480"/>
-          </a:xfrm>
-          <a:prstGeom prst="rect">
-            <a:avLst/>
-          </a:prstGeom>
-          <a:noFill/>
-          <a:ln/>
-        </p:spPr>
-        <p:txBody>
-          <a:bodyPr wrap="square" lIns="0" tIns="0" rIns="0" bIns="0" rtlCol="0" anchor="ctr"/>
-          <a:lstStyle/>
-          <a:p>
-            <a:pPr indent="0" marL="0">
-              <a:buNone/>
-            </a:pPr>
-            <a:r>
-              <a:rPr lang="en-US" sz="1300" dirty="0">
-                <a:solidFill>
-                  <a:srgbClr val="6B6B80"/>
-                </a:solidFill>
-                <a:latin typeface="Calibri" pitchFamily="34" charset="0"/>
-                <a:ea typeface="Calibri" pitchFamily="34" charset="-122"/>
-                <a:cs typeface="Calibri" pitchFamily="34" charset="-120"/>
-              </a:rPr>
-              <a:t>O caminho completo: especificação → expressão → circuito.</a:t>
-            </a:r>
-            <a:endParaRPr lang="en-US" sz="1300" dirty="0"/>
-          </a:p>
-        </p:txBody>
-      </p:sp>
-      <p:sp>
-        <p:nvSpPr>
-          <p:cNvPr id="12" name="Shape 8"/>
-          <p:cNvSpPr/>
-          <p:nvPr/>
-        </p:nvSpPr>
-        <p:spPr>
-          <a:xfrm>
-            <a:off x="640080" y="4197096"/>
-            <a:ext cx="603504" cy="603504"/>
-          </a:xfrm>
-          <a:prstGeom prst="ellipse">
-            <a:avLst/>
-          </a:prstGeom>
-          <a:solidFill>
-            <a:srgbClr val="6C4BC1"/>
-          </a:solidFill>
-          <a:ln/>
-        </p:spPr>
-      </p:sp>
-      <p:pic>
-        <p:nvPicPr>
-          <p:cNvPr id="13" name="Image 2" descr="preencoded.png">    </p:cNvPr>
+          <p:cNvPr id="5" name="Image 0" descr="preencoded.png"/>
           <p:cNvPicPr>
             <a:picLocks noChangeAspect="1"/>
           </p:cNvPicPr>
@@ -12760,7 +12314,7 @@
         </p:blipFill>
         <p:spPr>
           <a:xfrm>
-            <a:off x="786384" y="4343400"/>
+            <a:off x="786384" y="2112264"/>
             <a:ext cx="310896" cy="310896"/>
           </a:xfrm>
           <a:prstGeom prst="rect">
@@ -12770,13 +12324,13 @@
       </p:pic>
       <p:sp>
         <p:nvSpPr>
-          <p:cNvPr id="14" name="Text 9"/>
-          <p:cNvSpPr/>
-          <p:nvPr/>
-        </p:nvSpPr>
-        <p:spPr>
-          <a:xfrm>
-            <a:off x="1463040" y="4151376"/>
+          <p:cNvPr id="6" name="Text 3"/>
+          <p:cNvSpPr/>
+          <p:nvPr/>
+        </p:nvSpPr>
+        <p:spPr>
+          <a:xfrm>
+            <a:off x="1463040" y="1920240"/>
             <a:ext cx="9692640" cy="457200"/>
           </a:xfrm>
           <a:prstGeom prst="rect">
@@ -12789,7 +12343,7 @@
           <a:bodyPr wrap="square" lIns="0" tIns="0" rIns="0" bIns="0" rtlCol="0" anchor="ctr"/>
           <a:lstStyle/>
           <a:p>
-            <a:pPr indent="0" marL="0">
+            <a:pPr marL="0" indent="0">
               <a:lnSpc>
                 <a:spcPts val="2000"/>
               </a:lnSpc>
@@ -12804,7 +12358,7 @@
                 <a:ea typeface="Calibri" pitchFamily="34" charset="-122"/>
                 <a:cs typeface="Calibri" pitchFamily="34" charset="-120"/>
               </a:rPr>
-              <a:t>Meio somador (half adder)</a:t>
+              <a:t>Portas lógicas e seus símbolos</a:t>
             </a:r>
             <a:endParaRPr lang="en-US" sz="1650" dirty="0"/>
           </a:p>
@@ -12812,13 +12366,13 @@
       </p:sp>
       <p:sp>
         <p:nvSpPr>
-          <p:cNvPr id="15" name="Text 10"/>
-          <p:cNvSpPr/>
-          <p:nvPr/>
-        </p:nvSpPr>
-        <p:spPr>
-          <a:xfrm>
-            <a:off x="1463040" y="4617720"/>
+          <p:cNvPr id="7" name="Text 4"/>
+          <p:cNvSpPr/>
+          <p:nvPr/>
+        </p:nvSpPr>
+        <p:spPr>
+          <a:xfrm>
+            <a:off x="1463040" y="2386584"/>
             <a:ext cx="9692640" cy="411480"/>
           </a:xfrm>
           <a:prstGeom prst="rect">
@@ -12831,7 +12385,7 @@
           <a:bodyPr wrap="square" lIns="0" tIns="0" rIns="0" bIns="0" rtlCol="0" anchor="ctr"/>
           <a:lstStyle/>
           <a:p>
-            <a:pPr indent="0" marL="0">
+            <a:pPr marL="0" indent="0">
               <a:buNone/>
             </a:pPr>
             <a:r>
@@ -12843,7 +12397,7 @@
                 <a:ea typeface="Calibri" pitchFamily="34" charset="-122"/>
                 <a:cs typeface="Calibri" pitchFamily="34" charset="-120"/>
               </a:rPr>
-              <a:t>O primeiro circuito aritmético — soma dois bits.</a:t>
+              <a:t>Cada operação booleana, agora como componente físico.</a:t>
             </a:r>
             <a:endParaRPr lang="en-US" sz="1300" dirty="0"/>
           </a:p>
@@ -12851,13 +12405,13 @@
       </p:sp>
       <p:sp>
         <p:nvSpPr>
-          <p:cNvPr id="16" name="Shape 11"/>
-          <p:cNvSpPr/>
-          <p:nvPr/>
-        </p:nvSpPr>
-        <p:spPr>
-          <a:xfrm>
-            <a:off x="640080" y="5312664"/>
+          <p:cNvPr id="8" name="Shape 5"/>
+          <p:cNvSpPr/>
+          <p:nvPr/>
+        </p:nvSpPr>
+        <p:spPr>
+          <a:xfrm>
+            <a:off x="640080" y="3081528"/>
             <a:ext cx="603504" cy="603504"/>
           </a:xfrm>
           <a:prstGeom prst="ellipse">
@@ -12871,7 +12425,7 @@
       </p:sp>
       <p:pic>
         <p:nvPicPr>
-          <p:cNvPr id="17" name="Image 3" descr="preencoded.png">    </p:cNvPr>
+          <p:cNvPr id="9" name="Image 1" descr="preencoded.png"/>
           <p:cNvPicPr>
             <a:picLocks noChangeAspect="1"/>
           </p:cNvPicPr>
@@ -12885,7 +12439,7 @@
         </p:blipFill>
         <p:spPr>
           <a:xfrm>
-            <a:off x="786384" y="5458968"/>
+            <a:off x="786384" y="3227832"/>
             <a:ext cx="310896" cy="310896"/>
           </a:xfrm>
           <a:prstGeom prst="rect">
@@ -12895,13 +12449,13 @@
       </p:pic>
       <p:sp>
         <p:nvSpPr>
-          <p:cNvPr id="18" name="Text 12"/>
-          <p:cNvSpPr/>
-          <p:nvPr/>
-        </p:nvSpPr>
-        <p:spPr>
-          <a:xfrm>
-            <a:off x="1463040" y="5266944"/>
+          <p:cNvPr id="10" name="Text 6"/>
+          <p:cNvSpPr/>
+          <p:nvPr/>
+        </p:nvSpPr>
+        <p:spPr>
+          <a:xfrm>
+            <a:off x="1463040" y="3035808"/>
             <a:ext cx="9692640" cy="457200"/>
           </a:xfrm>
           <a:prstGeom prst="rect">
@@ -12914,7 +12468,7 @@
           <a:bodyPr wrap="square" lIns="0" tIns="0" rIns="0" bIns="0" rtlCol="0" anchor="ctr"/>
           <a:lstStyle/>
           <a:p>
-            <a:pPr indent="0" marL="0">
+            <a:pPr marL="0" indent="0">
               <a:lnSpc>
                 <a:spcPts val="2000"/>
               </a:lnSpc>
@@ -12929,7 +12483,7 @@
                 <a:ea typeface="Calibri" pitchFamily="34" charset="-122"/>
                 <a:cs typeface="Calibri" pitchFamily="34" charset="-120"/>
               </a:rPr>
-              <a:t>Por que álgebra booleana é a base do hardware</a:t>
+              <a:t>Da tabela-verdade ao circuito</a:t>
             </a:r>
             <a:endParaRPr lang="en-US" sz="1650" dirty="0"/>
           </a:p>
@@ -12937,13 +12491,13 @@
       </p:sp>
       <p:sp>
         <p:nvSpPr>
-          <p:cNvPr id="19" name="Text 13"/>
-          <p:cNvSpPr/>
-          <p:nvPr/>
-        </p:nvSpPr>
-        <p:spPr>
-          <a:xfrm>
-            <a:off x="1463040" y="5733288"/>
+          <p:cNvPr id="11" name="Text 7"/>
+          <p:cNvSpPr/>
+          <p:nvPr/>
+        </p:nvSpPr>
+        <p:spPr>
+          <a:xfrm>
+            <a:off x="1463040" y="3502152"/>
             <a:ext cx="9692640" cy="411480"/>
           </a:xfrm>
           <a:prstGeom prst="rect">
@@ -12956,7 +12510,7 @@
           <a:bodyPr wrap="square" lIns="0" tIns="0" rIns="0" bIns="0" rtlCol="0" anchor="ctr"/>
           <a:lstStyle/>
           <a:p>
-            <a:pPr indent="0" marL="0">
+            <a:pPr marL="0" indent="0">
               <a:buNone/>
             </a:pPr>
             <a:r>
@@ -12968,6 +12522,256 @@
                 <a:ea typeface="Calibri" pitchFamily="34" charset="-122"/>
                 <a:cs typeface="Calibri" pitchFamily="34" charset="-120"/>
               </a:rPr>
+              <a:t>O caminho completo: especificação → expressão → circuito.</a:t>
+            </a:r>
+            <a:endParaRPr lang="en-US" sz="1300" dirty="0"/>
+          </a:p>
+        </p:txBody>
+      </p:sp>
+      <p:sp>
+        <p:nvSpPr>
+          <p:cNvPr id="12" name="Shape 8"/>
+          <p:cNvSpPr/>
+          <p:nvPr/>
+        </p:nvSpPr>
+        <p:spPr>
+          <a:xfrm>
+            <a:off x="640080" y="4197096"/>
+            <a:ext cx="603504" cy="603504"/>
+          </a:xfrm>
+          <a:prstGeom prst="ellipse">
+            <a:avLst/>
+          </a:prstGeom>
+          <a:solidFill>
+            <a:srgbClr val="6C4BC1"/>
+          </a:solidFill>
+          <a:ln/>
+        </p:spPr>
+      </p:sp>
+      <p:pic>
+        <p:nvPicPr>
+          <p:cNvPr id="13" name="Image 2" descr="preencoded.png"/>
+          <p:cNvPicPr>
+            <a:picLocks noChangeAspect="1"/>
+          </p:cNvPicPr>
+          <p:nvPr/>
+        </p:nvPicPr>
+        <p:blipFill>
+          <a:blip r:embed="rId5"/>
+          <a:stretch>
+            <a:fillRect/>
+          </a:stretch>
+        </p:blipFill>
+        <p:spPr>
+          <a:xfrm>
+            <a:off x="786384" y="4343400"/>
+            <a:ext cx="310896" cy="310896"/>
+          </a:xfrm>
+          <a:prstGeom prst="rect">
+            <a:avLst/>
+          </a:prstGeom>
+        </p:spPr>
+      </p:pic>
+      <p:sp>
+        <p:nvSpPr>
+          <p:cNvPr id="14" name="Text 9"/>
+          <p:cNvSpPr/>
+          <p:nvPr/>
+        </p:nvSpPr>
+        <p:spPr>
+          <a:xfrm>
+            <a:off x="1463040" y="4151376"/>
+            <a:ext cx="9692640" cy="457200"/>
+          </a:xfrm>
+          <a:prstGeom prst="rect">
+            <a:avLst/>
+          </a:prstGeom>
+          <a:noFill/>
+          <a:ln/>
+        </p:spPr>
+        <p:txBody>
+          <a:bodyPr wrap="square" lIns="0" tIns="0" rIns="0" bIns="0" rtlCol="0" anchor="ctr"/>
+          <a:lstStyle/>
+          <a:p>
+            <a:pPr marL="0" indent="0">
+              <a:lnSpc>
+                <a:spcPts val="2000"/>
+              </a:lnSpc>
+              <a:buNone/>
+            </a:pPr>
+            <a:r>
+              <a:rPr lang="en-US" sz="1650" b="1" dirty="0">
+                <a:solidFill>
+                  <a:srgbClr val="1B1B2F"/>
+                </a:solidFill>
+                <a:latin typeface="Calibri" pitchFamily="34" charset="0"/>
+                <a:ea typeface="Calibri" pitchFamily="34" charset="-122"/>
+                <a:cs typeface="Calibri" pitchFamily="34" charset="-120"/>
+              </a:rPr>
+              <a:t>Meio somador (half adder)</a:t>
+            </a:r>
+            <a:endParaRPr lang="en-US" sz="1650" dirty="0"/>
+          </a:p>
+        </p:txBody>
+      </p:sp>
+      <p:sp>
+        <p:nvSpPr>
+          <p:cNvPr id="15" name="Text 10"/>
+          <p:cNvSpPr/>
+          <p:nvPr/>
+        </p:nvSpPr>
+        <p:spPr>
+          <a:xfrm>
+            <a:off x="1463040" y="4617720"/>
+            <a:ext cx="9692640" cy="411480"/>
+          </a:xfrm>
+          <a:prstGeom prst="rect">
+            <a:avLst/>
+          </a:prstGeom>
+          <a:noFill/>
+          <a:ln/>
+        </p:spPr>
+        <p:txBody>
+          <a:bodyPr wrap="square" lIns="0" tIns="0" rIns="0" bIns="0" rtlCol="0" anchor="ctr"/>
+          <a:lstStyle/>
+          <a:p>
+            <a:pPr marL="0" indent="0">
+              <a:buNone/>
+            </a:pPr>
+            <a:r>
+              <a:rPr lang="en-US" sz="1300" dirty="0">
+                <a:solidFill>
+                  <a:srgbClr val="6B6B80"/>
+                </a:solidFill>
+                <a:latin typeface="Calibri" pitchFamily="34" charset="0"/>
+                <a:ea typeface="Calibri" pitchFamily="34" charset="-122"/>
+                <a:cs typeface="Calibri" pitchFamily="34" charset="-120"/>
+              </a:rPr>
+              <a:t>O primeiro circuito aritmético — soma dois bits.</a:t>
+            </a:r>
+            <a:endParaRPr lang="en-US" sz="1300" dirty="0"/>
+          </a:p>
+        </p:txBody>
+      </p:sp>
+      <p:sp>
+        <p:nvSpPr>
+          <p:cNvPr id="16" name="Shape 11"/>
+          <p:cNvSpPr/>
+          <p:nvPr/>
+        </p:nvSpPr>
+        <p:spPr>
+          <a:xfrm>
+            <a:off x="640080" y="5312664"/>
+            <a:ext cx="603504" cy="603504"/>
+          </a:xfrm>
+          <a:prstGeom prst="ellipse">
+            <a:avLst/>
+          </a:prstGeom>
+          <a:solidFill>
+            <a:srgbClr val="6C4BC1"/>
+          </a:solidFill>
+          <a:ln/>
+        </p:spPr>
+      </p:sp>
+      <p:pic>
+        <p:nvPicPr>
+          <p:cNvPr id="17" name="Image 3" descr="preencoded.png"/>
+          <p:cNvPicPr>
+            <a:picLocks noChangeAspect="1"/>
+          </p:cNvPicPr>
+          <p:nvPr/>
+        </p:nvPicPr>
+        <p:blipFill>
+          <a:blip r:embed="rId6"/>
+          <a:stretch>
+            <a:fillRect/>
+          </a:stretch>
+        </p:blipFill>
+        <p:spPr>
+          <a:xfrm>
+            <a:off x="786384" y="5458968"/>
+            <a:ext cx="310896" cy="310896"/>
+          </a:xfrm>
+          <a:prstGeom prst="rect">
+            <a:avLst/>
+          </a:prstGeom>
+        </p:spPr>
+      </p:pic>
+      <p:sp>
+        <p:nvSpPr>
+          <p:cNvPr id="18" name="Text 12"/>
+          <p:cNvSpPr/>
+          <p:nvPr/>
+        </p:nvSpPr>
+        <p:spPr>
+          <a:xfrm>
+            <a:off x="1463040" y="5266944"/>
+            <a:ext cx="9692640" cy="457200"/>
+          </a:xfrm>
+          <a:prstGeom prst="rect">
+            <a:avLst/>
+          </a:prstGeom>
+          <a:noFill/>
+          <a:ln/>
+        </p:spPr>
+        <p:txBody>
+          <a:bodyPr wrap="square" lIns="0" tIns="0" rIns="0" bIns="0" rtlCol="0" anchor="ctr"/>
+          <a:lstStyle/>
+          <a:p>
+            <a:pPr marL="0" indent="0">
+              <a:lnSpc>
+                <a:spcPts val="2000"/>
+              </a:lnSpc>
+              <a:buNone/>
+            </a:pPr>
+            <a:r>
+              <a:rPr lang="en-US" sz="1650" b="1" dirty="0">
+                <a:solidFill>
+                  <a:srgbClr val="1B1B2F"/>
+                </a:solidFill>
+                <a:latin typeface="Calibri" pitchFamily="34" charset="0"/>
+                <a:ea typeface="Calibri" pitchFamily="34" charset="-122"/>
+                <a:cs typeface="Calibri" pitchFamily="34" charset="-120"/>
+              </a:rPr>
+              <a:t>Por que álgebra booleana é a base do hardware</a:t>
+            </a:r>
+            <a:endParaRPr lang="en-US" sz="1650" dirty="0"/>
+          </a:p>
+        </p:txBody>
+      </p:sp>
+      <p:sp>
+        <p:nvSpPr>
+          <p:cNvPr id="19" name="Text 13"/>
+          <p:cNvSpPr/>
+          <p:nvPr/>
+        </p:nvSpPr>
+        <p:spPr>
+          <a:xfrm>
+            <a:off x="1463040" y="5733288"/>
+            <a:ext cx="9692640" cy="411480"/>
+          </a:xfrm>
+          <a:prstGeom prst="rect">
+            <a:avLst/>
+          </a:prstGeom>
+          <a:noFill/>
+          <a:ln/>
+        </p:spPr>
+        <p:txBody>
+          <a:bodyPr wrap="square" lIns="0" tIns="0" rIns="0" bIns="0" rtlCol="0" anchor="ctr"/>
+          <a:lstStyle/>
+          <a:p>
+            <a:pPr marL="0" indent="0">
+              <a:buNone/>
+            </a:pPr>
+            <a:r>
+              <a:rPr lang="en-US" sz="1300" dirty="0">
+                <a:solidFill>
+                  <a:srgbClr val="6B6B80"/>
+                </a:solidFill>
+                <a:latin typeface="Calibri" pitchFamily="34" charset="0"/>
+                <a:ea typeface="Calibri" pitchFamily="34" charset="-122"/>
+                <a:cs typeface="Calibri" pitchFamily="34" charset="-120"/>
+              </a:rPr>
               <a:t>Cada literal simplificado vira, literalmente, uma porta a menos.</a:t>
             </a:r>
             <a:endParaRPr lang="en-US" sz="1300" dirty="0"/>
@@ -12995,7 +12799,7 @@
           <a:bodyPr wrap="square" lIns="0" tIns="0" rIns="0" bIns="0" rtlCol="0" anchor="ctr"/>
           <a:lstStyle/>
           <a:p>
-            <a:pPr algn="r" indent="0" marL="0">
+            <a:pPr marL="0" indent="0" algn="r">
               <a:buNone/>
             </a:pPr>
             <a:r>
@@ -13029,6 +12833,7 @@
         <a:solidFill>
           <a:srgbClr val="FFFFFF"/>
         </a:solidFill>
+        <a:effectLst/>
       </p:bgPr>
     </p:bg>
     <p:spTree>
@@ -13067,14 +12872,14 @@
       </p:sp>
       <p:pic>
         <p:nvPicPr>
-          <p:cNvPr id="3" name="Image 0" descr="preencoded.png">    </p:cNvPr>
+          <p:cNvPr id="3" name="Image 0" descr="preencoded.png"/>
           <p:cNvPicPr>
             <a:picLocks noChangeAspect="1"/>
           </p:cNvPicPr>
           <p:nvPr/>
         </p:nvPicPr>
         <p:blipFill>
-          <a:blip r:embed="rId1"/>
+          <a:blip r:embed="rId3"/>
           <a:stretch>
             <a:fillRect/>
           </a:stretch>
@@ -13110,11 +12915,11 @@
           <a:bodyPr wrap="square" lIns="0" tIns="0" rIns="0" bIns="0" rtlCol="0" anchor="ctr"/>
           <a:lstStyle/>
           <a:p>
-            <a:pPr indent="0" marL="0">
+            <a:pPr marL="0" indent="0">
               <a:buNone/>
             </a:pPr>
             <a:r>
-              <a:rPr lang="en-US" sz="1200" b="1" spc="150" kern="0" dirty="0">
+              <a:rPr lang="en-US" sz="1200" b="1" kern="0" spc="150" dirty="0">
                 <a:solidFill>
                   <a:srgbClr val="6C4BC1"/>
                 </a:solidFill>
@@ -13149,7 +12954,7 @@
           <a:bodyPr wrap="square" lIns="0" tIns="0" rIns="0" bIns="0" rtlCol="0" anchor="ctr"/>
           <a:lstStyle/>
           <a:p>
-            <a:pPr indent="0" marL="0">
+            <a:pPr marL="0" indent="0">
               <a:buNone/>
             </a:pPr>
             <a:r>
@@ -13188,7 +12993,7 @@
           <a:bodyPr wrap="square" lIns="0" tIns="0" rIns="0" bIns="0" rtlCol="0" anchor="ctr"/>
           <a:lstStyle/>
           <a:p>
-            <a:pPr indent="0" marL="0">
+            <a:pPr marL="0" indent="0">
               <a:lnSpc>
                 <a:spcPts val="1900"/>
               </a:lnSpc>
@@ -13252,7 +13057,7 @@
           <a:bodyPr wrap="square" lIns="0" tIns="0" rIns="0" bIns="0" rtlCol="0" anchor="ctr"/>
           <a:lstStyle/>
           <a:p>
-            <a:pPr algn="ctr" indent="0" marL="0">
+            <a:pPr marL="0" indent="0" algn="ctr">
               <a:buNone/>
             </a:pPr>
             <a:r>
@@ -13318,7 +13123,7 @@
           <a:bodyPr wrap="square" lIns="0" tIns="0" rIns="0" bIns="0" rtlCol="0" anchor="ctr"/>
           <a:lstStyle/>
           <a:p>
-            <a:pPr indent="0" marL="0">
+            <a:pPr marL="0" indent="0">
               <a:buNone/>
             </a:pPr>
             <a:r>
@@ -13357,7 +13162,7 @@
           <a:bodyPr wrap="square" lIns="0" tIns="0" rIns="0" bIns="0" rtlCol="0" anchor="ctr"/>
           <a:lstStyle/>
           <a:p>
-            <a:pPr indent="0" marL="0">
+            <a:pPr marL="0" indent="0">
               <a:buNone/>
             </a:pPr>
             <a:r>
@@ -13396,7 +13201,7 @@
           <a:bodyPr wrap="square" lIns="0" tIns="0" rIns="0" bIns="0" rtlCol="0" anchor="ctr"/>
           <a:lstStyle/>
           <a:p>
-            <a:pPr indent="0" marL="0">
+            <a:pPr marL="0" indent="0">
               <a:buNone/>
             </a:pPr>
             <a:r>
@@ -13435,7 +13240,7 @@
           <a:bodyPr wrap="square" lIns="0" tIns="0" rIns="0" bIns="0" rtlCol="0" anchor="ctr"/>
           <a:lstStyle/>
           <a:p>
-            <a:pPr algn="r" indent="0" marL="0">
+            <a:pPr marL="0" indent="0" algn="r">
               <a:buNone/>
             </a:pPr>
             <a:r>
@@ -13469,6 +13274,7 @@
         <a:solidFill>
           <a:srgbClr val="FFFFFF"/>
         </a:solidFill>
+        <a:effectLst/>
       </p:bgPr>
     </p:bg>
     <p:spTree>
@@ -13507,14 +13313,14 @@
       </p:sp>
       <p:pic>
         <p:nvPicPr>
-          <p:cNvPr id="3" name="Image 0" descr="preencoded.png">    </p:cNvPr>
+          <p:cNvPr id="3" name="Image 0" descr="preencoded.png"/>
           <p:cNvPicPr>
             <a:picLocks noChangeAspect="1"/>
           </p:cNvPicPr>
           <p:nvPr/>
         </p:nvPicPr>
         <p:blipFill>
-          <a:blip r:embed="rId1"/>
+          <a:blip r:embed="rId3"/>
           <a:stretch>
             <a:fillRect/>
           </a:stretch>
@@ -13550,11 +13356,11 @@
           <a:bodyPr wrap="square" lIns="0" tIns="0" rIns="0" bIns="0" rtlCol="0" anchor="ctr"/>
           <a:lstStyle/>
           <a:p>
-            <a:pPr indent="0" marL="0">
+            <a:pPr marL="0" indent="0">
               <a:buNone/>
             </a:pPr>
             <a:r>
-              <a:rPr lang="en-US" sz="1200" b="1" spc="150" kern="0" dirty="0">
+              <a:rPr lang="en-US" sz="1200" b="1" kern="0" spc="150" dirty="0">
                 <a:solidFill>
                   <a:srgbClr val="3EBD59"/>
                 </a:solidFill>
@@ -13589,7 +13395,7 @@
           <a:bodyPr wrap="square" lIns="0" tIns="0" rIns="0" bIns="0" rtlCol="0" anchor="ctr"/>
           <a:lstStyle/>
           <a:p>
-            <a:pPr indent="0" marL="0">
+            <a:pPr marL="0" indent="0">
               <a:buNone/>
             </a:pPr>
             <a:r>
@@ -13650,7 +13456,7 @@
           <a:bodyPr wrap="square" lIns="0" tIns="0" rIns="0" bIns="0" rtlCol="0" anchor="ctr"/>
           <a:lstStyle/>
           <a:p>
-            <a:pPr algn="ctr" indent="0" marL="0">
+            <a:pPr marL="0" indent="0" algn="ctr">
               <a:buNone/>
             </a:pPr>
             <a:r>
@@ -13689,7 +13495,7 @@
           <a:bodyPr wrap="square" lIns="0" tIns="0" rIns="0" bIns="0" rtlCol="0" anchor="ctr"/>
           <a:lstStyle/>
           <a:p>
-            <a:pPr algn="ctr" indent="0" marL="0">
+            <a:pPr marL="0" indent="0" algn="ctr">
               <a:buNone/>
             </a:pPr>
             <a:r>
@@ -13750,7 +13556,7 @@
           <a:bodyPr wrap="square" lIns="0" tIns="0" rIns="0" bIns="0" rtlCol="0" anchor="ctr"/>
           <a:lstStyle/>
           <a:p>
-            <a:pPr algn="ctr" indent="0" marL="0">
+            <a:pPr marL="0" indent="0" algn="ctr">
               <a:buNone/>
             </a:pPr>
             <a:r>
@@ -13789,7 +13595,7 @@
           <a:bodyPr wrap="square" lIns="0" tIns="0" rIns="0" bIns="0" rtlCol="0" anchor="ctr"/>
           <a:lstStyle/>
           <a:p>
-            <a:pPr algn="ctr" indent="0" marL="0">
+            <a:pPr marL="0" indent="0" algn="ctr">
               <a:buNone/>
             </a:pPr>
             <a:r>
@@ -13848,7 +13654,7 @@
           <a:bodyPr wrap="square" lIns="0" tIns="0" rIns="0" bIns="0" rtlCol="0" anchor="ctr"/>
           <a:lstStyle/>
           <a:p>
-            <a:pPr algn="ctr" indent="0" marL="0">
+            <a:pPr marL="0" indent="0" algn="ctr">
               <a:buNone/>
             </a:pPr>
             <a:r>
@@ -13887,7 +13693,7 @@
           <a:bodyPr wrap="square" lIns="0" tIns="0" rIns="0" bIns="0" rtlCol="0" anchor="ctr"/>
           <a:lstStyle/>
           <a:p>
-            <a:pPr algn="ctr" indent="0" marL="0">
+            <a:pPr marL="0" indent="0" algn="ctr">
               <a:lnSpc>
                 <a:spcPts val="1800"/>
               </a:lnSpc>
@@ -13951,7 +13757,7 @@
           <a:bodyPr wrap="square" lIns="0" tIns="0" rIns="0" bIns="0" rtlCol="0" anchor="ctr"/>
           <a:lstStyle/>
           <a:p>
-            <a:pPr algn="ctr" indent="0" marL="0">
+            <a:pPr marL="0" indent="0" algn="ctr">
               <a:buNone/>
             </a:pPr>
             <a:r>
@@ -13990,7 +13796,7 @@
           <a:bodyPr wrap="square" lIns="0" tIns="0" rIns="0" bIns="0" rtlCol="0" anchor="ctr"/>
           <a:lstStyle/>
           <a:p>
-            <a:pPr algn="r" indent="0" marL="0">
+            <a:pPr marL="0" indent="0" algn="r">
               <a:buNone/>
             </a:pPr>
             <a:r>
@@ -14024,6 +13830,7 @@
         <a:solidFill>
           <a:srgbClr val="FFFFFF"/>
         </a:solidFill>
+        <a:effectLst/>
       </p:bgPr>
     </p:bg>
     <p:spTree>
@@ -14062,14 +13869,14 @@
       </p:sp>
       <p:pic>
         <p:nvPicPr>
-          <p:cNvPr id="3" name="Image 0" descr="preencoded.png">    </p:cNvPr>
+          <p:cNvPr id="3" name="Image 0" descr="preencoded.png"/>
           <p:cNvPicPr>
             <a:picLocks noChangeAspect="1"/>
           </p:cNvPicPr>
           <p:nvPr/>
         </p:nvPicPr>
         <p:blipFill>
-          <a:blip r:embed="rId1"/>
+          <a:blip r:embed="rId3"/>
           <a:stretch>
             <a:fillRect/>
           </a:stretch>
@@ -14105,11 +13912,11 @@
           <a:bodyPr wrap="square" lIns="0" tIns="0" rIns="0" bIns="0" rtlCol="0" anchor="ctr"/>
           <a:lstStyle/>
           <a:p>
-            <a:pPr indent="0" marL="0">
+            <a:pPr marL="0" indent="0">
               <a:buNone/>
             </a:pPr>
             <a:r>
-              <a:rPr lang="en-US" sz="1200" b="1" spc="150" kern="0" dirty="0">
+              <a:rPr lang="en-US" sz="1200" b="1" kern="0" spc="150" dirty="0">
                 <a:solidFill>
                   <a:srgbClr val="6C4BC1"/>
                 </a:solidFill>
@@ -14144,7 +13951,7 @@
           <a:bodyPr wrap="square" lIns="0" tIns="0" rIns="0" bIns="0" rtlCol="0" anchor="ctr"/>
           <a:lstStyle/>
           <a:p>
-            <a:pPr indent="0" marL="0">
+            <a:pPr marL="0" indent="0">
               <a:buNone/>
             </a:pPr>
             <a:r>
@@ -14183,7 +13990,7 @@
           <a:bodyPr wrap="square" lIns="0" tIns="0" rIns="0" bIns="0" rtlCol="0" anchor="ctr"/>
           <a:lstStyle/>
           <a:p>
-            <a:pPr indent="0" marL="0">
+            <a:pPr marL="0" indent="0">
               <a:lnSpc>
                 <a:spcPts val="1900"/>
               </a:lnSpc>
@@ -14227,10 +14034,34 @@
             <a:tbl>
               <a:tblPr/>
               <a:tblGrid>
-                <a:gridCol w="1371600"/>
-                <a:gridCol w="1371600"/>
-                <a:gridCol w="2057400"/>
-                <a:gridCol w="2057400"/>
+                <a:gridCol w="1371600">
+                  <a:extLst>
+                    <a:ext uri="{9D8B030D-6E8A-4147-A177-3AD203B41FA5}">
+                      <a16:colId xmlns:a16="http://schemas.microsoft.com/office/drawing/2014/main" val="20000"/>
+                    </a:ext>
+                  </a:extLst>
+                </a:gridCol>
+                <a:gridCol w="1371600">
+                  <a:extLst>
+                    <a:ext uri="{9D8B030D-6E8A-4147-A177-3AD203B41FA5}">
+                      <a16:colId xmlns:a16="http://schemas.microsoft.com/office/drawing/2014/main" val="20001"/>
+                    </a:ext>
+                  </a:extLst>
+                </a:gridCol>
+                <a:gridCol w="2057400">
+                  <a:extLst>
+                    <a:ext uri="{9D8B030D-6E8A-4147-A177-3AD203B41FA5}">
+                      <a16:colId xmlns:a16="http://schemas.microsoft.com/office/drawing/2014/main" val="20002"/>
+                    </a:ext>
+                  </a:extLst>
+                </a:gridCol>
+                <a:gridCol w="2057400">
+                  <a:extLst>
+                    <a:ext uri="{9D8B030D-6E8A-4147-A177-3AD203B41FA5}">
+                      <a16:colId xmlns:a16="http://schemas.microsoft.com/office/drawing/2014/main" val="20003"/>
+                    </a:ext>
+                  </a:extLst>
+                </a:gridCol>
               </a:tblGrid>
               <a:tr h="548640">
                 <a:tc>
@@ -14238,7 +14069,7 @@
                     <a:bodyPr/>
                     <a:lstStyle/>
                     <a:p>
-                      <a:pPr algn="ctr" indent="0" marL="0">
+                      <a:pPr marL="0" indent="0" algn="ctr">
                         <a:buNone/>
                       </a:pPr>
                       <a:r>
@@ -14259,7 +14090,7 @@
                       </a:endParaRPr>
                     </a:p>
                   </a:txBody>
-                  <a:tcPr marL="91440" marR="91440" marT="45720" marB="45720" anchor="ctr">
+                  <a:tcPr anchor="ctr">
                     <a:lnL w="38100" cap="flat" cmpd="sng" algn="ctr">
                       <a:solidFill>
                         <a:srgbClr val="FFFFFF"/>
@@ -14306,7 +14137,7 @@
                     <a:bodyPr/>
                     <a:lstStyle/>
                     <a:p>
-                      <a:pPr algn="ctr" indent="0" marL="0">
+                      <a:pPr marL="0" indent="0" algn="ctr">
                         <a:buNone/>
                       </a:pPr>
                       <a:r>
@@ -14327,7 +14158,7 @@
                       </a:endParaRPr>
                     </a:p>
                   </a:txBody>
-                  <a:tcPr marL="91440" marR="91440" marT="45720" marB="45720" anchor="ctr">
+                  <a:tcPr anchor="ctr">
                     <a:lnL w="38100" cap="flat" cmpd="sng" algn="ctr">
                       <a:solidFill>
                         <a:srgbClr val="FFFFFF"/>
@@ -14374,7 +14205,7 @@
                     <a:bodyPr/>
                     <a:lstStyle/>
                     <a:p>
-                      <a:pPr algn="ctr" indent="0" marL="0">
+                      <a:pPr marL="0" indent="0" algn="ctr">
                         <a:buNone/>
                       </a:pPr>
                       <a:r>
@@ -14395,7 +14226,7 @@
                       </a:endParaRPr>
                     </a:p>
                   </a:txBody>
-                  <a:tcPr marL="91440" marR="91440" marT="45720" marB="45720" anchor="ctr">
+                  <a:tcPr anchor="ctr">
                     <a:lnL w="38100" cap="flat" cmpd="sng" algn="ctr">
                       <a:solidFill>
                         <a:srgbClr val="FFFFFF"/>
@@ -14442,7 +14273,7 @@
                     <a:bodyPr/>
                     <a:lstStyle/>
                     <a:p>
-                      <a:pPr algn="ctr" indent="0" marL="0">
+                      <a:pPr marL="0" indent="0" algn="ctr">
                         <a:buNone/>
                       </a:pPr>
                       <a:r>
@@ -14463,7 +14294,7 @@
                       </a:endParaRPr>
                     </a:p>
                   </a:txBody>
-                  <a:tcPr marL="91440" marR="91440" marT="45720" marB="45720" anchor="ctr">
+                  <a:tcPr anchor="ctr">
                     <a:lnL w="38100" cap="flat" cmpd="sng" algn="ctr">
                       <a:solidFill>
                         <a:srgbClr val="FFFFFF"/>
@@ -14505,6 +14336,11 @@
                     </a:solidFill>
                   </a:tcPr>
                 </a:tc>
+                <a:extLst>
+                  <a:ext uri="{0D108BD9-81ED-4DB2-BD59-A6C34878D82A}">
+                    <a16:rowId xmlns:a16="http://schemas.microsoft.com/office/drawing/2014/main" val="10000"/>
+                  </a:ext>
+                </a:extLst>
               </a:tr>
               <a:tr h="685800">
                 <a:tc>
@@ -14512,7 +14348,7 @@
                     <a:bodyPr/>
                     <a:lstStyle/>
                     <a:p>
-                      <a:pPr algn="ctr" indent="0" marL="0">
+                      <a:pPr marL="0" indent="0" algn="ctr">
                         <a:buNone/>
                       </a:pPr>
                       <a:r>
@@ -14533,7 +14369,7 @@
                       </a:endParaRPr>
                     </a:p>
                   </a:txBody>
-                  <a:tcPr marL="91440" marR="91440" marT="45720" marB="45720" anchor="ctr">
+                  <a:tcPr anchor="ctr">
                     <a:lnL w="38100" cap="flat" cmpd="sng" algn="ctr">
                       <a:solidFill>
                         <a:srgbClr val="FFFFFF"/>
@@ -14580,7 +14416,7 @@
                     <a:bodyPr/>
                     <a:lstStyle/>
                     <a:p>
-                      <a:pPr algn="ctr" indent="0" marL="0">
+                      <a:pPr marL="0" indent="0" algn="ctr">
                         <a:buNone/>
                       </a:pPr>
                       <a:r>
@@ -14601,7 +14437,7 @@
                       </a:endParaRPr>
                     </a:p>
                   </a:txBody>
-                  <a:tcPr marL="91440" marR="91440" marT="45720" marB="45720" anchor="ctr">
+                  <a:tcPr anchor="ctr">
                     <a:lnL w="38100" cap="flat" cmpd="sng" algn="ctr">
                       <a:solidFill>
                         <a:srgbClr val="FFFFFF"/>
@@ -14648,7 +14484,7 @@
                     <a:bodyPr/>
                     <a:lstStyle/>
                     <a:p>
-                      <a:pPr algn="ctr" indent="0" marL="0">
+                      <a:pPr marL="0" indent="0" algn="ctr">
                         <a:buNone/>
                       </a:pPr>
                       <a:r>
@@ -14669,7 +14505,7 @@
                       </a:endParaRPr>
                     </a:p>
                   </a:txBody>
-                  <a:tcPr marL="91440" marR="91440" marT="45720" marB="45720" anchor="ctr">
+                  <a:tcPr anchor="ctr">
                     <a:lnL w="38100" cap="flat" cmpd="sng" algn="ctr">
                       <a:solidFill>
                         <a:srgbClr val="FFFFFF"/>
@@ -14716,7 +14552,7 @@
                     <a:bodyPr/>
                     <a:lstStyle/>
                     <a:p>
-                      <a:pPr algn="ctr" indent="0" marL="0">
+                      <a:pPr marL="0" indent="0" algn="ctr">
                         <a:buNone/>
                       </a:pPr>
                       <a:r>
@@ -14737,7 +14573,7 @@
                       </a:endParaRPr>
                     </a:p>
                   </a:txBody>
-                  <a:tcPr marL="91440" marR="91440" marT="45720" marB="45720" anchor="ctr">
+                  <a:tcPr anchor="ctr">
                     <a:lnL w="38100" cap="flat" cmpd="sng" algn="ctr">
                       <a:solidFill>
                         <a:srgbClr val="FFFFFF"/>
@@ -14779,6 +14615,11 @@
                     </a:solidFill>
                   </a:tcPr>
                 </a:tc>
+                <a:extLst>
+                  <a:ext uri="{0D108BD9-81ED-4DB2-BD59-A6C34878D82A}">
+                    <a16:rowId xmlns:a16="http://schemas.microsoft.com/office/drawing/2014/main" val="10001"/>
+                  </a:ext>
+                </a:extLst>
               </a:tr>
               <a:tr h="685800">
                 <a:tc>
@@ -14786,7 +14627,7 @@
                     <a:bodyPr/>
                     <a:lstStyle/>
                     <a:p>
-                      <a:pPr algn="ctr" indent="0" marL="0">
+                      <a:pPr marL="0" indent="0" algn="ctr">
                         <a:buNone/>
                       </a:pPr>
                       <a:r>
@@ -14807,7 +14648,7 @@
                       </a:endParaRPr>
                     </a:p>
                   </a:txBody>
-                  <a:tcPr marL="91440" marR="91440" marT="45720" marB="45720" anchor="ctr">
+                  <a:tcPr anchor="ctr">
                     <a:lnL w="38100" cap="flat" cmpd="sng" algn="ctr">
                       <a:solidFill>
                         <a:srgbClr val="FFFFFF"/>
@@ -14854,7 +14695,7 @@
                     <a:bodyPr/>
                     <a:lstStyle/>
                     <a:p>
-                      <a:pPr algn="ctr" indent="0" marL="0">
+                      <a:pPr marL="0" indent="0" algn="ctr">
                         <a:buNone/>
                       </a:pPr>
                       <a:r>
@@ -14875,7 +14716,7 @@
                       </a:endParaRPr>
                     </a:p>
                   </a:txBody>
-                  <a:tcPr marL="91440" marR="91440" marT="45720" marB="45720" anchor="ctr">
+                  <a:tcPr anchor="ctr">
                     <a:lnL w="38100" cap="flat" cmpd="sng" algn="ctr">
                       <a:solidFill>
                         <a:srgbClr val="FFFFFF"/>
@@ -14922,7 +14763,7 @@
                     <a:bodyPr/>
                     <a:lstStyle/>
                     <a:p>
-                      <a:pPr algn="ctr" indent="0" marL="0">
+                      <a:pPr marL="0" indent="0" algn="ctr">
                         <a:buNone/>
                       </a:pPr>
                       <a:r>
@@ -14943,7 +14784,7 @@
                       </a:endParaRPr>
                     </a:p>
                   </a:txBody>
-                  <a:tcPr marL="91440" marR="91440" marT="45720" marB="45720" anchor="ctr">
+                  <a:tcPr anchor="ctr">
                     <a:lnL w="38100" cap="flat" cmpd="sng" algn="ctr">
                       <a:solidFill>
                         <a:srgbClr val="FFFFFF"/>
@@ -14990,7 +14831,7 @@
                     <a:bodyPr/>
                     <a:lstStyle/>
                     <a:p>
-                      <a:pPr algn="ctr" indent="0" marL="0">
+                      <a:pPr marL="0" indent="0" algn="ctr">
                         <a:buNone/>
                       </a:pPr>
                       <a:r>
@@ -15011,7 +14852,7 @@
                       </a:endParaRPr>
                     </a:p>
                   </a:txBody>
-                  <a:tcPr marL="91440" marR="91440" marT="45720" marB="45720" anchor="ctr">
+                  <a:tcPr anchor="ctr">
                     <a:lnL w="38100" cap="flat" cmpd="sng" algn="ctr">
                       <a:solidFill>
                         <a:srgbClr val="FFFFFF"/>
@@ -15053,6 +14894,11 @@
                     </a:solidFill>
                   </a:tcPr>
                 </a:tc>
+                <a:extLst>
+                  <a:ext uri="{0D108BD9-81ED-4DB2-BD59-A6C34878D82A}">
+                    <a16:rowId xmlns:a16="http://schemas.microsoft.com/office/drawing/2014/main" val="10002"/>
+                  </a:ext>
+                </a:extLst>
               </a:tr>
               <a:tr h="685800">
                 <a:tc>
@@ -15060,7 +14906,7 @@
                     <a:bodyPr/>
                     <a:lstStyle/>
                     <a:p>
-                      <a:pPr algn="ctr" indent="0" marL="0">
+                      <a:pPr marL="0" indent="0" algn="ctr">
                         <a:buNone/>
                       </a:pPr>
                       <a:r>
@@ -15081,7 +14927,7 @@
                       </a:endParaRPr>
                     </a:p>
                   </a:txBody>
-                  <a:tcPr marL="91440" marR="91440" marT="45720" marB="45720" anchor="ctr">
+                  <a:tcPr anchor="ctr">
                     <a:lnL w="38100" cap="flat" cmpd="sng" algn="ctr">
                       <a:solidFill>
                         <a:srgbClr val="FFFFFF"/>
@@ -15128,7 +14974,7 @@
                     <a:bodyPr/>
                     <a:lstStyle/>
                     <a:p>
-                      <a:pPr algn="ctr" indent="0" marL="0">
+                      <a:pPr marL="0" indent="0" algn="ctr">
                         <a:buNone/>
                       </a:pPr>
                       <a:r>
@@ -15149,7 +14995,7 @@
                       </a:endParaRPr>
                     </a:p>
                   </a:txBody>
-                  <a:tcPr marL="91440" marR="91440" marT="45720" marB="45720" anchor="ctr">
+                  <a:tcPr anchor="ctr">
                     <a:lnL w="38100" cap="flat" cmpd="sng" algn="ctr">
                       <a:solidFill>
                         <a:srgbClr val="FFFFFF"/>
@@ -15196,7 +15042,7 @@
                     <a:bodyPr/>
                     <a:lstStyle/>
                     <a:p>
-                      <a:pPr algn="ctr" indent="0" marL="0">
+                      <a:pPr marL="0" indent="0" algn="ctr">
                         <a:buNone/>
                       </a:pPr>
                       <a:r>
@@ -15217,7 +15063,7 @@
                       </a:endParaRPr>
                     </a:p>
                   </a:txBody>
-                  <a:tcPr marL="91440" marR="91440" marT="45720" marB="45720" anchor="ctr">
+                  <a:tcPr anchor="ctr">
                     <a:lnL w="38100" cap="flat" cmpd="sng" algn="ctr">
                       <a:solidFill>
                         <a:srgbClr val="FFFFFF"/>
@@ -15264,7 +15110,7 @@
                     <a:bodyPr/>
                     <a:lstStyle/>
                     <a:p>
-                      <a:pPr algn="ctr" indent="0" marL="0">
+                      <a:pPr marL="0" indent="0" algn="ctr">
                         <a:buNone/>
                       </a:pPr>
                       <a:r>
@@ -15285,7 +15131,7 @@
                       </a:endParaRPr>
                     </a:p>
                   </a:txBody>
-                  <a:tcPr marL="91440" marR="91440" marT="45720" marB="45720" anchor="ctr">
+                  <a:tcPr anchor="ctr">
                     <a:lnL w="38100" cap="flat" cmpd="sng" algn="ctr">
                       <a:solidFill>
                         <a:srgbClr val="FFFFFF"/>
@@ -15327,6 +15173,11 @@
                     </a:solidFill>
                   </a:tcPr>
                 </a:tc>
+                <a:extLst>
+                  <a:ext uri="{0D108BD9-81ED-4DB2-BD59-A6C34878D82A}">
+                    <a16:rowId xmlns:a16="http://schemas.microsoft.com/office/drawing/2014/main" val="10003"/>
+                  </a:ext>
+                </a:extLst>
               </a:tr>
               <a:tr h="685800">
                 <a:tc>
@@ -15334,7 +15185,7 @@
                     <a:bodyPr/>
                     <a:lstStyle/>
                     <a:p>
-                      <a:pPr algn="ctr" indent="0" marL="0">
+                      <a:pPr marL="0" indent="0" algn="ctr">
                         <a:buNone/>
                       </a:pPr>
                       <a:r>
@@ -15355,7 +15206,7 @@
                       </a:endParaRPr>
                     </a:p>
                   </a:txBody>
-                  <a:tcPr marL="91440" marR="91440" marT="45720" marB="45720" anchor="ctr">
+                  <a:tcPr anchor="ctr">
                     <a:lnL w="38100" cap="flat" cmpd="sng" algn="ctr">
                       <a:solidFill>
                         <a:srgbClr val="FFFFFF"/>
@@ -15402,7 +15253,7 @@
                     <a:bodyPr/>
                     <a:lstStyle/>
                     <a:p>
-                      <a:pPr algn="ctr" indent="0" marL="0">
+                      <a:pPr marL="0" indent="0" algn="ctr">
                         <a:buNone/>
                       </a:pPr>
                       <a:r>
@@ -15423,7 +15274,7 @@
                       </a:endParaRPr>
                     </a:p>
                   </a:txBody>
-                  <a:tcPr marL="91440" marR="91440" marT="45720" marB="45720" anchor="ctr">
+                  <a:tcPr anchor="ctr">
                     <a:lnL w="38100" cap="flat" cmpd="sng" algn="ctr">
                       <a:solidFill>
                         <a:srgbClr val="FFFFFF"/>
@@ -15470,7 +15321,7 @@
                     <a:bodyPr/>
                     <a:lstStyle/>
                     <a:p>
-                      <a:pPr algn="ctr" indent="0" marL="0">
+                      <a:pPr marL="0" indent="0" algn="ctr">
                         <a:buNone/>
                       </a:pPr>
                       <a:r>
@@ -15491,7 +15342,7 @@
                       </a:endParaRPr>
                     </a:p>
                   </a:txBody>
-                  <a:tcPr marL="91440" marR="91440" marT="45720" marB="45720" anchor="ctr">
+                  <a:tcPr anchor="ctr">
                     <a:lnL w="38100" cap="flat" cmpd="sng" algn="ctr">
                       <a:solidFill>
                         <a:srgbClr val="FFFFFF"/>
@@ -15538,7 +15389,7 @@
                     <a:bodyPr/>
                     <a:lstStyle/>
                     <a:p>
-                      <a:pPr algn="ctr" indent="0" marL="0">
+                      <a:pPr marL="0" indent="0" algn="ctr">
                         <a:buNone/>
                       </a:pPr>
                       <a:r>
@@ -15559,7 +15410,7 @@
                       </a:endParaRPr>
                     </a:p>
                   </a:txBody>
-                  <a:tcPr marL="91440" marR="91440" marT="45720" marB="45720" anchor="ctr">
+                  <a:tcPr anchor="ctr">
                     <a:lnL w="38100" cap="flat" cmpd="sng" algn="ctr">
                       <a:solidFill>
                         <a:srgbClr val="FFFFFF"/>
@@ -15601,6 +15452,11 @@
                     </a:solidFill>
                   </a:tcPr>
                 </a:tc>
+                <a:extLst>
+                  <a:ext uri="{0D108BD9-81ED-4DB2-BD59-A6C34878D82A}">
+                    <a16:rowId xmlns:a16="http://schemas.microsoft.com/office/drawing/2014/main" val="10004"/>
+                  </a:ext>
+                </a:extLst>
               </a:tr>
             </a:tbl>
           </a:graphicData>
@@ -15627,7 +15483,7 @@
           <a:bodyPr wrap="square" lIns="0" tIns="0" rIns="0" bIns="0" rtlCol="0" anchor="ctr"/>
           <a:lstStyle/>
           <a:p>
-            <a:pPr algn="r" indent="0" marL="0">
+            <a:pPr marL="0" indent="0" algn="r">
               <a:buNone/>
             </a:pPr>
             <a:r>
@@ -15661,6 +15517,7 @@
         <a:solidFill>
           <a:srgbClr val="FFFFFF"/>
         </a:solidFill>
+        <a:effectLst/>
       </p:bgPr>
     </p:bg>
     <p:spTree>
@@ -15699,14 +15556,14 @@
       </p:sp>
       <p:pic>
         <p:nvPicPr>
-          <p:cNvPr id="3" name="Image 0" descr="preencoded.png">    </p:cNvPr>
+          <p:cNvPr id="3" name="Image 0" descr="preencoded.png"/>
           <p:cNvPicPr>
             <a:picLocks noChangeAspect="1"/>
           </p:cNvPicPr>
           <p:nvPr/>
         </p:nvPicPr>
         <p:blipFill>
-          <a:blip r:embed="rId1"/>
+          <a:blip r:embed="rId3"/>
           <a:stretch>
             <a:fillRect/>
           </a:stretch>
@@ -15742,11 +15599,11 @@
           <a:bodyPr wrap="square" lIns="0" tIns="0" rIns="0" bIns="0" rtlCol="0" anchor="ctr"/>
           <a:lstStyle/>
           <a:p>
-            <a:pPr indent="0" marL="0">
+            <a:pPr marL="0" indent="0">
               <a:buNone/>
             </a:pPr>
             <a:r>
-              <a:rPr lang="en-US" sz="1200" b="1" spc="150" kern="0" dirty="0">
+              <a:rPr lang="en-US" sz="1200" b="1" kern="0" spc="150" dirty="0">
                 <a:solidFill>
                   <a:srgbClr val="3EBD59"/>
                 </a:solidFill>
@@ -15781,7 +15638,7 @@
           <a:bodyPr wrap="square" lIns="0" tIns="0" rIns="0" bIns="0" rtlCol="0" anchor="ctr"/>
           <a:lstStyle/>
           <a:p>
-            <a:pPr indent="0" marL="0">
+            <a:pPr marL="0" indent="0">
               <a:buNone/>
             </a:pPr>
             <a:r>
@@ -15822,10 +15679,34 @@
             <a:tbl>
               <a:tblPr/>
               <a:tblGrid>
-                <a:gridCol w="1714500"/>
-                <a:gridCol w="1714500"/>
-                <a:gridCol w="1714500"/>
-                <a:gridCol w="1714500"/>
+                <a:gridCol w="1714500">
+                  <a:extLst>
+                    <a:ext uri="{9D8B030D-6E8A-4147-A177-3AD203B41FA5}">
+                      <a16:colId xmlns:a16="http://schemas.microsoft.com/office/drawing/2014/main" val="20000"/>
+                    </a:ext>
+                  </a:extLst>
+                </a:gridCol>
+                <a:gridCol w="1714500">
+                  <a:extLst>
+                    <a:ext uri="{9D8B030D-6E8A-4147-A177-3AD203B41FA5}">
+                      <a16:colId xmlns:a16="http://schemas.microsoft.com/office/drawing/2014/main" val="20001"/>
+                    </a:ext>
+                  </a:extLst>
+                </a:gridCol>
+                <a:gridCol w="1714500">
+                  <a:extLst>
+                    <a:ext uri="{9D8B030D-6E8A-4147-A177-3AD203B41FA5}">
+                      <a16:colId xmlns:a16="http://schemas.microsoft.com/office/drawing/2014/main" val="20002"/>
+                    </a:ext>
+                  </a:extLst>
+                </a:gridCol>
+                <a:gridCol w="1714500">
+                  <a:extLst>
+                    <a:ext uri="{9D8B030D-6E8A-4147-A177-3AD203B41FA5}">
+                      <a16:colId xmlns:a16="http://schemas.microsoft.com/office/drawing/2014/main" val="20003"/>
+                    </a:ext>
+                  </a:extLst>
+                </a:gridCol>
               </a:tblGrid>
               <a:tr h="502920">
                 <a:tc>
@@ -15833,7 +15714,7 @@
                     <a:bodyPr/>
                     <a:lstStyle/>
                     <a:p>
-                      <a:pPr algn="ctr" indent="0" marL="0">
+                      <a:pPr marL="0" indent="0" algn="ctr">
                         <a:buNone/>
                       </a:pPr>
                       <a:r>
@@ -15854,7 +15735,7 @@
                       </a:endParaRPr>
                     </a:p>
                   </a:txBody>
-                  <a:tcPr marL="91440" marR="91440" marT="45720" marB="45720" anchor="ctr">
+                  <a:tcPr anchor="ctr">
                     <a:lnL w="38100" cap="flat" cmpd="sng" algn="ctr">
                       <a:solidFill>
                         <a:srgbClr val="FFFFFF"/>
@@ -15901,7 +15782,7 @@
                     <a:bodyPr/>
                     <a:lstStyle/>
                     <a:p>
-                      <a:pPr algn="ctr" indent="0" marL="0">
+                      <a:pPr marL="0" indent="0" algn="ctr">
                         <a:buNone/>
                       </a:pPr>
                       <a:r>
@@ -15922,7 +15803,7 @@
                       </a:endParaRPr>
                     </a:p>
                   </a:txBody>
-                  <a:tcPr marL="91440" marR="91440" marT="45720" marB="45720" anchor="ctr">
+                  <a:tcPr anchor="ctr">
                     <a:lnL w="38100" cap="flat" cmpd="sng" algn="ctr">
                       <a:solidFill>
                         <a:srgbClr val="FFFFFF"/>
@@ -15969,7 +15850,7 @@
                     <a:bodyPr/>
                     <a:lstStyle/>
                     <a:p>
-                      <a:pPr algn="ctr" indent="0" marL="0">
+                      <a:pPr marL="0" indent="0" algn="ctr">
                         <a:buNone/>
                       </a:pPr>
                       <a:r>
@@ -15990,7 +15871,7 @@
                       </a:endParaRPr>
                     </a:p>
                   </a:txBody>
-                  <a:tcPr marL="91440" marR="91440" marT="45720" marB="45720" anchor="ctr">
+                  <a:tcPr anchor="ctr">
                     <a:lnL w="38100" cap="flat" cmpd="sng" algn="ctr">
                       <a:solidFill>
                         <a:srgbClr val="FFFFFF"/>
@@ -16037,7 +15918,7 @@
                     <a:bodyPr/>
                     <a:lstStyle/>
                     <a:p>
-                      <a:pPr algn="ctr" indent="0" marL="0">
+                      <a:pPr marL="0" indent="0" algn="ctr">
                         <a:buNone/>
                       </a:pPr>
                       <a:r>
@@ -16058,7 +15939,7 @@
                       </a:endParaRPr>
                     </a:p>
                   </a:txBody>
-                  <a:tcPr marL="91440" marR="91440" marT="45720" marB="45720" anchor="ctr">
+                  <a:tcPr anchor="ctr">
                     <a:lnL w="38100" cap="flat" cmpd="sng" algn="ctr">
                       <a:solidFill>
                         <a:srgbClr val="FFFFFF"/>
@@ -16100,6 +15981,11 @@
                     </a:solidFill>
                   </a:tcPr>
                 </a:tc>
+                <a:extLst>
+                  <a:ext uri="{0D108BD9-81ED-4DB2-BD59-A6C34878D82A}">
+                    <a16:rowId xmlns:a16="http://schemas.microsoft.com/office/drawing/2014/main" val="10000"/>
+                  </a:ext>
+                </a:extLst>
               </a:tr>
               <a:tr h="548640">
                 <a:tc>
@@ -16107,7 +15993,7 @@
                     <a:bodyPr/>
                     <a:lstStyle/>
                     <a:p>
-                      <a:pPr algn="ctr" indent="0" marL="0">
+                      <a:pPr marL="0" indent="0" algn="ctr">
                         <a:buNone/>
                       </a:pPr>
                       <a:r>
@@ -16128,7 +16014,7 @@
                       </a:endParaRPr>
                     </a:p>
                   </a:txBody>
-                  <a:tcPr marL="91440" marR="91440" marT="45720" marB="45720" anchor="ctr">
+                  <a:tcPr anchor="ctr">
                     <a:lnL w="38100" cap="flat" cmpd="sng" algn="ctr">
                       <a:solidFill>
                         <a:srgbClr val="FFFFFF"/>
@@ -16175,7 +16061,7 @@
                     <a:bodyPr/>
                     <a:lstStyle/>
                     <a:p>
-                      <a:pPr algn="ctr" indent="0" marL="0">
+                      <a:pPr marL="0" indent="0" algn="ctr">
                         <a:buNone/>
                       </a:pPr>
                       <a:r>
@@ -16196,7 +16082,7 @@
                       </a:endParaRPr>
                     </a:p>
                   </a:txBody>
-                  <a:tcPr marL="91440" marR="91440" marT="45720" marB="45720" anchor="ctr">
+                  <a:tcPr anchor="ctr">
                     <a:lnL w="38100" cap="flat" cmpd="sng" algn="ctr">
                       <a:solidFill>
                         <a:srgbClr val="FFFFFF"/>
@@ -16243,7 +16129,7 @@
                     <a:bodyPr/>
                     <a:lstStyle/>
                     <a:p>
-                      <a:pPr algn="ctr" indent="0" marL="0">
+                      <a:pPr marL="0" indent="0" algn="ctr">
                         <a:buNone/>
                       </a:pPr>
                       <a:r>
@@ -16264,7 +16150,7 @@
                       </a:endParaRPr>
                     </a:p>
                   </a:txBody>
-                  <a:tcPr marL="91440" marR="91440" marT="45720" marB="45720" anchor="ctr">
+                  <a:tcPr anchor="ctr">
                     <a:lnL w="38100" cap="flat" cmpd="sng" algn="ctr">
                       <a:solidFill>
                         <a:srgbClr val="FFFFFF"/>
@@ -16311,7 +16197,7 @@
                     <a:bodyPr/>
                     <a:lstStyle/>
                     <a:p>
-                      <a:pPr algn="ctr" indent="0" marL="0">
+                      <a:pPr marL="0" indent="0" algn="ctr">
                         <a:buNone/>
                       </a:pPr>
                       <a:r>
@@ -16332,7 +16218,7 @@
                       </a:endParaRPr>
                     </a:p>
                   </a:txBody>
-                  <a:tcPr marL="91440" marR="91440" marT="45720" marB="45720" anchor="ctr">
+                  <a:tcPr anchor="ctr">
                     <a:lnL w="38100" cap="flat" cmpd="sng" algn="ctr">
                       <a:solidFill>
                         <a:srgbClr val="FFFFFF"/>
@@ -16374,6 +16260,11 @@
                     </a:solidFill>
                   </a:tcPr>
                 </a:tc>
+                <a:extLst>
+                  <a:ext uri="{0D108BD9-81ED-4DB2-BD59-A6C34878D82A}">
+                    <a16:rowId xmlns:a16="http://schemas.microsoft.com/office/drawing/2014/main" val="10001"/>
+                  </a:ext>
+                </a:extLst>
               </a:tr>
               <a:tr h="548640">
                 <a:tc>
@@ -16381,7 +16272,7 @@
                     <a:bodyPr/>
                     <a:lstStyle/>
                     <a:p>
-                      <a:pPr algn="ctr" indent="0" marL="0">
+                      <a:pPr marL="0" indent="0" algn="ctr">
                         <a:buNone/>
                       </a:pPr>
                       <a:r>
@@ -16402,7 +16293,7 @@
                       </a:endParaRPr>
                     </a:p>
                   </a:txBody>
-                  <a:tcPr marL="91440" marR="91440" marT="45720" marB="45720" anchor="ctr">
+                  <a:tcPr anchor="ctr">
                     <a:lnL w="38100" cap="flat" cmpd="sng" algn="ctr">
                       <a:solidFill>
                         <a:srgbClr val="FFFFFF"/>
@@ -16449,7 +16340,7 @@
                     <a:bodyPr/>
                     <a:lstStyle/>
                     <a:p>
-                      <a:pPr algn="ctr" indent="0" marL="0">
+                      <a:pPr marL="0" indent="0" algn="ctr">
                         <a:buNone/>
                       </a:pPr>
                       <a:r>
@@ -16470,7 +16361,7 @@
                       </a:endParaRPr>
                     </a:p>
                   </a:txBody>
-                  <a:tcPr marL="91440" marR="91440" marT="45720" marB="45720" anchor="ctr">
+                  <a:tcPr anchor="ctr">
                     <a:lnL w="38100" cap="flat" cmpd="sng" algn="ctr">
                       <a:solidFill>
                         <a:srgbClr val="FFFFFF"/>
@@ -16517,7 +16408,7 @@
                     <a:bodyPr/>
                     <a:lstStyle/>
                     <a:p>
-                      <a:pPr algn="ctr" indent="0" marL="0">
+                      <a:pPr marL="0" indent="0" algn="ctr">
                         <a:buNone/>
                       </a:pPr>
                       <a:r>
@@ -16538,7 +16429,7 @@
                       </a:endParaRPr>
                     </a:p>
                   </a:txBody>
-                  <a:tcPr marL="91440" marR="91440" marT="45720" marB="45720" anchor="ctr">
+                  <a:tcPr anchor="ctr">
                     <a:lnL w="38100" cap="flat" cmpd="sng" algn="ctr">
                       <a:solidFill>
                         <a:srgbClr val="FFFFFF"/>
@@ -16585,7 +16476,7 @@
                     <a:bodyPr/>
                     <a:lstStyle/>
                     <a:p>
-                      <a:pPr algn="ctr" indent="0" marL="0">
+                      <a:pPr marL="0" indent="0" algn="ctr">
                         <a:buNone/>
                       </a:pPr>
                       <a:r>
@@ -16606,7 +16497,7 @@
                       </a:endParaRPr>
                     </a:p>
                   </a:txBody>
-                  <a:tcPr marL="91440" marR="91440" marT="45720" marB="45720" anchor="ctr">
+                  <a:tcPr anchor="ctr">
                     <a:lnL w="38100" cap="flat" cmpd="sng" algn="ctr">
                       <a:solidFill>
                         <a:srgbClr val="FFFFFF"/>
@@ -16648,6 +16539,11 @@
                     </a:solidFill>
                   </a:tcPr>
                 </a:tc>
+                <a:extLst>
+                  <a:ext uri="{0D108BD9-81ED-4DB2-BD59-A6C34878D82A}">
+                    <a16:rowId xmlns:a16="http://schemas.microsoft.com/office/drawing/2014/main" val="10002"/>
+                  </a:ext>
+                </a:extLst>
               </a:tr>
               <a:tr h="548640">
                 <a:tc>
@@ -16655,7 +16551,7 @@
                     <a:bodyPr/>
                     <a:lstStyle/>
                     <a:p>
-                      <a:pPr algn="ctr" indent="0" marL="0">
+                      <a:pPr marL="0" indent="0" algn="ctr">
                         <a:buNone/>
                       </a:pPr>
                       <a:r>
@@ -16676,7 +16572,7 @@
                       </a:endParaRPr>
                     </a:p>
                   </a:txBody>
-                  <a:tcPr marL="91440" marR="91440" marT="45720" marB="45720" anchor="ctr">
+                  <a:tcPr anchor="ctr">
                     <a:lnL w="38100" cap="flat" cmpd="sng" algn="ctr">
                       <a:solidFill>
                         <a:srgbClr val="FFFFFF"/>
@@ -16723,7 +16619,7 @@
                     <a:bodyPr/>
                     <a:lstStyle/>
                     <a:p>
-                      <a:pPr algn="ctr" indent="0" marL="0">
+                      <a:pPr marL="0" indent="0" algn="ctr">
                         <a:buNone/>
                       </a:pPr>
                       <a:r>
@@ -16744,7 +16640,7 @@
                       </a:endParaRPr>
                     </a:p>
                   </a:txBody>
-                  <a:tcPr marL="91440" marR="91440" marT="45720" marB="45720" anchor="ctr">
+                  <a:tcPr anchor="ctr">
                     <a:lnL w="38100" cap="flat" cmpd="sng" algn="ctr">
                       <a:solidFill>
                         <a:srgbClr val="FFFFFF"/>
@@ -16791,7 +16687,7 @@
                     <a:bodyPr/>
                     <a:lstStyle/>
                     <a:p>
-                      <a:pPr algn="ctr" indent="0" marL="0">
+                      <a:pPr marL="0" indent="0" algn="ctr">
                         <a:buNone/>
                       </a:pPr>
                       <a:r>
@@ -16812,7 +16708,7 @@
                       </a:endParaRPr>
                     </a:p>
                   </a:txBody>
-                  <a:tcPr marL="91440" marR="91440" marT="45720" marB="45720" anchor="ctr">
+                  <a:tcPr anchor="ctr">
                     <a:lnL w="38100" cap="flat" cmpd="sng" algn="ctr">
                       <a:solidFill>
                         <a:srgbClr val="FFFFFF"/>
@@ -16859,7 +16755,7 @@
                     <a:bodyPr/>
                     <a:lstStyle/>
                     <a:p>
-                      <a:pPr algn="ctr" indent="0" marL="0">
+                      <a:pPr marL="0" indent="0" algn="ctr">
                         <a:buNone/>
                       </a:pPr>
                       <a:r>
@@ -16880,7 +16776,7 @@
                       </a:endParaRPr>
                     </a:p>
                   </a:txBody>
-                  <a:tcPr marL="91440" marR="91440" marT="45720" marB="45720" anchor="ctr">
+                  <a:tcPr anchor="ctr">
                     <a:lnL w="38100" cap="flat" cmpd="sng" algn="ctr">
                       <a:solidFill>
                         <a:srgbClr val="FFFFFF"/>
@@ -16922,6 +16818,11 @@
                     </a:solidFill>
                   </a:tcPr>
                 </a:tc>
+                <a:extLst>
+                  <a:ext uri="{0D108BD9-81ED-4DB2-BD59-A6C34878D82A}">
+                    <a16:rowId xmlns:a16="http://schemas.microsoft.com/office/drawing/2014/main" val="10003"/>
+                  </a:ext>
+                </a:extLst>
               </a:tr>
               <a:tr h="548640">
                 <a:tc>
@@ -16929,7 +16830,7 @@
                     <a:bodyPr/>
                     <a:lstStyle/>
                     <a:p>
-                      <a:pPr algn="ctr" indent="0" marL="0">
+                      <a:pPr marL="0" indent="0" algn="ctr">
                         <a:buNone/>
                       </a:pPr>
                       <a:r>
@@ -16950,7 +16851,7 @@
                       </a:endParaRPr>
                     </a:p>
                   </a:txBody>
-                  <a:tcPr marL="91440" marR="91440" marT="45720" marB="45720" anchor="ctr">
+                  <a:tcPr anchor="ctr">
                     <a:lnL w="38100" cap="flat" cmpd="sng" algn="ctr">
                       <a:solidFill>
                         <a:srgbClr val="FFFFFF"/>
@@ -16997,7 +16898,7 @@
                     <a:bodyPr/>
                     <a:lstStyle/>
                     <a:p>
-                      <a:pPr algn="ctr" indent="0" marL="0">
+                      <a:pPr marL="0" indent="0" algn="ctr">
                         <a:buNone/>
                       </a:pPr>
                       <a:r>
@@ -17018,7 +16919,7 @@
                       </a:endParaRPr>
                     </a:p>
                   </a:txBody>
-                  <a:tcPr marL="91440" marR="91440" marT="45720" marB="45720" anchor="ctr">
+                  <a:tcPr anchor="ctr">
                     <a:lnL w="38100" cap="flat" cmpd="sng" algn="ctr">
                       <a:solidFill>
                         <a:srgbClr val="FFFFFF"/>
@@ -17065,7 +16966,7 @@
                     <a:bodyPr/>
                     <a:lstStyle/>
                     <a:p>
-                      <a:pPr algn="ctr" indent="0" marL="0">
+                      <a:pPr marL="0" indent="0" algn="ctr">
                         <a:buNone/>
                       </a:pPr>
                       <a:r>
@@ -17086,7 +16987,7 @@
                       </a:endParaRPr>
                     </a:p>
                   </a:txBody>
-                  <a:tcPr marL="91440" marR="91440" marT="45720" marB="45720" anchor="ctr">
+                  <a:tcPr anchor="ctr">
                     <a:lnL w="38100" cap="flat" cmpd="sng" algn="ctr">
                       <a:solidFill>
                         <a:srgbClr val="FFFFFF"/>
@@ -17133,7 +17034,7 @@
                     <a:bodyPr/>
                     <a:lstStyle/>
                     <a:p>
-                      <a:pPr algn="ctr" indent="0" marL="0">
+                      <a:pPr marL="0" indent="0" algn="ctr">
                         <a:buNone/>
                       </a:pPr>
                       <a:r>
@@ -17154,7 +17055,7 @@
                       </a:endParaRPr>
                     </a:p>
                   </a:txBody>
-                  <a:tcPr marL="91440" marR="91440" marT="45720" marB="45720" anchor="ctr">
+                  <a:tcPr anchor="ctr">
                     <a:lnL w="38100" cap="flat" cmpd="sng" algn="ctr">
                       <a:solidFill>
                         <a:srgbClr val="FFFFFF"/>
@@ -17196,6 +17097,11 @@
                     </a:solidFill>
                   </a:tcPr>
                 </a:tc>
+                <a:extLst>
+                  <a:ext uri="{0D108BD9-81ED-4DB2-BD59-A6C34878D82A}">
+                    <a16:rowId xmlns:a16="http://schemas.microsoft.com/office/drawing/2014/main" val="10004"/>
+                  </a:ext>
+                </a:extLst>
               </a:tr>
             </a:tbl>
           </a:graphicData>
@@ -17222,7 +17128,7 @@
           <a:bodyPr wrap="square" lIns="0" tIns="0" rIns="0" bIns="0" rtlCol="0" anchor="ctr"/>
           <a:lstStyle/>
           <a:p>
-            <a:pPr algn="ctr" indent="0" marL="0">
+            <a:pPr marL="0" indent="0" algn="ctr">
               <a:buNone/>
             </a:pPr>
             <a:r>
@@ -17261,7 +17167,7 @@
           <a:bodyPr wrap="square" lIns="0" tIns="0" rIns="0" bIns="0" rtlCol="0" anchor="ctr"/>
           <a:lstStyle/>
           <a:p>
-            <a:pPr algn="r" indent="0" marL="0">
+            <a:pPr marL="0" indent="0" algn="r">
               <a:buNone/>
             </a:pPr>
             <a:r>
@@ -17295,6 +17201,7 @@
         <a:solidFill>
           <a:srgbClr val="FFFFFF"/>
         </a:solidFill>
+        <a:effectLst/>
       </p:bgPr>
     </p:bg>
     <p:spTree>
@@ -17333,14 +17240,14 @@
       </p:sp>
       <p:pic>
         <p:nvPicPr>
-          <p:cNvPr id="3" name="Image 0" descr="preencoded.png">    </p:cNvPr>
+          <p:cNvPr id="3" name="Image 0" descr="preencoded.png"/>
           <p:cNvPicPr>
             <a:picLocks noChangeAspect="1"/>
           </p:cNvPicPr>
           <p:nvPr/>
         </p:nvPicPr>
         <p:blipFill>
-          <a:blip r:embed="rId1"/>
+          <a:blip r:embed="rId3"/>
           <a:stretch>
             <a:fillRect/>
           </a:stretch>
@@ -17376,11 +17283,11 @@
           <a:bodyPr wrap="square" lIns="0" tIns="0" rIns="0" bIns="0" rtlCol="0" anchor="ctr"/>
           <a:lstStyle/>
           <a:p>
-            <a:pPr indent="0" marL="0">
+            <a:pPr marL="0" indent="0">
               <a:buNone/>
             </a:pPr>
             <a:r>
-              <a:rPr lang="en-US" sz="1200" b="1" spc="150" kern="0" dirty="0">
+              <a:rPr lang="en-US" sz="1200" b="1" kern="0" spc="150" dirty="0">
                 <a:solidFill>
                   <a:srgbClr val="6C4BC1"/>
                 </a:solidFill>
@@ -17415,7 +17322,7 @@
           <a:bodyPr wrap="square" lIns="0" tIns="0" rIns="0" bIns="0" rtlCol="0" anchor="ctr"/>
           <a:lstStyle/>
           <a:p>
-            <a:pPr indent="0" marL="0">
+            <a:pPr marL="0" indent="0">
               <a:buNone/>
             </a:pPr>
             <a:r>
@@ -17454,7 +17361,7 @@
           <a:bodyPr wrap="square" lIns="0" tIns="0" rIns="0" bIns="0" rtlCol="0" anchor="ctr"/>
           <a:lstStyle/>
           <a:p>
-            <a:pPr indent="0" marL="0">
+            <a:pPr marL="0" indent="0">
               <a:lnSpc>
                 <a:spcPts val="1800"/>
               </a:lnSpc>
@@ -17583,7 +17490,7 @@
           <a:bodyPr wrap="square" lIns="0" tIns="0" rIns="0" bIns="0" rtlCol="0" anchor="ctr"/>
           <a:lstStyle/>
           <a:p>
-            <a:pPr indent="0" marL="0">
+            <a:pPr marL="0" indent="0">
               <a:buNone/>
             </a:pPr>
             <a:r>
@@ -17622,7 +17529,7 @@
           <a:bodyPr wrap="square" lIns="0" tIns="0" rIns="0" bIns="0" rtlCol="0" anchor="ctr"/>
           <a:lstStyle/>
           <a:p>
-            <a:pPr indent="0" marL="0">
+            <a:pPr marL="0" indent="0">
               <a:buNone/>
             </a:pPr>
             <a:r>
@@ -17636,9 +17543,6 @@
               </a:rPr>
               <a:t>def </a:t>
             </a:r>
-            <a:pPr indent="0" marL="0">
-              <a:buNone/>
-            </a:pPr>
             <a:r>
               <a:rPr lang="en-US" sz="1400" dirty="0">
                 <a:solidFill>
@@ -17650,9 +17554,6 @@
               </a:rPr>
               <a:t>nand(x, y): </a:t>
             </a:r>
-            <a:pPr indent="0" marL="0">
-              <a:buNone/>
-            </a:pPr>
             <a:r>
               <a:rPr lang="en-US" sz="1400" dirty="0">
                 <a:solidFill>
@@ -17664,9 +17565,6 @@
               </a:rPr>
               <a:t>return </a:t>
             </a:r>
-            <a:pPr indent="0" marL="0">
-              <a:buNone/>
-            </a:pPr>
             <a:r>
               <a:rPr lang="en-US" sz="1400" dirty="0">
                 <a:solidFill>
@@ -17703,7 +17601,7 @@
           <a:bodyPr wrap="square" lIns="0" tIns="0" rIns="0" bIns="0" rtlCol="0" anchor="ctr"/>
           <a:lstStyle/>
           <a:p>
-            <a:pPr indent="0" marL="0">
+            <a:pPr marL="0" indent="0">
               <a:buNone/>
             </a:pPr>
             <a:r>
@@ -17742,7 +17640,7 @@
           <a:bodyPr wrap="square" lIns="0" tIns="0" rIns="0" bIns="0" rtlCol="0" anchor="ctr"/>
           <a:lstStyle/>
           <a:p>
-            <a:pPr indent="0" marL="0">
+            <a:pPr marL="0" indent="0">
               <a:buNone/>
             </a:pPr>
             <a:r>
@@ -17781,7 +17679,7 @@
           <a:bodyPr wrap="square" lIns="0" tIns="0" rIns="0" bIns="0" rtlCol="0" anchor="ctr"/>
           <a:lstStyle/>
           <a:p>
-            <a:pPr indent="0" marL="0">
+            <a:pPr marL="0" indent="0">
               <a:buNone/>
             </a:pPr>
             <a:r>
@@ -17820,7 +17718,7 @@
           <a:bodyPr wrap="square" lIns="0" tIns="0" rIns="0" bIns="0" rtlCol="0" anchor="ctr"/>
           <a:lstStyle/>
           <a:p>
-            <a:pPr algn="r" indent="0" marL="0">
+            <a:pPr marL="0" indent="0" algn="r">
               <a:buNone/>
             </a:pPr>
             <a:r>
@@ -17854,6 +17752,7 @@
         <a:solidFill>
           <a:srgbClr val="FFFFFF"/>
         </a:solidFill>
+        <a:effectLst/>
       </p:bgPr>
     </p:bg>
     <p:spTree>
@@ -17892,14 +17791,14 @@
       </p:sp>
       <p:pic>
         <p:nvPicPr>
-          <p:cNvPr id="3" name="Image 0" descr="preencoded.png">    </p:cNvPr>
+          <p:cNvPr id="3" name="Image 0" descr="preencoded.png"/>
           <p:cNvPicPr>
             <a:picLocks noChangeAspect="1"/>
           </p:cNvPicPr>
           <p:nvPr/>
         </p:nvPicPr>
         <p:blipFill>
-          <a:blip r:embed="rId1"/>
+          <a:blip r:embed="rId3"/>
           <a:stretch>
             <a:fillRect/>
           </a:stretch>
@@ -17935,11 +17834,11 @@
           <a:bodyPr wrap="square" lIns="0" tIns="0" rIns="0" bIns="0" rtlCol="0" anchor="ctr"/>
           <a:lstStyle/>
           <a:p>
-            <a:pPr indent="0" marL="0">
+            <a:pPr marL="0" indent="0">
               <a:buNone/>
             </a:pPr>
             <a:r>
-              <a:rPr lang="en-US" sz="1200" b="1" spc="150" kern="0" dirty="0">
+              <a:rPr lang="en-US" sz="1200" b="1" kern="0" spc="150" dirty="0">
                 <a:solidFill>
                   <a:srgbClr val="3EBD59"/>
                 </a:solidFill>
@@ -17974,7 +17873,7 @@
           <a:bodyPr wrap="square" lIns="0" tIns="0" rIns="0" bIns="0" rtlCol="0" anchor="ctr"/>
           <a:lstStyle/>
           <a:p>
-            <a:pPr indent="0" marL="0">
+            <a:pPr marL="0" indent="0">
               <a:buNone/>
             </a:pPr>
             <a:r>
@@ -18095,7 +17994,7 @@
           <a:bodyPr wrap="square" lIns="0" tIns="0" rIns="0" bIns="0" rtlCol="0" anchor="ctr"/>
           <a:lstStyle/>
           <a:p>
-            <a:pPr indent="0" marL="0">
+            <a:pPr marL="0" indent="0">
               <a:buNone/>
             </a:pPr>
             <a:r>
@@ -18115,14 +18014,14 @@
       </p:sp>
       <p:pic>
         <p:nvPicPr>
-          <p:cNvPr id="11" name="Image 1" descr="preencoded.png">    </p:cNvPr>
+          <p:cNvPr id="11" name="Image 1" descr="preencoded.png"/>
           <p:cNvPicPr>
             <a:picLocks noChangeAspect="1"/>
           </p:cNvPicPr>
           <p:nvPr/>
         </p:nvPicPr>
         <p:blipFill>
-          <a:blip r:embed="rId2"/>
+          <a:blip r:embed="rId4"/>
           <a:stretch>
             <a:fillRect/>
           </a:stretch>
@@ -18158,7 +18057,7 @@
           <a:bodyPr wrap="square" lIns="0" tIns="0" rIns="0" bIns="0" rtlCol="0" anchor="ctr"/>
           <a:lstStyle/>
           <a:p>
-            <a:pPr indent="0" marL="0">
+            <a:pPr marL="0" indent="0">
               <a:buNone/>
             </a:pPr>
             <a:r>
@@ -18172,9 +18071,6 @@
               </a:rPr>
               <a:t>def </a:t>
             </a:r>
-            <a:pPr indent="0" marL="0">
-              <a:buNone/>
-            </a:pPr>
             <a:r>
               <a:rPr lang="en-US" sz="1400" dirty="0">
                 <a:solidFill>
@@ -18186,9 +18082,6 @@
               </a:rPr>
               <a:t>nand(x, y): </a:t>
             </a:r>
-            <a:pPr indent="0" marL="0">
-              <a:buNone/>
-            </a:pPr>
             <a:r>
               <a:rPr lang="en-US" sz="1400" dirty="0">
                 <a:solidFill>
@@ -18200,9 +18093,6 @@
               </a:rPr>
               <a:t>return </a:t>
             </a:r>
-            <a:pPr indent="0" marL="0">
-              <a:buNone/>
-            </a:pPr>
             <a:r>
               <a:rPr lang="en-US" sz="1400" dirty="0">
                 <a:solidFill>
@@ -18239,7 +18129,7 @@
           <a:bodyPr wrap="square" lIns="0" tIns="0" rIns="0" bIns="0" rtlCol="0" anchor="ctr"/>
           <a:lstStyle/>
           <a:p>
-            <a:pPr indent="0" marL="0">
+            <a:pPr marL="0" indent="0">
               <a:buNone/>
             </a:pPr>
             <a:r>
@@ -18253,9 +18143,6 @@
               </a:rPr>
               <a:t>def </a:t>
             </a:r>
-            <a:pPr indent="0" marL="0">
-              <a:buNone/>
-            </a:pPr>
             <a:r>
               <a:rPr lang="en-US" sz="1400" dirty="0">
                 <a:solidFill>
@@ -18267,9 +18154,6 @@
               </a:rPr>
               <a:t>not_(x): </a:t>
             </a:r>
-            <a:pPr indent="0" marL="0">
-              <a:buNone/>
-            </a:pPr>
             <a:r>
               <a:rPr lang="en-US" sz="1400" dirty="0">
                 <a:solidFill>
@@ -18281,9 +18165,6 @@
               </a:rPr>
               <a:t>return </a:t>
             </a:r>
-            <a:pPr indent="0" marL="0">
-              <a:buNone/>
-            </a:pPr>
             <a:r>
               <a:rPr lang="en-US" sz="1400" dirty="0">
                 <a:solidFill>
@@ -18320,7 +18201,7 @@
           <a:bodyPr wrap="square" lIns="0" tIns="0" rIns="0" bIns="0" rtlCol="0" anchor="ctr"/>
           <a:lstStyle/>
           <a:p>
-            <a:pPr indent="0" marL="0">
+            <a:pPr marL="0" indent="0">
               <a:buNone/>
             </a:pPr>
             <a:r>
@@ -18334,9 +18215,6 @@
               </a:rPr>
               <a:t>def </a:t>
             </a:r>
-            <a:pPr indent="0" marL="0">
-              <a:buNone/>
-            </a:pPr>
             <a:r>
               <a:rPr lang="en-US" sz="1400" dirty="0">
                 <a:solidFill>
@@ -18348,9 +18226,6 @@
               </a:rPr>
               <a:t>and_(x, y): </a:t>
             </a:r>
-            <a:pPr indent="0" marL="0">
-              <a:buNone/>
-            </a:pPr>
             <a:r>
               <a:rPr lang="en-US" sz="1400" dirty="0">
                 <a:solidFill>
@@ -18362,9 +18237,6 @@
               </a:rPr>
               <a:t>return </a:t>
             </a:r>
-            <a:pPr indent="0" marL="0">
-              <a:buNone/>
-            </a:pPr>
             <a:r>
               <a:rPr lang="en-US" sz="1400" dirty="0">
                 <a:solidFill>
@@ -18401,7 +18273,7 @@
           <a:bodyPr wrap="square" lIns="0" tIns="0" rIns="0" bIns="0" rtlCol="0" anchor="ctr"/>
           <a:lstStyle/>
           <a:p>
-            <a:pPr indent="0" marL="0">
+            <a:pPr marL="0" indent="0">
               <a:buNone/>
             </a:pPr>
             <a:r>
@@ -18415,9 +18287,6 @@
               </a:rPr>
               <a:t>def </a:t>
             </a:r>
-            <a:pPr indent="0" marL="0">
-              <a:buNone/>
-            </a:pPr>
             <a:r>
               <a:rPr lang="en-US" sz="1400" dirty="0">
                 <a:solidFill>
@@ -18429,9 +18298,6 @@
               </a:rPr>
               <a:t>or_(x, y): </a:t>
             </a:r>
-            <a:pPr indent="0" marL="0">
-              <a:buNone/>
-            </a:pPr>
             <a:r>
               <a:rPr lang="en-US" sz="1400" dirty="0">
                 <a:solidFill>
@@ -18443,9 +18309,6 @@
               </a:rPr>
               <a:t>return </a:t>
             </a:r>
-            <a:pPr indent="0" marL="0">
-              <a:buNone/>
-            </a:pPr>
             <a:r>
               <a:rPr lang="en-US" sz="1400" dirty="0">
                 <a:solidFill>
@@ -18482,7 +18345,7 @@
           <a:bodyPr wrap="square" lIns="0" tIns="0" rIns="0" bIns="0" rtlCol="0" anchor="ctr"/>
           <a:lstStyle/>
           <a:p>
-            <a:pPr algn="ctr" indent="0" marL="0">
+            <a:pPr marL="0" indent="0" algn="ctr">
               <a:buNone/>
             </a:pPr>
             <a:r>
@@ -18521,7 +18384,7 @@
           <a:bodyPr wrap="square" lIns="0" tIns="0" rIns="0" bIns="0" rtlCol="0" anchor="ctr"/>
           <a:lstStyle/>
           <a:p>
-            <a:pPr algn="r" indent="0" marL="0">
+            <a:pPr marL="0" indent="0" algn="r">
               <a:buNone/>
             </a:pPr>
             <a:r>
@@ -18555,6 +18418,7 @@
         <a:solidFill>
           <a:srgbClr val="141B41"/>
         </a:solidFill>
+        <a:effectLst/>
       </p:bgPr>
     </p:bg>
     <p:spTree>
@@ -18593,14 +18457,14 @@
       </p:sp>
       <p:pic>
         <p:nvPicPr>
-          <p:cNvPr id="3" name="Image 0" descr="preencoded.png">    </p:cNvPr>
+          <p:cNvPr id="3" name="Image 0" descr="preencoded.png"/>
           <p:cNvPicPr>
             <a:picLocks noChangeAspect="1"/>
           </p:cNvPicPr>
           <p:nvPr/>
         </p:nvPicPr>
         <p:blipFill>
-          <a:blip r:embed="rId1"/>
+          <a:blip r:embed="rId3"/>
           <a:stretch>
             <a:fillRect/>
           </a:stretch>
@@ -18636,11 +18500,11 @@
           <a:bodyPr wrap="square" lIns="0" tIns="0" rIns="0" bIns="0" rtlCol="0" anchor="ctr"/>
           <a:lstStyle/>
           <a:p>
-            <a:pPr indent="0" marL="0">
+            <a:pPr marL="0" indent="0">
               <a:buNone/>
             </a:pPr>
             <a:r>
-              <a:rPr lang="en-US" sz="1200" b="1" spc="150" kern="0" dirty="0">
+              <a:rPr lang="en-US" sz="1200" b="1" kern="0" spc="150" dirty="0">
                 <a:solidFill>
                   <a:srgbClr val="2FE6C7"/>
                 </a:solidFill>
@@ -18675,7 +18539,7 @@
           <a:bodyPr wrap="square" lIns="0" tIns="0" rIns="0" bIns="0" rtlCol="0" anchor="ctr"/>
           <a:lstStyle/>
           <a:p>
-            <a:pPr indent="0" marL="0">
+            <a:pPr marL="0" indent="0">
               <a:buNone/>
             </a:pPr>
             <a:r>
@@ -18714,7 +18578,7 @@
           <a:bodyPr wrap="square" lIns="0" tIns="0" rIns="0" bIns="0" rtlCol="0" anchor="ctr"/>
           <a:lstStyle/>
           <a:p>
-            <a:pPr indent="0" marL="0">
+            <a:pPr marL="0" indent="0">
               <a:lnSpc>
                 <a:spcPts val="1900"/>
               </a:lnSpc>
@@ -18783,7 +18647,7 @@
           <a:bodyPr wrap="square" lIns="0" tIns="0" rIns="0" bIns="0" rtlCol="0" anchor="ctr"/>
           <a:lstStyle/>
           <a:p>
-            <a:pPr algn="ctr" indent="0" marL="0">
+            <a:pPr marL="0" indent="0" algn="ctr">
               <a:buNone/>
             </a:pPr>
             <a:r>
@@ -18904,7 +18768,7 @@
           <a:bodyPr wrap="square" lIns="0" tIns="0" rIns="0" bIns="0" rtlCol="0" anchor="ctr"/>
           <a:lstStyle/>
           <a:p>
-            <a:pPr indent="0" marL="0">
+            <a:pPr marL="0" indent="0">
               <a:buNone/>
             </a:pPr>
             <a:r>
@@ -18943,7 +18807,7 @@
           <a:bodyPr wrap="square" lIns="0" tIns="0" rIns="0" bIns="0" rtlCol="0" anchor="ctr"/>
           <a:lstStyle/>
           <a:p>
-            <a:pPr indent="0" marL="0">
+            <a:pPr marL="0" indent="0">
               <a:buNone/>
             </a:pPr>
             <a:r>
@@ -18957,9 +18821,6 @@
               </a:rPr>
               <a:t>def </a:t>
             </a:r>
-            <a:pPr indent="0" marL="0">
-              <a:buNone/>
-            </a:pPr>
             <a:r>
               <a:rPr lang="en-US" sz="1500" dirty="0">
                 <a:solidFill>
@@ -18996,7 +18857,7 @@
           <a:bodyPr wrap="square" lIns="0" tIns="0" rIns="0" bIns="0" rtlCol="0" anchor="ctr"/>
           <a:lstStyle/>
           <a:p>
-            <a:pPr indent="0" marL="0">
+            <a:pPr marL="0" indent="0">
               <a:buNone/>
             </a:pPr>
             <a:r>
@@ -19035,7 +18896,7 @@
           <a:bodyPr wrap="square" lIns="0" tIns="0" rIns="0" bIns="0" rtlCol="0" anchor="ctr"/>
           <a:lstStyle/>
           <a:p>
-            <a:pPr indent="0" marL="0">
+            <a:pPr marL="0" indent="0">
               <a:buNone/>
             </a:pPr>
             <a:r>
@@ -19074,7 +18935,7 @@
           <a:bodyPr wrap="square" lIns="0" tIns="0" rIns="0" bIns="0" rtlCol="0" anchor="ctr"/>
           <a:lstStyle/>
           <a:p>
-            <a:pPr indent="0" marL="0">
+            <a:pPr marL="0" indent="0">
               <a:buNone/>
             </a:pPr>
             <a:r>
@@ -19113,7 +18974,7 @@
           <a:bodyPr wrap="square" lIns="0" tIns="0" rIns="0" bIns="0" rtlCol="0" anchor="ctr"/>
           <a:lstStyle/>
           <a:p>
-            <a:pPr algn="r" indent="0" marL="0">
+            <a:pPr marL="0" indent="0" algn="r">
               <a:buNone/>
             </a:pPr>
             <a:r>
@@ -19147,6 +19008,7 @@
         <a:solidFill>
           <a:srgbClr val="141B41"/>
         </a:solidFill>
+        <a:effectLst/>
       </p:bgPr>
     </p:bg>
     <p:spTree>
@@ -19185,14 +19047,14 @@
       </p:sp>
       <p:pic>
         <p:nvPicPr>
-          <p:cNvPr id="3" name="Image 0" descr="preencoded.png">    </p:cNvPr>
+          <p:cNvPr id="3" name="Image 0" descr="preencoded.png"/>
           <p:cNvPicPr>
             <a:picLocks noChangeAspect="1"/>
           </p:cNvPicPr>
           <p:nvPr/>
         </p:nvPicPr>
         <p:blipFill>
-          <a:blip r:embed="rId1"/>
+          <a:blip r:embed="rId3"/>
           <a:stretch>
             <a:fillRect/>
           </a:stretch>
@@ -19228,11 +19090,11 @@
           <a:bodyPr wrap="square" lIns="0" tIns="0" rIns="0" bIns="0" rtlCol="0" anchor="ctr"/>
           <a:lstStyle/>
           <a:p>
-            <a:pPr indent="0" marL="0">
+            <a:pPr marL="0" indent="0">
               <a:buNone/>
             </a:pPr>
             <a:r>
-              <a:rPr lang="en-US" sz="1200" b="1" spc="150" kern="0" dirty="0">
+              <a:rPr lang="en-US" sz="1200" b="1" kern="0" spc="150" dirty="0">
                 <a:solidFill>
                   <a:srgbClr val="2FE6C7"/>
                 </a:solidFill>
@@ -19267,7 +19129,7 @@
           <a:bodyPr wrap="square" lIns="0" tIns="0" rIns="0" bIns="0" rtlCol="0" anchor="ctr"/>
           <a:lstStyle/>
           <a:p>
-            <a:pPr indent="0" marL="0">
+            <a:pPr marL="0" indent="0">
               <a:buNone/>
             </a:pPr>
             <a:r>
@@ -19388,7 +19250,7 @@
           <a:bodyPr wrap="square" lIns="0" tIns="0" rIns="0" bIns="0" rtlCol="0" anchor="ctr"/>
           <a:lstStyle/>
           <a:p>
-            <a:pPr indent="0" marL="0">
+            <a:pPr marL="0" indent="0">
               <a:buNone/>
             </a:pPr>
             <a:r>
@@ -19408,14 +19270,14 @@
       </p:sp>
       <p:pic>
         <p:nvPicPr>
-          <p:cNvPr id="11" name="Image 1" descr="preencoded.png">    </p:cNvPr>
+          <p:cNvPr id="11" name="Image 1" descr="preencoded.png"/>
           <p:cNvPicPr>
             <a:picLocks noChangeAspect="1"/>
           </p:cNvPicPr>
           <p:nvPr/>
         </p:nvPicPr>
         <p:blipFill>
-          <a:blip r:embed="rId2"/>
+          <a:blip r:embed="rId4"/>
           <a:stretch>
             <a:fillRect/>
           </a:stretch>
@@ -19451,7 +19313,7 @@
           <a:bodyPr wrap="square" lIns="0" tIns="0" rIns="0" bIns="0" rtlCol="0" anchor="ctr"/>
           <a:lstStyle/>
           <a:p>
-            <a:pPr indent="0" marL="0">
+            <a:pPr marL="0" indent="0">
               <a:buNone/>
             </a:pPr>
             <a:r>
@@ -19465,9 +19327,6 @@
               </a:rPr>
               <a:t>def </a:t>
             </a:r>
-            <a:pPr indent="0" marL="0">
-              <a:buNone/>
-            </a:pPr>
             <a:r>
               <a:rPr lang="en-US" sz="1350" dirty="0">
                 <a:solidFill>
@@ -19504,7 +19363,7 @@
           <a:bodyPr wrap="square" lIns="0" tIns="0" rIns="0" bIns="0" rtlCol="0" anchor="ctr"/>
           <a:lstStyle/>
           <a:p>
-            <a:pPr indent="0" marL="0">
+            <a:pPr marL="0" indent="0">
               <a:buNone/>
             </a:pPr>
             <a:r>
@@ -19543,7 +19402,7 @@
           <a:bodyPr wrap="square" lIns="0" tIns="0" rIns="0" bIns="0" rtlCol="0" anchor="ctr"/>
           <a:lstStyle/>
           <a:p>
-            <a:pPr indent="0" marL="0">
+            <a:pPr marL="0" indent="0">
               <a:buNone/>
             </a:pPr>
             <a:r>
@@ -19582,7 +19441,7 @@
           <a:bodyPr wrap="square" lIns="0" tIns="0" rIns="0" bIns="0" rtlCol="0" anchor="ctr"/>
           <a:lstStyle/>
           <a:p>
-            <a:pPr indent="0" marL="0">
+            <a:pPr marL="0" indent="0">
               <a:buNone/>
             </a:pPr>
             <a:r>
@@ -19621,7 +19480,7 @@
           <a:bodyPr wrap="square" lIns="0" tIns="0" rIns="0" bIns="0" rtlCol="0" anchor="ctr"/>
           <a:lstStyle/>
           <a:p>
-            <a:pPr indent="0" marL="0">
+            <a:pPr marL="0" indent="0">
               <a:buNone/>
             </a:pPr>
             <a:r>
@@ -19635,9 +19494,6 @@
               </a:rPr>
               <a:t>    return </a:t>
             </a:r>
-            <a:pPr indent="0" marL="0">
-              <a:buNone/>
-            </a:pPr>
             <a:r>
               <a:rPr lang="en-US" sz="1350" dirty="0">
                 <a:solidFill>
@@ -19674,7 +19530,7 @@
           <a:bodyPr wrap="square" lIns="0" tIns="0" rIns="0" bIns="0" rtlCol="0" anchor="ctr"/>
           <a:lstStyle/>
           <a:p>
-            <a:pPr algn="ctr" indent="0" marL="0">
+            <a:pPr marL="0" indent="0" algn="ctr">
               <a:buNone/>
             </a:pPr>
             <a:r>
@@ -19713,7 +19569,7 @@
           <a:bodyPr wrap="square" lIns="0" tIns="0" rIns="0" bIns="0" rtlCol="0" anchor="ctr"/>
           <a:lstStyle/>
           <a:p>
-            <a:pPr algn="ctr" indent="0" marL="0">
+            <a:pPr marL="0" indent="0" algn="ctr">
               <a:buNone/>
             </a:pPr>
             <a:r>
@@ -19752,7 +19608,7 @@
           <a:bodyPr wrap="square" lIns="0" tIns="0" rIns="0" bIns="0" rtlCol="0" anchor="ctr"/>
           <a:lstStyle/>
           <a:p>
-            <a:pPr algn="r" indent="0" marL="0">
+            <a:pPr marL="0" indent="0" algn="r">
               <a:buNone/>
             </a:pPr>
             <a:r>
@@ -19786,6 +19642,7 @@
         <a:solidFill>
           <a:srgbClr val="FFFFFF"/>
         </a:solidFill>
+        <a:effectLst/>
       </p:bgPr>
     </p:bg>
     <p:spTree>
@@ -19823,11 +19680,11 @@
           <a:bodyPr wrap="square" lIns="0" tIns="0" rIns="0" bIns="0" rtlCol="0" anchor="ctr"/>
           <a:lstStyle/>
           <a:p>
-            <a:pPr algn="l" indent="0" marL="0">
+            <a:pPr marL="0" indent="0" algn="l">
               <a:buNone/>
             </a:pPr>
             <a:r>
-              <a:rPr lang="en-US" sz="1200" b="1" spc="200" kern="0" dirty="0">
+              <a:rPr lang="en-US" sz="1200" b="1" kern="0" spc="200" dirty="0">
                 <a:solidFill>
                   <a:srgbClr val="6C4BC1"/>
                 </a:solidFill>
@@ -19862,7 +19719,7 @@
           <a:bodyPr wrap="square" lIns="0" tIns="0" rIns="0" bIns="0" rtlCol="0" anchor="ctr"/>
           <a:lstStyle/>
           <a:p>
-            <a:pPr indent="0" marL="0">
+            <a:pPr marL="0" indent="0">
               <a:buNone/>
             </a:pPr>
             <a:r>
@@ -19901,7 +19758,7 @@
           <a:bodyPr wrap="square" lIns="0" tIns="0" rIns="0" bIns="0" rtlCol="0" anchor="ctr"/>
           <a:lstStyle/>
           <a:p>
-            <a:pPr indent="0" marL="0">
+            <a:pPr marL="0" indent="0">
               <a:buNone/>
             </a:pPr>
             <a:r>
@@ -19963,307 +19820,7 @@
       </p:sp>
       <p:pic>
         <p:nvPicPr>
-          <p:cNvPr id="7" name="Image 0" descr="preencoded.png">    </p:cNvPr>
-          <p:cNvPicPr>
-            <a:picLocks noChangeAspect="1"/>
-          </p:cNvPicPr>
-          <p:nvPr/>
-        </p:nvPicPr>
-        <p:blipFill>
-          <a:blip r:embed="rId1"/>
-          <a:stretch>
-            <a:fillRect/>
-          </a:stretch>
-        </p:blipFill>
-        <p:spPr>
-          <a:xfrm>
-            <a:off x="1042416" y="2459736"/>
-            <a:ext cx="182880" cy="182880"/>
-          </a:xfrm>
-          <a:prstGeom prst="rect">
-            <a:avLst/>
-          </a:prstGeom>
-        </p:spPr>
-      </p:pic>
-      <p:sp>
-        <p:nvSpPr>
-          <p:cNvPr id="8" name="Text 5"/>
-          <p:cNvSpPr/>
-          <p:nvPr/>
-        </p:nvSpPr>
-        <p:spPr>
-          <a:xfrm>
-            <a:off x="896112" y="2898648"/>
-            <a:ext cx="3026664" cy="777240"/>
-          </a:xfrm>
-          <a:prstGeom prst="rect">
-            <a:avLst/>
-          </a:prstGeom>
-          <a:noFill/>
-          <a:ln/>
-        </p:spPr>
-        <p:txBody>
-          <a:bodyPr wrap="square" lIns="0" tIns="0" rIns="0" bIns="0" rtlCol="0" anchor="ctr"/>
-          <a:lstStyle/>
-          <a:p>
-            <a:pPr indent="0" marL="0">
-              <a:lnSpc>
-                <a:spcPts val="1500"/>
-              </a:lnSpc>
-              <a:buNone/>
-            </a:pPr>
-            <a:r>
-              <a:rPr lang="en-US" sz="1250" b="1" dirty="0">
-                <a:solidFill>
-                  <a:srgbClr val="1B1B2F"/>
-                </a:solidFill>
-                <a:latin typeface="Calibri" pitchFamily="34" charset="0"/>
-                <a:ea typeface="Calibri" pitchFamily="34" charset="-122"/>
-                <a:cs typeface="Calibri" pitchFamily="34" charset="-120"/>
-              </a:rPr>
-              <a:t>TOCCI, R. J.; WIDMER, N. S.; MOSS, G. L.</a:t>
-            </a:r>
-            <a:endParaRPr lang="en-US" sz="1250" dirty="0"/>
-          </a:p>
-        </p:txBody>
-      </p:sp>
-      <p:sp>
-        <p:nvSpPr>
-          <p:cNvPr id="9" name="Text 6"/>
-          <p:cNvSpPr/>
-          <p:nvPr/>
-        </p:nvSpPr>
-        <p:spPr>
-          <a:xfrm>
-            <a:off x="896112" y="3749040"/>
-            <a:ext cx="3026664" cy="2103120"/>
-          </a:xfrm>
-          <a:prstGeom prst="rect">
-            <a:avLst/>
-          </a:prstGeom>
-          <a:noFill/>
-          <a:ln/>
-        </p:spPr>
-        <p:txBody>
-          <a:bodyPr wrap="square" lIns="0" tIns="0" rIns="0" bIns="0" rtlCol="0" anchor="ctr"/>
-          <a:lstStyle/>
-          <a:p>
-            <a:pPr indent="0" marL="0">
-              <a:lnSpc>
-                <a:spcPts val="1700"/>
-              </a:lnSpc>
-              <a:buNone/>
-            </a:pPr>
-            <a:r>
-              <a:rPr lang="en-US" sz="1200" dirty="0">
-                <a:solidFill>
-                  <a:srgbClr val="6B6B80"/>
-                </a:solidFill>
-                <a:latin typeface="Calibri" pitchFamily="34" charset="0"/>
-                <a:ea typeface="Calibri" pitchFamily="34" charset="-122"/>
-                <a:cs typeface="Calibri" pitchFamily="34" charset="-120"/>
-              </a:rPr>
-              <a:t>Sistemas Digitais: princípios e aplicações. Pearson — portas lógicas e circuitos combinacionais.</a:t>
-            </a:r>
-            <a:endParaRPr lang="en-US" sz="1200" dirty="0"/>
-          </a:p>
-        </p:txBody>
-      </p:sp>
-      <p:sp>
-        <p:nvSpPr>
-          <p:cNvPr id="10" name="Shape 7"/>
-          <p:cNvSpPr/>
-          <p:nvPr/>
-        </p:nvSpPr>
-        <p:spPr>
-          <a:xfrm>
-            <a:off x="4379976" y="2057400"/>
-            <a:ext cx="3538728" cy="4023360"/>
-          </a:xfrm>
-          <a:prstGeom prst="roundRect">
-            <a:avLst>
-              <a:gd name="adj" fmla="val 3101"/>
-            </a:avLst>
-          </a:prstGeom>
-          <a:solidFill>
-            <a:srgbClr val="F3F1FB"/>
-          </a:solidFill>
-          <a:ln/>
-        </p:spPr>
-      </p:sp>
-      <p:sp>
-        <p:nvSpPr>
-          <p:cNvPr id="11" name="Shape 8"/>
-          <p:cNvSpPr/>
-          <p:nvPr/>
-        </p:nvSpPr>
-        <p:spPr>
-          <a:xfrm>
-            <a:off x="4636008" y="2313432"/>
-            <a:ext cx="475488" cy="475488"/>
-          </a:xfrm>
-          <a:prstGeom prst="ellipse">
-            <a:avLst/>
-          </a:prstGeom>
-          <a:solidFill>
-            <a:srgbClr val="6C4BC1"/>
-          </a:solidFill>
-          <a:ln/>
-        </p:spPr>
-      </p:sp>
-      <p:pic>
-        <p:nvPicPr>
-          <p:cNvPr id="12" name="Image 1" descr="preencoded.png">    </p:cNvPr>
-          <p:cNvPicPr>
-            <a:picLocks noChangeAspect="1"/>
-          </p:cNvPicPr>
-          <p:nvPr/>
-        </p:nvPicPr>
-        <p:blipFill>
-          <a:blip r:embed="rId2"/>
-          <a:stretch>
-            <a:fillRect/>
-          </a:stretch>
-        </p:blipFill>
-        <p:spPr>
-          <a:xfrm>
-            <a:off x="4782312" y="2459736"/>
-            <a:ext cx="182880" cy="182880"/>
-          </a:xfrm>
-          <a:prstGeom prst="rect">
-            <a:avLst/>
-          </a:prstGeom>
-        </p:spPr>
-      </p:pic>
-      <p:sp>
-        <p:nvSpPr>
-          <p:cNvPr id="13" name="Text 9"/>
-          <p:cNvSpPr/>
-          <p:nvPr/>
-        </p:nvSpPr>
-        <p:spPr>
-          <a:xfrm>
-            <a:off x="4636008" y="2898648"/>
-            <a:ext cx="3026664" cy="777240"/>
-          </a:xfrm>
-          <a:prstGeom prst="rect">
-            <a:avLst/>
-          </a:prstGeom>
-          <a:noFill/>
-          <a:ln/>
-        </p:spPr>
-        <p:txBody>
-          <a:bodyPr wrap="square" lIns="0" tIns="0" rIns="0" bIns="0" rtlCol="0" anchor="ctr"/>
-          <a:lstStyle/>
-          <a:p>
-            <a:pPr indent="0" marL="0">
-              <a:lnSpc>
-                <a:spcPts val="1500"/>
-              </a:lnSpc>
-              <a:buNone/>
-            </a:pPr>
-            <a:r>
-              <a:rPr lang="en-US" sz="1250" b="1" dirty="0">
-                <a:solidFill>
-                  <a:srgbClr val="1B1B2F"/>
-                </a:solidFill>
-                <a:latin typeface="Calibri" pitchFamily="34" charset="0"/>
-                <a:ea typeface="Calibri" pitchFamily="34" charset="-122"/>
-                <a:cs typeface="Calibri" pitchFamily="34" charset="-120"/>
-              </a:rPr>
-              <a:t>IDOETA, I. V.; CAPUANO, F. G.</a:t>
-            </a:r>
-            <a:endParaRPr lang="en-US" sz="1250" dirty="0"/>
-          </a:p>
-        </p:txBody>
-      </p:sp>
-      <p:sp>
-        <p:nvSpPr>
-          <p:cNvPr id="14" name="Text 10"/>
-          <p:cNvSpPr/>
-          <p:nvPr/>
-        </p:nvSpPr>
-        <p:spPr>
-          <a:xfrm>
-            <a:off x="4636008" y="3749040"/>
-            <a:ext cx="3026664" cy="2103120"/>
-          </a:xfrm>
-          <a:prstGeom prst="rect">
-            <a:avLst/>
-          </a:prstGeom>
-          <a:noFill/>
-          <a:ln/>
-        </p:spPr>
-        <p:txBody>
-          <a:bodyPr wrap="square" lIns="0" tIns="0" rIns="0" bIns="0" rtlCol="0" anchor="ctr"/>
-          <a:lstStyle/>
-          <a:p>
-            <a:pPr indent="0" marL="0">
-              <a:lnSpc>
-                <a:spcPts val="1700"/>
-              </a:lnSpc>
-              <a:buNone/>
-            </a:pPr>
-            <a:r>
-              <a:rPr lang="en-US" sz="1200" dirty="0">
-                <a:solidFill>
-                  <a:srgbClr val="6B6B80"/>
-                </a:solidFill>
-                <a:latin typeface="Calibri" pitchFamily="34" charset="0"/>
-                <a:ea typeface="Calibri" pitchFamily="34" charset="-122"/>
-                <a:cs typeface="Calibri" pitchFamily="34" charset="-120"/>
-              </a:rPr>
-              <a:t>Elementos de Eletrônica Digital. Érica — cap. Circuitos combinacionais (meio somador e somador completo).</a:t>
-            </a:r>
-            <a:endParaRPr lang="en-US" sz="1200" dirty="0"/>
-          </a:p>
-        </p:txBody>
-      </p:sp>
-      <p:sp>
-        <p:nvSpPr>
-          <p:cNvPr id="15" name="Shape 11"/>
-          <p:cNvSpPr/>
-          <p:nvPr/>
-        </p:nvSpPr>
-        <p:spPr>
-          <a:xfrm>
-            <a:off x="8119872" y="2057400"/>
-            <a:ext cx="3538728" cy="4023360"/>
-          </a:xfrm>
-          <a:prstGeom prst="roundRect">
-            <a:avLst>
-              <a:gd name="adj" fmla="val 3101"/>
-            </a:avLst>
-          </a:prstGeom>
-          <a:solidFill>
-            <a:srgbClr val="F3F1FB"/>
-          </a:solidFill>
-          <a:ln/>
-        </p:spPr>
-      </p:sp>
-      <p:sp>
-        <p:nvSpPr>
-          <p:cNvPr id="16" name="Shape 12"/>
-          <p:cNvSpPr/>
-          <p:nvPr/>
-        </p:nvSpPr>
-        <p:spPr>
-          <a:xfrm>
-            <a:off x="8375904" y="2313432"/>
-            <a:ext cx="475488" cy="475488"/>
-          </a:xfrm>
-          <a:prstGeom prst="ellipse">
-            <a:avLst/>
-          </a:prstGeom>
-          <a:solidFill>
-            <a:srgbClr val="6C4BC1"/>
-          </a:solidFill>
-          <a:ln/>
-        </p:spPr>
-      </p:sp>
-      <p:pic>
-        <p:nvPicPr>
-          <p:cNvPr id="17" name="Image 2" descr="preencoded.png">    </p:cNvPr>
+          <p:cNvPr id="7" name="Image 0" descr="preencoded.png"/>
           <p:cNvPicPr>
             <a:picLocks noChangeAspect="1"/>
           </p:cNvPicPr>
@@ -20277,7 +19834,7 @@
         </p:blipFill>
         <p:spPr>
           <a:xfrm>
-            <a:off x="8522208" y="2459736"/>
+            <a:off x="1042416" y="2459736"/>
             <a:ext cx="182880" cy="182880"/>
           </a:xfrm>
           <a:prstGeom prst="rect">
@@ -20287,13 +19844,13 @@
       </p:pic>
       <p:sp>
         <p:nvSpPr>
-          <p:cNvPr id="18" name="Text 13"/>
-          <p:cNvSpPr/>
-          <p:nvPr/>
-        </p:nvSpPr>
-        <p:spPr>
-          <a:xfrm>
-            <a:off x="8375904" y="2898648"/>
+          <p:cNvPr id="8" name="Text 5"/>
+          <p:cNvSpPr/>
+          <p:nvPr/>
+        </p:nvSpPr>
+        <p:spPr>
+          <a:xfrm>
+            <a:off x="896112" y="2898648"/>
             <a:ext cx="3026664" cy="777240"/>
           </a:xfrm>
           <a:prstGeom prst="rect">
@@ -20306,7 +19863,7 @@
           <a:bodyPr wrap="square" lIns="0" tIns="0" rIns="0" bIns="0" rtlCol="0" anchor="ctr"/>
           <a:lstStyle/>
           <a:p>
-            <a:pPr indent="0" marL="0">
+            <a:pPr marL="0" indent="0">
               <a:lnSpc>
                 <a:spcPts val="1500"/>
               </a:lnSpc>
@@ -20321,6 +19878,306 @@
                 <a:ea typeface="Calibri" pitchFamily="34" charset="-122"/>
                 <a:cs typeface="Calibri" pitchFamily="34" charset="-120"/>
               </a:rPr>
+              <a:t>TOCCI, R. J.; WIDMER, N. S.; MOSS, G. L.</a:t>
+            </a:r>
+            <a:endParaRPr lang="en-US" sz="1250" dirty="0"/>
+          </a:p>
+        </p:txBody>
+      </p:sp>
+      <p:sp>
+        <p:nvSpPr>
+          <p:cNvPr id="9" name="Text 6"/>
+          <p:cNvSpPr/>
+          <p:nvPr/>
+        </p:nvSpPr>
+        <p:spPr>
+          <a:xfrm>
+            <a:off x="896112" y="3749040"/>
+            <a:ext cx="3026664" cy="2103120"/>
+          </a:xfrm>
+          <a:prstGeom prst="rect">
+            <a:avLst/>
+          </a:prstGeom>
+          <a:noFill/>
+          <a:ln/>
+        </p:spPr>
+        <p:txBody>
+          <a:bodyPr wrap="square" lIns="0" tIns="0" rIns="0" bIns="0" rtlCol="0" anchor="ctr"/>
+          <a:lstStyle/>
+          <a:p>
+            <a:pPr marL="0" indent="0">
+              <a:lnSpc>
+                <a:spcPts val="1700"/>
+              </a:lnSpc>
+              <a:buNone/>
+            </a:pPr>
+            <a:r>
+              <a:rPr lang="en-US" sz="1200" dirty="0">
+                <a:solidFill>
+                  <a:srgbClr val="6B6B80"/>
+                </a:solidFill>
+                <a:latin typeface="Calibri" pitchFamily="34" charset="0"/>
+                <a:ea typeface="Calibri" pitchFamily="34" charset="-122"/>
+                <a:cs typeface="Calibri" pitchFamily="34" charset="-120"/>
+              </a:rPr>
+              <a:t>Sistemas Digitais: princípios e aplicações. Pearson — portas lógicas e circuitos combinacionais.</a:t>
+            </a:r>
+            <a:endParaRPr lang="en-US" sz="1200" dirty="0"/>
+          </a:p>
+        </p:txBody>
+      </p:sp>
+      <p:sp>
+        <p:nvSpPr>
+          <p:cNvPr id="10" name="Shape 7"/>
+          <p:cNvSpPr/>
+          <p:nvPr/>
+        </p:nvSpPr>
+        <p:spPr>
+          <a:xfrm>
+            <a:off x="4379976" y="2057400"/>
+            <a:ext cx="3538728" cy="4023360"/>
+          </a:xfrm>
+          <a:prstGeom prst="roundRect">
+            <a:avLst>
+              <a:gd name="adj" fmla="val 3101"/>
+            </a:avLst>
+          </a:prstGeom>
+          <a:solidFill>
+            <a:srgbClr val="F3F1FB"/>
+          </a:solidFill>
+          <a:ln/>
+        </p:spPr>
+      </p:sp>
+      <p:sp>
+        <p:nvSpPr>
+          <p:cNvPr id="11" name="Shape 8"/>
+          <p:cNvSpPr/>
+          <p:nvPr/>
+        </p:nvSpPr>
+        <p:spPr>
+          <a:xfrm>
+            <a:off x="4636008" y="2313432"/>
+            <a:ext cx="475488" cy="475488"/>
+          </a:xfrm>
+          <a:prstGeom prst="ellipse">
+            <a:avLst/>
+          </a:prstGeom>
+          <a:solidFill>
+            <a:srgbClr val="6C4BC1"/>
+          </a:solidFill>
+          <a:ln/>
+        </p:spPr>
+      </p:sp>
+      <p:pic>
+        <p:nvPicPr>
+          <p:cNvPr id="12" name="Image 1" descr="preencoded.png"/>
+          <p:cNvPicPr>
+            <a:picLocks noChangeAspect="1"/>
+          </p:cNvPicPr>
+          <p:nvPr/>
+        </p:nvPicPr>
+        <p:blipFill>
+          <a:blip r:embed="rId3"/>
+          <a:stretch>
+            <a:fillRect/>
+          </a:stretch>
+        </p:blipFill>
+        <p:spPr>
+          <a:xfrm>
+            <a:off x="4782312" y="2459736"/>
+            <a:ext cx="182880" cy="182880"/>
+          </a:xfrm>
+          <a:prstGeom prst="rect">
+            <a:avLst/>
+          </a:prstGeom>
+        </p:spPr>
+      </p:pic>
+      <p:sp>
+        <p:nvSpPr>
+          <p:cNvPr id="13" name="Text 9"/>
+          <p:cNvSpPr/>
+          <p:nvPr/>
+        </p:nvSpPr>
+        <p:spPr>
+          <a:xfrm>
+            <a:off x="4636008" y="2898648"/>
+            <a:ext cx="3026664" cy="777240"/>
+          </a:xfrm>
+          <a:prstGeom prst="rect">
+            <a:avLst/>
+          </a:prstGeom>
+          <a:noFill/>
+          <a:ln/>
+        </p:spPr>
+        <p:txBody>
+          <a:bodyPr wrap="square" lIns="0" tIns="0" rIns="0" bIns="0" rtlCol="0" anchor="ctr"/>
+          <a:lstStyle/>
+          <a:p>
+            <a:pPr marL="0" indent="0">
+              <a:lnSpc>
+                <a:spcPts val="1500"/>
+              </a:lnSpc>
+              <a:buNone/>
+            </a:pPr>
+            <a:r>
+              <a:rPr lang="en-US" sz="1250" b="1" dirty="0">
+                <a:solidFill>
+                  <a:srgbClr val="1B1B2F"/>
+                </a:solidFill>
+                <a:latin typeface="Calibri" pitchFamily="34" charset="0"/>
+                <a:ea typeface="Calibri" pitchFamily="34" charset="-122"/>
+                <a:cs typeface="Calibri" pitchFamily="34" charset="-120"/>
+              </a:rPr>
+              <a:t>IDOETA, I. V.; CAPUANO, F. G.</a:t>
+            </a:r>
+            <a:endParaRPr lang="en-US" sz="1250" dirty="0"/>
+          </a:p>
+        </p:txBody>
+      </p:sp>
+      <p:sp>
+        <p:nvSpPr>
+          <p:cNvPr id="14" name="Text 10"/>
+          <p:cNvSpPr/>
+          <p:nvPr/>
+        </p:nvSpPr>
+        <p:spPr>
+          <a:xfrm>
+            <a:off x="4636008" y="3749040"/>
+            <a:ext cx="3026664" cy="2103120"/>
+          </a:xfrm>
+          <a:prstGeom prst="rect">
+            <a:avLst/>
+          </a:prstGeom>
+          <a:noFill/>
+          <a:ln/>
+        </p:spPr>
+        <p:txBody>
+          <a:bodyPr wrap="square" lIns="0" tIns="0" rIns="0" bIns="0" rtlCol="0" anchor="ctr"/>
+          <a:lstStyle/>
+          <a:p>
+            <a:pPr marL="0" indent="0">
+              <a:lnSpc>
+                <a:spcPts val="1700"/>
+              </a:lnSpc>
+              <a:buNone/>
+            </a:pPr>
+            <a:r>
+              <a:rPr lang="en-US" sz="1200" dirty="0">
+                <a:solidFill>
+                  <a:srgbClr val="6B6B80"/>
+                </a:solidFill>
+                <a:latin typeface="Calibri" pitchFamily="34" charset="0"/>
+                <a:ea typeface="Calibri" pitchFamily="34" charset="-122"/>
+                <a:cs typeface="Calibri" pitchFamily="34" charset="-120"/>
+              </a:rPr>
+              <a:t>Elementos de Eletrônica Digital. Érica — cap. Circuitos combinacionais (meio somador e somador completo).</a:t>
+            </a:r>
+            <a:endParaRPr lang="en-US" sz="1200" dirty="0"/>
+          </a:p>
+        </p:txBody>
+      </p:sp>
+      <p:sp>
+        <p:nvSpPr>
+          <p:cNvPr id="15" name="Shape 11"/>
+          <p:cNvSpPr/>
+          <p:nvPr/>
+        </p:nvSpPr>
+        <p:spPr>
+          <a:xfrm>
+            <a:off x="8119872" y="2057400"/>
+            <a:ext cx="3538728" cy="4023360"/>
+          </a:xfrm>
+          <a:prstGeom prst="roundRect">
+            <a:avLst>
+              <a:gd name="adj" fmla="val 3101"/>
+            </a:avLst>
+          </a:prstGeom>
+          <a:solidFill>
+            <a:srgbClr val="F3F1FB"/>
+          </a:solidFill>
+          <a:ln/>
+        </p:spPr>
+      </p:sp>
+      <p:sp>
+        <p:nvSpPr>
+          <p:cNvPr id="16" name="Shape 12"/>
+          <p:cNvSpPr/>
+          <p:nvPr/>
+        </p:nvSpPr>
+        <p:spPr>
+          <a:xfrm>
+            <a:off x="8375904" y="2313432"/>
+            <a:ext cx="475488" cy="475488"/>
+          </a:xfrm>
+          <a:prstGeom prst="ellipse">
+            <a:avLst/>
+          </a:prstGeom>
+          <a:solidFill>
+            <a:srgbClr val="6C4BC1"/>
+          </a:solidFill>
+          <a:ln/>
+        </p:spPr>
+      </p:sp>
+      <p:pic>
+        <p:nvPicPr>
+          <p:cNvPr id="17" name="Image 2" descr="preencoded.png"/>
+          <p:cNvPicPr>
+            <a:picLocks noChangeAspect="1"/>
+          </p:cNvPicPr>
+          <p:nvPr/>
+        </p:nvPicPr>
+        <p:blipFill>
+          <a:blip r:embed="rId3"/>
+          <a:stretch>
+            <a:fillRect/>
+          </a:stretch>
+        </p:blipFill>
+        <p:spPr>
+          <a:xfrm>
+            <a:off x="8522208" y="2459736"/>
+            <a:ext cx="182880" cy="182880"/>
+          </a:xfrm>
+          <a:prstGeom prst="rect">
+            <a:avLst/>
+          </a:prstGeom>
+        </p:spPr>
+      </p:pic>
+      <p:sp>
+        <p:nvSpPr>
+          <p:cNvPr id="18" name="Text 13"/>
+          <p:cNvSpPr/>
+          <p:nvPr/>
+        </p:nvSpPr>
+        <p:spPr>
+          <a:xfrm>
+            <a:off x="8375904" y="2898648"/>
+            <a:ext cx="3026664" cy="777240"/>
+          </a:xfrm>
+          <a:prstGeom prst="rect">
+            <a:avLst/>
+          </a:prstGeom>
+          <a:noFill/>
+          <a:ln/>
+        </p:spPr>
+        <p:txBody>
+          <a:bodyPr wrap="square" lIns="0" tIns="0" rIns="0" bIns="0" rtlCol="0" anchor="ctr"/>
+          <a:lstStyle/>
+          <a:p>
+            <a:pPr marL="0" indent="0">
+              <a:lnSpc>
+                <a:spcPts val="1500"/>
+              </a:lnSpc>
+              <a:buNone/>
+            </a:pPr>
+            <a:r>
+              <a:rPr lang="en-US" sz="1250" b="1" dirty="0">
+                <a:solidFill>
+                  <a:srgbClr val="1B1B2F"/>
+                </a:solidFill>
+                <a:latin typeface="Calibri" pitchFamily="34" charset="0"/>
+                <a:ea typeface="Calibri" pitchFamily="34" charset="-122"/>
+                <a:cs typeface="Calibri" pitchFamily="34" charset="-120"/>
+              </a:rPr>
               <a:t>NISAN, N.; SCHOCKEN, S.</a:t>
             </a:r>
             <a:endParaRPr lang="en-US" sz="1250" dirty="0"/>
@@ -20348,7 +20205,7 @@
           <a:bodyPr wrap="square" lIns="0" tIns="0" rIns="0" bIns="0" rtlCol="0" anchor="ctr"/>
           <a:lstStyle/>
           <a:p>
-            <a:pPr indent="0" marL="0">
+            <a:pPr marL="0" indent="0">
               <a:lnSpc>
                 <a:spcPts val="1600"/>
               </a:lnSpc>
@@ -20365,12 +20222,6 @@
               </a:rPr>
               <a:t>The Elements of Computing Systems (Nand2Tetris) — construindo um computador a partir de portas NAND.</a:t>
             </a:r>
-            <a:pPr indent="0" marL="0">
-              <a:lnSpc>
-                <a:spcPts val="1600"/>
-              </a:lnSpc>
-              <a:buNone/>
-            </a:pPr>
             <a:r>
               <a:rPr lang="en-US" sz="1150" dirty="0">
                 <a:solidFill>
@@ -20383,12 +20234,6 @@
               <a:t>
 </a:t>
             </a:r>
-            <a:pPr indent="0" marL="0">
-              <a:lnSpc>
-                <a:spcPts val="1600"/>
-              </a:lnSpc>
-              <a:buNone/>
-            </a:pPr>
             <a:r>
               <a:rPr lang="en-US" sz="1150" u="sng" dirty="0">
                 <a:solidFill>
@@ -20397,7 +20242,7 @@
                 <a:latin typeface="Calibri" pitchFamily="34" charset="0"/>
                 <a:ea typeface="Calibri" pitchFamily="34" charset="-122"/>
                 <a:cs typeface="Calibri" pitchFamily="34" charset="-120"/>
-                <a:hlinkClick r:id="rId4" invalidUrl="" action="" tgtFrame="" tooltip="" history="1" highlightClick="0" endSnd="0">
+                <a:hlinkClick r:id="rId4">
                   <a:extLst>
                     <a:ext uri="{A12FA001-AC4F-418D-AE19-62706E023703}">
                       <ahyp:hlinkClr xmlns:ahyp="http://schemas.microsoft.com/office/drawing/2018/hyperlinkcolor" val="tx"/>
@@ -20432,7 +20277,7 @@
           <a:bodyPr wrap="square" lIns="0" tIns="0" rIns="0" bIns="0" rtlCol="0" anchor="ctr"/>
           <a:lstStyle/>
           <a:p>
-            <a:pPr algn="r" indent="0" marL="0">
+            <a:pPr marL="0" indent="0" algn="r">
               <a:buNone/>
             </a:pPr>
             <a:r>
@@ -20466,6 +20311,7 @@
         <a:solidFill>
           <a:srgbClr val="FFFFFF"/>
         </a:solidFill>
+        <a:effectLst/>
       </p:bgPr>
     </p:bg>
     <p:spTree>
@@ -20503,11 +20349,11 @@
           <a:bodyPr wrap="square" lIns="0" tIns="0" rIns="0" bIns="0" rtlCol="0" anchor="ctr"/>
           <a:lstStyle/>
           <a:p>
-            <a:pPr algn="l" indent="0" marL="0">
+            <a:pPr marL="0" indent="0" algn="l">
               <a:buNone/>
             </a:pPr>
             <a:r>
-              <a:rPr lang="en-US" sz="1200" b="1" spc="200" kern="0" dirty="0">
+              <a:rPr lang="en-US" sz="1200" b="1" kern="0" spc="200" dirty="0">
                 <a:solidFill>
                   <a:srgbClr val="6C4BC1"/>
                 </a:solidFill>
@@ -20542,7 +20388,7 @@
           <a:bodyPr wrap="square" lIns="0" tIns="0" rIns="0" bIns="0" rtlCol="0" anchor="ctr"/>
           <a:lstStyle/>
           <a:p>
-            <a:pPr indent="0" marL="0">
+            <a:pPr marL="0" indent="0">
               <a:buNone/>
             </a:pPr>
             <a:r>
@@ -20604,14 +20450,14 @@
       </p:sp>
       <p:pic>
         <p:nvPicPr>
-          <p:cNvPr id="6" name="Image 0" descr="preencoded.png">    </p:cNvPr>
+          <p:cNvPr id="6" name="Image 0" descr="preencoded.png"/>
           <p:cNvPicPr>
             <a:picLocks noChangeAspect="1"/>
           </p:cNvPicPr>
           <p:nvPr/>
         </p:nvPicPr>
         <p:blipFill>
-          <a:blip r:embed="rId1"/>
+          <a:blip r:embed="rId3"/>
           <a:stretch>
             <a:fillRect/>
           </a:stretch>
@@ -20647,7 +20493,7 @@
           <a:bodyPr wrap="square" lIns="0" tIns="0" rIns="0" bIns="0" rtlCol="0" anchor="ctr"/>
           <a:lstStyle/>
           <a:p>
-            <a:pPr indent="0" marL="0">
+            <a:pPr marL="0" indent="0">
               <a:buNone/>
             </a:pPr>
             <a:r>
@@ -20686,7 +20532,7 @@
           <a:bodyPr wrap="square" lIns="0" tIns="0" rIns="0" bIns="0" rtlCol="0" anchor="ctr"/>
           <a:lstStyle/>
           <a:p>
-            <a:pPr indent="0" marL="0">
+            <a:pPr marL="0" indent="0">
               <a:lnSpc>
                 <a:spcPts val="1900"/>
               </a:lnSpc>
@@ -20703,7 +20549,7 @@
                 <a:latin typeface="Calibri" pitchFamily="34" charset="0"/>
                 <a:ea typeface="Calibri" pitchFamily="34" charset="-122"/>
                 <a:cs typeface="Calibri" pitchFamily="34" charset="-120"/>
-                <a:hlinkClick r:id="rId2" invalidUrl="" action="" tgtFrame="" tooltip="" history="1" highlightClick="0" endSnd="0">
+                <a:hlinkClick r:id="rId4">
                   <a:extLst>
                     <a:ext uri="{A12FA001-AC4F-418D-AE19-62706E023703}">
                       <ahyp:hlinkClr xmlns:ahyp="http://schemas.microsoft.com/office/drawing/2018/hyperlinkcolor" val="tx"/>
@@ -20713,15 +20559,6 @@
               </a:rPr>
               <a:t>^, &amp; e | (bitwise operations)</a:t>
             </a:r>
-            <a:pPr indent="0" marL="0">
-              <a:lnSpc>
-                <a:spcPts val="1900"/>
-              </a:lnSpc>
-              <a:spcAft>
-                <a:spcPts val="1200"/>
-              </a:spcAft>
-              <a:buNone/>
-            </a:pPr>
             <a:r>
               <a:rPr lang="en-US" sz="1250" dirty="0">
                 <a:solidFill>
@@ -20781,14 +20618,14 @@
       </p:sp>
       <p:pic>
         <p:nvPicPr>
-          <p:cNvPr id="11" name="Image 1" descr="preencoded.png">    </p:cNvPr>
+          <p:cNvPr id="11" name="Image 1" descr="preencoded.png"/>
           <p:cNvPicPr>
             <a:picLocks noChangeAspect="1"/>
           </p:cNvPicPr>
           <p:nvPr/>
         </p:nvPicPr>
         <p:blipFill>
-          <a:blip r:embed="rId3"/>
+          <a:blip r:embed="rId5"/>
           <a:stretch>
             <a:fillRect/>
           </a:stretch>
@@ -20824,7 +20661,7 @@
           <a:bodyPr wrap="square" lIns="0" tIns="0" rIns="0" bIns="0" rtlCol="0" anchor="ctr"/>
           <a:lstStyle/>
           <a:p>
-            <a:pPr indent="0" marL="0">
+            <a:pPr marL="0" indent="0">
               <a:buNone/>
             </a:pPr>
             <a:r>
@@ -20863,7 +20700,7 @@
           <a:bodyPr wrap="square" lIns="0" tIns="0" rIns="0" bIns="0" rtlCol="0" anchor="ctr"/>
           <a:lstStyle/>
           <a:p>
-            <a:pPr indent="0" marL="0">
+            <a:pPr marL="0" indent="0">
               <a:lnSpc>
                 <a:spcPts val="1800"/>
               </a:lnSpc>
@@ -20880,7 +20717,7 @@
                 <a:latin typeface="Calibri" pitchFamily="34" charset="0"/>
                 <a:ea typeface="Calibri" pitchFamily="34" charset="-122"/>
                 <a:cs typeface="Calibri" pitchFamily="34" charset="-120"/>
-                <a:hlinkClick r:id="rId4" invalidUrl="" action="" tgtFrame="" tooltip="" history="1" highlightClick="0" endSnd="0">
+                <a:hlinkClick r:id="rId6">
                   <a:extLst>
                     <a:ext uri="{A12FA001-AC4F-418D-AE19-62706E023703}">
                       <ahyp:hlinkClr xmlns:ahyp="http://schemas.microsoft.com/office/drawing/2018/hyperlinkcolor" val="tx"/>
@@ -20890,7 +20727,21 @@
               </a:rPr>
               <a:t>Ben Eater — computador de 8 bits</a:t>
             </a:r>
-            <a:pPr indent="0" marL="0">
+            <a:r>
+              <a:rPr lang="en-US" sz="1200" dirty="0">
+                <a:solidFill>
+                  <a:srgbClr val="6B6B80"/>
+                </a:solidFill>
+                <a:latin typeface="Calibri" pitchFamily="34" charset="0"/>
+                <a:ea typeface="Calibri" pitchFamily="34" charset="-122"/>
+                <a:cs typeface="Calibri" pitchFamily="34" charset="-120"/>
+              </a:rPr>
+              <a:t> — portas lógicas em hardware real.</a:t>
+            </a:r>
+            <a:endParaRPr lang="en-US" sz="1200" dirty="0"/>
+          </a:p>
+          <a:p>
+            <a:pPr marL="0" indent="0">
               <a:lnSpc>
                 <a:spcPts val="1800"/>
               </a:lnSpc>
@@ -20900,20 +20751,38 @@
               <a:buNone/>
             </a:pPr>
             <a:r>
-              <a:rPr lang="en-US" sz="1200" dirty="0">
-                <a:solidFill>
-                  <a:srgbClr val="6B6B80"/>
+              <a:rPr lang="en-US" sz="1200" u="sng" dirty="0">
+                <a:solidFill>
+                  <a:srgbClr val="6C4BC1"/>
                 </a:solidFill>
                 <a:latin typeface="Calibri" pitchFamily="34" charset="0"/>
                 <a:ea typeface="Calibri" pitchFamily="34" charset="-122"/>
                 <a:cs typeface="Calibri" pitchFamily="34" charset="-120"/>
-              </a:rPr>
-              <a:t> — portas lógicas em hardware real.</a:t>
+                <a:hlinkClick r:id="rId7">
+                  <a:extLst>
+                    <a:ext uri="{A12FA001-AC4F-418D-AE19-62706E023703}">
+                      <ahyp:hlinkClr xmlns:ahyp="http://schemas.microsoft.com/office/drawing/2018/hyperlinkcolor" val="tx"/>
+                    </a:ext>
+                  </a:extLst>
+                </a:hlinkClick>
+              </a:rPr>
+              <a:t>Nand2Tetris — half e full adder</a:t>
+            </a:r>
+            <a:r>
+              <a:rPr lang="en-US" sz="1200" dirty="0">
+                <a:solidFill>
+                  <a:srgbClr val="6B6B80"/>
+                </a:solidFill>
+                <a:latin typeface="Calibri" pitchFamily="34" charset="0"/>
+                <a:ea typeface="Calibri" pitchFamily="34" charset="-122"/>
+                <a:cs typeface="Calibri" pitchFamily="34" charset="-120"/>
+              </a:rPr>
+              <a:t> — construindo a partir de NAND.</a:t>
             </a:r>
             <a:endParaRPr lang="en-US" sz="1200" dirty="0"/>
           </a:p>
           <a:p>
-            <a:pPr indent="0" marL="0">
+            <a:pPr marL="0" indent="0">
               <a:lnSpc>
                 <a:spcPts val="1800"/>
               </a:lnSpc>
@@ -20930,7 +20799,7 @@
                 <a:latin typeface="Calibri" pitchFamily="34" charset="0"/>
                 <a:ea typeface="Calibri" pitchFamily="34" charset="-122"/>
                 <a:cs typeface="Calibri" pitchFamily="34" charset="-120"/>
-                <a:hlinkClick r:id="rId5" invalidUrl="" action="" tgtFrame="" tooltip="" history="1" highlightClick="0" endSnd="0">
+                <a:hlinkClick r:id="rId8">
                   <a:extLst>
                     <a:ext uri="{A12FA001-AC4F-418D-AE19-62706E023703}">
                       <ahyp:hlinkClr xmlns:ahyp="http://schemas.microsoft.com/office/drawing/2018/hyperlinkcolor" val="tx"/>
@@ -20938,67 +20807,8 @@
                   </a:extLst>
                 </a:hlinkClick>
               </a:rPr>
-              <a:t>Nand2Tetris — half e full adder</a:t>
-            </a:r>
-            <a:pPr indent="0" marL="0">
-              <a:lnSpc>
-                <a:spcPts val="1800"/>
-              </a:lnSpc>
-              <a:spcAft>
-                <a:spcPts val="1000"/>
-              </a:spcAft>
-              <a:buNone/>
-            </a:pPr>
-            <a:r>
-              <a:rPr lang="en-US" sz="1200" dirty="0">
-                <a:solidFill>
-                  <a:srgbClr val="6B6B80"/>
-                </a:solidFill>
-                <a:latin typeface="Calibri" pitchFamily="34" charset="0"/>
-                <a:ea typeface="Calibri" pitchFamily="34" charset="-122"/>
-                <a:cs typeface="Calibri" pitchFamily="34" charset="-120"/>
-              </a:rPr>
-              <a:t> — construindo a partir de NAND.</a:t>
-            </a:r>
-            <a:endParaRPr lang="en-US" sz="1200" dirty="0"/>
-          </a:p>
-          <a:p>
-            <a:pPr indent="0" marL="0">
-              <a:lnSpc>
-                <a:spcPts val="1800"/>
-              </a:lnSpc>
-              <a:spcAft>
-                <a:spcPts val="1000"/>
-              </a:spcAft>
-              <a:buNone/>
-            </a:pPr>
-            <a:r>
-              <a:rPr lang="en-US" sz="1200" u="sng" dirty="0">
-                <a:solidFill>
-                  <a:srgbClr val="6C4BC1"/>
-                </a:solidFill>
-                <a:latin typeface="Calibri" pitchFamily="34" charset="0"/>
-                <a:ea typeface="Calibri" pitchFamily="34" charset="-122"/>
-                <a:cs typeface="Calibri" pitchFamily="34" charset="-120"/>
-                <a:hlinkClick r:id="rId6" invalidUrl="" action="" tgtFrame="" tooltip="" history="1" highlightClick="0" endSnd="0">
-                  <a:extLst>
-                    <a:ext uri="{A12FA001-AC4F-418D-AE19-62706E023703}">
-                      <ahyp:hlinkClr xmlns:ahyp="http://schemas.microsoft.com/office/drawing/2018/hyperlinkcolor" val="tx"/>
-                    </a:ext>
-                  </a:extLst>
-                </a:hlinkClick>
-              </a:rPr>
               <a:t>Computerphile — por que NAND é universal</a:t>
             </a:r>
-            <a:pPr indent="0" marL="0">
-              <a:lnSpc>
-                <a:spcPts val="1800"/>
-              </a:lnSpc>
-              <a:spcAft>
-                <a:spcPts val="1000"/>
-              </a:spcAft>
-              <a:buNone/>
-            </a:pPr>
             <a:endParaRPr lang="en-US" sz="1200" dirty="0"/>
           </a:p>
         </p:txBody>
@@ -21024,7 +20834,7 @@
           <a:bodyPr wrap="square" lIns="0" tIns="0" rIns="0" bIns="0" rtlCol="0" anchor="ctr"/>
           <a:lstStyle/>
           <a:p>
-            <a:pPr algn="r" indent="0" marL="0">
+            <a:pPr marL="0" indent="0" algn="r">
               <a:buNone/>
             </a:pPr>
             <a:r>
@@ -21058,6 +20868,7 @@
         <a:solidFill>
           <a:srgbClr val="FFFFFF"/>
         </a:solidFill>
+        <a:effectLst/>
       </p:bgPr>
     </p:bg>
     <p:spTree>
@@ -21095,11 +20906,11 @@
           <a:bodyPr wrap="square" lIns="0" tIns="0" rIns="0" bIns="0" rtlCol="0" anchor="ctr"/>
           <a:lstStyle/>
           <a:p>
-            <a:pPr algn="l" indent="0" marL="0">
+            <a:pPr marL="0" indent="0" algn="l">
               <a:buNone/>
             </a:pPr>
             <a:r>
-              <a:rPr lang="en-US" sz="1200" b="1" spc="200" kern="0" dirty="0">
+              <a:rPr lang="en-US" sz="1200" b="1" kern="0" spc="200" dirty="0">
                 <a:solidFill>
                   <a:srgbClr val="6C4BC1"/>
                 </a:solidFill>
@@ -21134,7 +20945,7 @@
           <a:bodyPr wrap="square" lIns="0" tIns="0" rIns="0" bIns="0" rtlCol="0" anchor="ctr"/>
           <a:lstStyle/>
           <a:p>
-            <a:pPr indent="0" marL="0">
+            <a:pPr marL="0" indent="0">
               <a:buNone/>
             </a:pPr>
             <a:r>
@@ -21173,7 +20984,7 @@
           <a:bodyPr wrap="square" lIns="0" tIns="0" rIns="0" bIns="0" rtlCol="0" anchor="ctr"/>
           <a:lstStyle/>
           <a:p>
-            <a:pPr indent="0" marL="0">
+            <a:pPr marL="0" indent="0">
               <a:buNone/>
             </a:pPr>
             <a:r>
@@ -21234,7 +21045,7 @@
           <a:bodyPr wrap="square" lIns="0" tIns="0" rIns="0" bIns="0" rtlCol="0" anchor="ctr"/>
           <a:lstStyle/>
           <a:p>
-            <a:pPr algn="ctr" indent="0" marL="0">
+            <a:pPr marL="0" indent="0" algn="ctr">
               <a:buNone/>
             </a:pPr>
             <a:r>
@@ -21273,7 +21084,7 @@
           <a:bodyPr wrap="square" lIns="0" tIns="0" rIns="0" bIns="0" rtlCol="0" anchor="ctr"/>
           <a:lstStyle/>
           <a:p>
-            <a:pPr algn="ctr" indent="0" marL="0">
+            <a:pPr marL="0" indent="0" algn="ctr">
               <a:buNone/>
             </a:pPr>
             <a:r>
@@ -21313,14 +21124,14 @@
       </p:sp>
       <p:pic>
         <p:nvPicPr>
-          <p:cNvPr id="9" name="Image 0" descr="preencoded.png">    </p:cNvPr>
+          <p:cNvPr id="9" name="Image 0" descr="preencoded.png"/>
           <p:cNvPicPr>
             <a:picLocks noChangeAspect="1"/>
           </p:cNvPicPr>
           <p:nvPr/>
         </p:nvPicPr>
         <p:blipFill>
-          <a:blip r:embed="rId1"/>
+          <a:blip r:embed="rId3"/>
           <a:stretch>
             <a:fillRect/>
           </a:stretch>
@@ -21356,7 +21167,7 @@
           <a:bodyPr wrap="square" lIns="0" tIns="0" rIns="0" bIns="0" rtlCol="0" anchor="ctr"/>
           <a:lstStyle/>
           <a:p>
-            <a:pPr indent="0" marL="0">
+            <a:pPr marL="0" indent="0">
               <a:buNone/>
             </a:pPr>
             <a:r>
@@ -21395,7 +21206,7 @@
           <a:bodyPr wrap="square" lIns="0" tIns="0" rIns="0" bIns="0" rtlCol="0" anchor="ctr"/>
           <a:lstStyle/>
           <a:p>
-            <a:pPr algn="r" indent="0" marL="0">
+            <a:pPr marL="0" indent="0" algn="r">
               <a:buNone/>
             </a:pPr>
             <a:r>
@@ -21429,6 +21240,7 @@
         <a:solidFill>
           <a:srgbClr val="141B41"/>
         </a:solidFill>
+        <a:effectLst/>
       </p:bgPr>
     </p:bg>
     <p:spTree>
@@ -21515,14 +21327,14 @@
       </p:sp>
       <p:pic>
         <p:nvPicPr>
-          <p:cNvPr id="5" name="Image 0" descr="preencoded.png">    </p:cNvPr>
+          <p:cNvPr id="5" name="Image 0" descr="preencoded.png"/>
           <p:cNvPicPr>
             <a:picLocks noChangeAspect="1"/>
           </p:cNvPicPr>
           <p:nvPr/>
         </p:nvPicPr>
         <p:blipFill>
-          <a:blip r:embed="rId1"/>
+          <a:blip r:embed="rId3"/>
           <a:stretch>
             <a:fillRect/>
           </a:stretch>
@@ -21558,11 +21370,11 @@
           <a:bodyPr wrap="square" lIns="0" tIns="0" rIns="0" bIns="0" rtlCol="0" anchor="ctr"/>
           <a:lstStyle/>
           <a:p>
-            <a:pPr indent="0" marL="0">
+            <a:pPr marL="0" indent="0">
               <a:buNone/>
             </a:pPr>
             <a:r>
-              <a:rPr lang="en-US" sz="1300" b="1" spc="300" kern="0" dirty="0">
+              <a:rPr lang="en-US" sz="1300" b="1" kern="0" spc="300" dirty="0">
                 <a:solidFill>
                   <a:srgbClr val="2FE6C7"/>
                 </a:solidFill>
@@ -21597,7 +21409,7 @@
           <a:bodyPr wrap="square" lIns="0" tIns="0" rIns="0" bIns="0" rtlCol="0" anchor="ctr"/>
           <a:lstStyle/>
           <a:p>
-            <a:pPr indent="0" marL="0">
+            <a:pPr marL="0" indent="0">
               <a:buNone/>
             </a:pPr>
             <a:r>
@@ -21636,7 +21448,7 @@
           <a:bodyPr wrap="square" lIns="0" tIns="0" rIns="0" bIns="0" rtlCol="0" anchor="ctr"/>
           <a:lstStyle/>
           <a:p>
-            <a:pPr indent="0" marL="0">
+            <a:pPr marL="0" indent="0">
               <a:lnSpc>
                 <a:spcPts val="3800"/>
               </a:lnSpc>
@@ -21656,7 +21468,7 @@
             <a:endParaRPr lang="en-US" sz="3200" dirty="0"/>
           </a:p>
           <a:p>
-            <a:pPr indent="0" marL="0">
+            <a:pPr marL="0" indent="0">
               <a:lnSpc>
                 <a:spcPts val="3800"/>
               </a:lnSpc>
@@ -21698,7 +21510,7 @@
           <a:bodyPr wrap="square" lIns="0" tIns="0" rIns="0" bIns="0" rtlCol="0" anchor="ctr"/>
           <a:lstStyle/>
           <a:p>
-            <a:pPr indent="0" marL="0">
+            <a:pPr marL="0" indent="0">
               <a:lnSpc>
                 <a:spcPts val="2000"/>
               </a:lnSpc>
@@ -21740,11 +21552,11 @@
           <a:bodyPr wrap="square" lIns="0" tIns="0" rIns="0" bIns="0" rtlCol="0" anchor="ctr"/>
           <a:lstStyle/>
           <a:p>
-            <a:pPr indent="0" marL="0">
+            <a:pPr marL="0" indent="0">
               <a:buNone/>
             </a:pPr>
             <a:r>
-              <a:rPr lang="en-US" sz="1150" spc="100" kern="0" dirty="0">
+              <a:rPr lang="en-US" sz="1150" kern="0" spc="100" dirty="0">
                 <a:solidFill>
                   <a:srgbClr val="6F76B0"/>
                 </a:solidFill>
@@ -21774,6 +21586,7 @@
         <a:solidFill>
           <a:srgbClr val="FFFFFF"/>
         </a:solidFill>
+        <a:effectLst/>
       </p:bgPr>
     </p:bg>
     <p:spTree>
@@ -21811,11 +21624,11 @@
           <a:bodyPr wrap="square" lIns="0" tIns="0" rIns="0" bIns="0" rtlCol="0" anchor="ctr"/>
           <a:lstStyle/>
           <a:p>
-            <a:pPr algn="l" indent="0" marL="0">
+            <a:pPr marL="0" indent="0" algn="l">
               <a:buNone/>
             </a:pPr>
             <a:r>
-              <a:rPr lang="en-US" sz="1200" b="1" spc="200" kern="0" dirty="0">
+              <a:rPr lang="en-US" sz="1200" b="1" kern="0" spc="200" dirty="0">
                 <a:solidFill>
                   <a:srgbClr val="6C4BC1"/>
                 </a:solidFill>
@@ -21851,14 +21664,14 @@
       </p:sp>
       <p:pic>
         <p:nvPicPr>
-          <p:cNvPr id="4" name="Image 0" descr="preencoded.png">    </p:cNvPr>
+          <p:cNvPr id="4" name="Image 0" descr="preencoded.png"/>
           <p:cNvPicPr>
             <a:picLocks noChangeAspect="1"/>
           </p:cNvPicPr>
           <p:nvPr/>
         </p:nvPicPr>
         <p:blipFill>
-          <a:blip r:embed="rId1"/>
+          <a:blip r:embed="rId3"/>
           <a:stretch>
             <a:fillRect/>
           </a:stretch>
@@ -21894,7 +21707,7 @@
           <a:bodyPr wrap="square" lIns="0" tIns="0" rIns="0" bIns="0" rtlCol="0" anchor="ctr"/>
           <a:lstStyle/>
           <a:p>
-            <a:pPr indent="0" marL="0">
+            <a:pPr marL="0" indent="0">
               <a:buNone/>
             </a:pPr>
             <a:r>
@@ -21933,7 +21746,7 @@
           <a:bodyPr wrap="square" lIns="0" tIns="0" rIns="0" bIns="0" rtlCol="0" anchor="ctr"/>
           <a:lstStyle/>
           <a:p>
-            <a:pPr indent="0" marL="0">
+            <a:pPr marL="0" indent="0">
               <a:buNone/>
             </a:pPr>
             <a:r>
@@ -21953,7 +21766,7 @@
       </p:sp>
       <p:graphicFrame>
         <p:nvGraphicFramePr>
-          <p:cNvPr id="5" name="Table 0"/>
+          <p:cNvPr id="7" name="Table 0"/>
           <p:cNvGraphicFramePr>
             <a:graphicFrameLocks noGrp="1"/>
           </p:cNvGraphicFramePr>
@@ -21974,9 +21787,27 @@
             <a:tbl>
               <a:tblPr/>
               <a:tblGrid>
-                <a:gridCol w="2194560"/>
-                <a:gridCol w="1828800"/>
-                <a:gridCol w="6858000"/>
+                <a:gridCol w="2194560">
+                  <a:extLst>
+                    <a:ext uri="{9D8B030D-6E8A-4147-A177-3AD203B41FA5}">
+                      <a16:colId xmlns:a16="http://schemas.microsoft.com/office/drawing/2014/main" val="20000"/>
+                    </a:ext>
+                  </a:extLst>
+                </a:gridCol>
+                <a:gridCol w="1828800">
+                  <a:extLst>
+                    <a:ext uri="{9D8B030D-6E8A-4147-A177-3AD203B41FA5}">
+                      <a16:colId xmlns:a16="http://schemas.microsoft.com/office/drawing/2014/main" val="20001"/>
+                    </a:ext>
+                  </a:extLst>
+                </a:gridCol>
+                <a:gridCol w="6858000">
+                  <a:extLst>
+                    <a:ext uri="{9D8B030D-6E8A-4147-A177-3AD203B41FA5}">
+                      <a16:colId xmlns:a16="http://schemas.microsoft.com/office/drawing/2014/main" val="20002"/>
+                    </a:ext>
+                  </a:extLst>
+                </a:gridCol>
               </a:tblGrid>
               <a:tr h="502920">
                 <a:tc>
@@ -21984,7 +21815,7 @@
                     <a:bodyPr/>
                     <a:lstStyle/>
                     <a:p>
-                      <a:pPr algn="ctr" indent="0" marL="0">
+                      <a:pPr marL="0" indent="0" algn="ctr">
                         <a:buNone/>
                       </a:pPr>
                       <a:r>
@@ -22052,7 +21883,7 @@
                     <a:bodyPr/>
                     <a:lstStyle/>
                     <a:p>
-                      <a:pPr algn="ctr" indent="0" marL="0">
+                      <a:pPr marL="0" indent="0" algn="ctr">
                         <a:buNone/>
                       </a:pPr>
                       <a:r>
@@ -22120,7 +21951,7 @@
                     <a:bodyPr/>
                     <a:lstStyle/>
                     <a:p>
-                      <a:pPr algn="l" indent="0" marL="0">
+                      <a:pPr marL="0" indent="0" algn="l">
                         <a:buNone/>
                       </a:pPr>
                       <a:r>
@@ -22183,6 +22014,11 @@
                     </a:solidFill>
                   </a:tcPr>
                 </a:tc>
+                <a:extLst>
+                  <a:ext uri="{0D108BD9-81ED-4DB2-BD59-A6C34878D82A}">
+                    <a16:rowId xmlns:a16="http://schemas.microsoft.com/office/drawing/2014/main" val="10000"/>
+                  </a:ext>
+                </a:extLst>
               </a:tr>
               <a:tr h="621792">
                 <a:tc>
@@ -22190,7 +22026,7 @@
                     <a:bodyPr/>
                     <a:lstStyle/>
                     <a:p>
-                      <a:pPr algn="ctr" indent="0" marL="0">
+                      <a:pPr marL="0" indent="0" algn="ctr">
                         <a:buNone/>
                       </a:pPr>
                       <a:r>
@@ -22211,7 +22047,7 @@
                       </a:endParaRPr>
                     </a:p>
                   </a:txBody>
-                  <a:tcPr marL="91440" marR="91440" marT="45720" marB="45720" anchor="ctr">
+                  <a:tcPr anchor="ctr">
                     <a:lnL w="38100" cap="flat" cmpd="sng" algn="ctr">
                       <a:solidFill>
                         <a:srgbClr val="FFFFFF"/>
@@ -22258,7 +22094,7 @@
                     <a:bodyPr/>
                     <a:lstStyle/>
                     <a:p>
-                      <a:pPr algn="ctr" indent="0" marL="0">
+                      <a:pPr marL="0" indent="0" algn="ctr">
                         <a:buNone/>
                       </a:pPr>
                       <a:r>
@@ -22279,7 +22115,7 @@
                       </a:endParaRPr>
                     </a:p>
                   </a:txBody>
-                  <a:tcPr marL="91440" marR="91440" marT="45720" marB="45720" anchor="ctr">
+                  <a:tcPr anchor="ctr">
                     <a:lnL w="38100" cap="flat" cmpd="sng" algn="ctr">
                       <a:solidFill>
                         <a:srgbClr val="FFFFFF"/>
@@ -22326,7 +22162,7 @@
                     <a:bodyPr/>
                     <a:lstStyle/>
                     <a:p>
-                      <a:pPr algn="l" indent="0" marL="0">
+                      <a:pPr marL="0" indent="0" algn="l">
                         <a:buNone/>
                       </a:pPr>
                       <a:r>
@@ -22389,6 +22225,11 @@
                     </a:solidFill>
                   </a:tcPr>
                 </a:tc>
+                <a:extLst>
+                  <a:ext uri="{0D108BD9-81ED-4DB2-BD59-A6C34878D82A}">
+                    <a16:rowId xmlns:a16="http://schemas.microsoft.com/office/drawing/2014/main" val="10001"/>
+                  </a:ext>
+                </a:extLst>
               </a:tr>
               <a:tr h="621792">
                 <a:tc>
@@ -22396,7 +22237,7 @@
                     <a:bodyPr/>
                     <a:lstStyle/>
                     <a:p>
-                      <a:pPr algn="ctr" indent="0" marL="0">
+                      <a:pPr marL="0" indent="0" algn="ctr">
                         <a:buNone/>
                       </a:pPr>
                       <a:r>
@@ -22417,7 +22258,7 @@
                       </a:endParaRPr>
                     </a:p>
                   </a:txBody>
-                  <a:tcPr marL="91440" marR="91440" marT="45720" marB="45720" anchor="ctr">
+                  <a:tcPr anchor="ctr">
                     <a:lnL w="38100" cap="flat" cmpd="sng" algn="ctr">
                       <a:solidFill>
                         <a:srgbClr val="FFFFFF"/>
@@ -22464,7 +22305,7 @@
                     <a:bodyPr/>
                     <a:lstStyle/>
                     <a:p>
-                      <a:pPr algn="ctr" indent="0" marL="0">
+                      <a:pPr marL="0" indent="0" algn="ctr">
                         <a:buNone/>
                       </a:pPr>
                       <a:r>
@@ -22485,7 +22326,7 @@
                       </a:endParaRPr>
                     </a:p>
                   </a:txBody>
-                  <a:tcPr marL="91440" marR="91440" marT="45720" marB="45720" anchor="ctr">
+                  <a:tcPr anchor="ctr">
                     <a:lnL w="38100" cap="flat" cmpd="sng" algn="ctr">
                       <a:solidFill>
                         <a:srgbClr val="FFFFFF"/>
@@ -22532,7 +22373,7 @@
                     <a:bodyPr/>
                     <a:lstStyle/>
                     <a:p>
-                      <a:pPr algn="l" indent="0" marL="0">
+                      <a:pPr marL="0" indent="0" algn="l">
                         <a:buNone/>
                       </a:pPr>
                       <a:r>
@@ -22595,6 +22436,11 @@
                     </a:solidFill>
                   </a:tcPr>
                 </a:tc>
+                <a:extLst>
+                  <a:ext uri="{0D108BD9-81ED-4DB2-BD59-A6C34878D82A}">
+                    <a16:rowId xmlns:a16="http://schemas.microsoft.com/office/drawing/2014/main" val="10002"/>
+                  </a:ext>
+                </a:extLst>
               </a:tr>
               <a:tr h="621792">
                 <a:tc>
@@ -22602,7 +22448,7 @@
                     <a:bodyPr/>
                     <a:lstStyle/>
                     <a:p>
-                      <a:pPr algn="ctr" indent="0" marL="0">
+                      <a:pPr marL="0" indent="0" algn="ctr">
                         <a:buNone/>
                       </a:pPr>
                       <a:r>
@@ -22623,7 +22469,7 @@
                       </a:endParaRPr>
                     </a:p>
                   </a:txBody>
-                  <a:tcPr marL="91440" marR="91440" marT="45720" marB="45720" anchor="ctr">
+                  <a:tcPr anchor="ctr">
                     <a:lnL w="38100" cap="flat" cmpd="sng" algn="ctr">
                       <a:solidFill>
                         <a:srgbClr val="FFFFFF"/>
@@ -22670,7 +22516,7 @@
                     <a:bodyPr/>
                     <a:lstStyle/>
                     <a:p>
-                      <a:pPr algn="ctr" indent="0" marL="0">
+                      <a:pPr marL="0" indent="0" algn="ctr">
                         <a:buNone/>
                       </a:pPr>
                       <a:r>
@@ -22691,7 +22537,7 @@
                       </a:endParaRPr>
                     </a:p>
                   </a:txBody>
-                  <a:tcPr marL="91440" marR="91440" marT="45720" marB="45720" anchor="ctr">
+                  <a:tcPr anchor="ctr">
                     <a:lnL w="38100" cap="flat" cmpd="sng" algn="ctr">
                       <a:solidFill>
                         <a:srgbClr val="FFFFFF"/>
@@ -22738,7 +22584,7 @@
                     <a:bodyPr/>
                     <a:lstStyle/>
                     <a:p>
-                      <a:pPr algn="l" indent="0" marL="0">
+                      <a:pPr marL="0" indent="0" algn="l">
                         <a:buNone/>
                       </a:pPr>
                       <a:r>
@@ -22801,6 +22647,11 @@
                     </a:solidFill>
                   </a:tcPr>
                 </a:tc>
+                <a:extLst>
+                  <a:ext uri="{0D108BD9-81ED-4DB2-BD59-A6C34878D82A}">
+                    <a16:rowId xmlns:a16="http://schemas.microsoft.com/office/drawing/2014/main" val="10003"/>
+                  </a:ext>
+                </a:extLst>
               </a:tr>
               <a:tr h="621792">
                 <a:tc>
@@ -22808,7 +22659,7 @@
                     <a:bodyPr/>
                     <a:lstStyle/>
                     <a:p>
-                      <a:pPr algn="ctr" indent="0" marL="0">
+                      <a:pPr marL="0" indent="0" algn="ctr">
                         <a:buNone/>
                       </a:pPr>
                       <a:r>
@@ -22829,7 +22680,7 @@
                       </a:endParaRPr>
                     </a:p>
                   </a:txBody>
-                  <a:tcPr marL="91440" marR="91440" marT="45720" marB="45720" anchor="ctr">
+                  <a:tcPr anchor="ctr">
                     <a:lnL w="38100" cap="flat" cmpd="sng" algn="ctr">
                       <a:solidFill>
                         <a:srgbClr val="FFFFFF"/>
@@ -22876,7 +22727,7 @@
                     <a:bodyPr/>
                     <a:lstStyle/>
                     <a:p>
-                      <a:pPr algn="ctr" indent="0" marL="0">
+                      <a:pPr marL="0" indent="0" algn="ctr">
                         <a:buNone/>
                       </a:pPr>
                       <a:r>
@@ -22897,7 +22748,7 @@
                       </a:endParaRPr>
                     </a:p>
                   </a:txBody>
-                  <a:tcPr marL="91440" marR="91440" marT="45720" marB="45720" anchor="ctr">
+                  <a:tcPr anchor="ctr">
                     <a:lnL w="38100" cap="flat" cmpd="sng" algn="ctr">
                       <a:solidFill>
                         <a:srgbClr val="FFFFFF"/>
@@ -22944,7 +22795,7 @@
                     <a:bodyPr/>
                     <a:lstStyle/>
                     <a:p>
-                      <a:pPr algn="l" indent="0" marL="0">
+                      <a:pPr marL="0" indent="0" algn="l">
                         <a:buNone/>
                       </a:pPr>
                       <a:r>
@@ -23007,6 +22858,11 @@
                     </a:solidFill>
                   </a:tcPr>
                 </a:tc>
+                <a:extLst>
+                  <a:ext uri="{0D108BD9-81ED-4DB2-BD59-A6C34878D82A}">
+                    <a16:rowId xmlns:a16="http://schemas.microsoft.com/office/drawing/2014/main" val="10004"/>
+                  </a:ext>
+                </a:extLst>
               </a:tr>
               <a:tr h="621792">
                 <a:tc>
@@ -23014,7 +22870,7 @@
                     <a:bodyPr/>
                     <a:lstStyle/>
                     <a:p>
-                      <a:pPr algn="ctr" indent="0" marL="0">
+                      <a:pPr marL="0" indent="0" algn="ctr">
                         <a:buNone/>
                       </a:pPr>
                       <a:r>
@@ -23035,7 +22891,7 @@
                       </a:endParaRPr>
                     </a:p>
                   </a:txBody>
-                  <a:tcPr marL="91440" marR="91440" marT="45720" marB="45720" anchor="ctr">
+                  <a:tcPr anchor="ctr">
                     <a:lnL w="38100" cap="flat" cmpd="sng" algn="ctr">
                       <a:solidFill>
                         <a:srgbClr val="FFFFFF"/>
@@ -23082,7 +22938,7 @@
                     <a:bodyPr/>
                     <a:lstStyle/>
                     <a:p>
-                      <a:pPr algn="ctr" indent="0" marL="0">
+                      <a:pPr marL="0" indent="0" algn="ctr">
                         <a:buNone/>
                       </a:pPr>
                       <a:r>
@@ -23103,7 +22959,7 @@
                       </a:endParaRPr>
                     </a:p>
                   </a:txBody>
-                  <a:tcPr marL="91440" marR="91440" marT="45720" marB="45720" anchor="ctr">
+                  <a:tcPr anchor="ctr">
                     <a:lnL w="38100" cap="flat" cmpd="sng" algn="ctr">
                       <a:solidFill>
                         <a:srgbClr val="FFFFFF"/>
@@ -23150,7 +23006,7 @@
                     <a:bodyPr/>
                     <a:lstStyle/>
                     <a:p>
-                      <a:pPr algn="l" indent="0" marL="0">
+                      <a:pPr marL="0" indent="0" algn="l">
                         <a:buNone/>
                       </a:pPr>
                       <a:r>
@@ -23213,6 +23069,11 @@
                     </a:solidFill>
                   </a:tcPr>
                 </a:tc>
+                <a:extLst>
+                  <a:ext uri="{0D108BD9-81ED-4DB2-BD59-A6C34878D82A}">
+                    <a16:rowId xmlns:a16="http://schemas.microsoft.com/office/drawing/2014/main" val="10005"/>
+                  </a:ext>
+                </a:extLst>
               </a:tr>
               <a:tr h="621792">
                 <a:tc>
@@ -23220,7 +23081,7 @@
                     <a:bodyPr/>
                     <a:lstStyle/>
                     <a:p>
-                      <a:pPr algn="ctr" indent="0" marL="0">
+                      <a:pPr marL="0" indent="0" algn="ctr">
                         <a:buNone/>
                       </a:pPr>
                       <a:r>
@@ -23241,7 +23102,7 @@
                       </a:endParaRPr>
                     </a:p>
                   </a:txBody>
-                  <a:tcPr marL="91440" marR="91440" marT="45720" marB="45720" anchor="ctr">
+                  <a:tcPr anchor="ctr">
                     <a:lnL w="38100" cap="flat" cmpd="sng" algn="ctr">
                       <a:solidFill>
                         <a:srgbClr val="FFFFFF"/>
@@ -23288,7 +23149,7 @@
                     <a:bodyPr/>
                     <a:lstStyle/>
                     <a:p>
-                      <a:pPr algn="ctr" indent="0" marL="0">
+                      <a:pPr marL="0" indent="0" algn="ctr">
                         <a:buNone/>
                       </a:pPr>
                       <a:r>
@@ -23309,7 +23170,7 @@
                       </a:endParaRPr>
                     </a:p>
                   </a:txBody>
-                  <a:tcPr marL="91440" marR="91440" marT="45720" marB="45720" anchor="ctr">
+                  <a:tcPr anchor="ctr">
                     <a:lnL w="38100" cap="flat" cmpd="sng" algn="ctr">
                       <a:solidFill>
                         <a:srgbClr val="FFFFFF"/>
@@ -23356,7 +23217,7 @@
                     <a:bodyPr/>
                     <a:lstStyle/>
                     <a:p>
-                      <a:pPr algn="l" indent="0" marL="0">
+                      <a:pPr marL="0" indent="0" algn="l">
                         <a:buNone/>
                       </a:pPr>
                       <a:r>
@@ -23419,6 +23280,11 @@
                     </a:solidFill>
                   </a:tcPr>
                 </a:tc>
+                <a:extLst>
+                  <a:ext uri="{0D108BD9-81ED-4DB2-BD59-A6C34878D82A}">
+                    <a16:rowId xmlns:a16="http://schemas.microsoft.com/office/drawing/2014/main" val="10006"/>
+                  </a:ext>
+                </a:extLst>
               </a:tr>
             </a:tbl>
           </a:graphicData>
@@ -23445,7 +23311,7 @@
           <a:bodyPr wrap="square" lIns="0" tIns="0" rIns="0" bIns="0" rtlCol="0" anchor="ctr"/>
           <a:lstStyle/>
           <a:p>
-            <a:pPr algn="r" indent="0" marL="0">
+            <a:pPr marL="0" indent="0" algn="r">
               <a:buNone/>
             </a:pPr>
             <a:r>
@@ -23479,6 +23345,7 @@
         <a:solidFill>
           <a:srgbClr val="141B41"/>
         </a:solidFill>
+        <a:effectLst/>
       </p:bgPr>
     </p:bg>
     <p:spTree>
@@ -23540,11 +23407,11 @@
           <a:bodyPr wrap="square" lIns="0" tIns="0" rIns="0" bIns="0" rtlCol="0" anchor="ctr"/>
           <a:lstStyle/>
           <a:p>
-            <a:pPr algn="l" indent="0" marL="0">
+            <a:pPr marL="0" indent="0" algn="l">
               <a:buNone/>
             </a:pPr>
             <a:r>
-              <a:rPr lang="en-US" sz="1200" b="1" spc="200" kern="0" dirty="0">
+              <a:rPr lang="en-US" sz="1200" b="1" kern="0" spc="200" dirty="0">
                 <a:solidFill>
                   <a:srgbClr val="2FE6C7"/>
                 </a:solidFill>
@@ -23580,14 +23447,14 @@
       </p:sp>
       <p:pic>
         <p:nvPicPr>
-          <p:cNvPr id="5" name="Image 0" descr="preencoded.png">    </p:cNvPr>
+          <p:cNvPr id="5" name="Image 0" descr="preencoded.png"/>
           <p:cNvPicPr>
             <a:picLocks noChangeAspect="1"/>
           </p:cNvPicPr>
           <p:nvPr/>
         </p:nvPicPr>
         <p:blipFill>
-          <a:blip r:embed="rId1"/>
+          <a:blip r:embed="rId3"/>
           <a:stretch>
             <a:fillRect/>
           </a:stretch>
@@ -23623,7 +23490,7 @@
           <a:bodyPr wrap="square" lIns="0" tIns="0" rIns="0" bIns="0" rtlCol="0" anchor="ctr"/>
           <a:lstStyle/>
           <a:p>
-            <a:pPr algn="ctr" indent="0" marL="0">
+            <a:pPr marL="0" indent="0" algn="ctr">
               <a:buNone/>
             </a:pPr>
             <a:r>
@@ -23662,7 +23529,7 @@
           <a:bodyPr wrap="square" lIns="0" tIns="0" rIns="0" bIns="0" rtlCol="0" anchor="ctr"/>
           <a:lstStyle/>
           <a:p>
-            <a:pPr algn="ctr" indent="0" marL="0">
+            <a:pPr marL="0" indent="0" algn="ctr">
               <a:lnSpc>
                 <a:spcPts val="2200"/>
               </a:lnSpc>
@@ -23699,6 +23566,7 @@
         <a:solidFill>
           <a:srgbClr val="FFFFFF"/>
         </a:solidFill>
+        <a:effectLst/>
       </p:bgPr>
     </p:bg>
     <p:spTree>
@@ -23736,11 +23604,11 @@
           <a:bodyPr wrap="square" lIns="0" tIns="0" rIns="0" bIns="0" rtlCol="0" anchor="ctr"/>
           <a:lstStyle/>
           <a:p>
-            <a:pPr algn="l" indent="0" marL="0">
+            <a:pPr marL="0" indent="0" algn="l">
               <a:buNone/>
             </a:pPr>
             <a:r>
-              <a:rPr lang="en-US" sz="1200" b="1" spc="200" kern="0" dirty="0">
+              <a:rPr lang="en-US" sz="1200" b="1" kern="0" spc="200" dirty="0">
                 <a:solidFill>
                   <a:srgbClr val="6C4BC1"/>
                 </a:solidFill>
@@ -23775,7 +23643,7 @@
           <a:bodyPr wrap="square" lIns="0" tIns="0" rIns="0" bIns="0" rtlCol="0" anchor="ctr"/>
           <a:lstStyle/>
           <a:p>
-            <a:pPr indent="0" marL="0">
+            <a:pPr marL="0" indent="0">
               <a:buNone/>
             </a:pPr>
             <a:r>
@@ -23814,7 +23682,7 @@
           <a:bodyPr wrap="square" lIns="0" tIns="0" rIns="0" bIns="0" rtlCol="0" anchor="ctr"/>
           <a:lstStyle/>
           <a:p>
-            <a:pPr indent="0" marL="0">
+            <a:pPr marL="0" indent="0">
               <a:buNone/>
             </a:pPr>
             <a:r>
@@ -23875,7 +23743,7 @@
           <a:bodyPr wrap="square" lIns="0" tIns="0" rIns="0" bIns="0" rtlCol="0" anchor="ctr"/>
           <a:lstStyle/>
           <a:p>
-            <a:pPr indent="0" marL="0">
+            <a:pPr marL="0" indent="0">
               <a:buNone/>
             </a:pPr>
             <a:r>
@@ -23914,7 +23782,7 @@
           <a:bodyPr wrap="square" lIns="0" tIns="0" rIns="0" bIns="0" rtlCol="0" anchor="ctr"/>
           <a:lstStyle/>
           <a:p>
-            <a:pPr indent="0" marL="0">
+            <a:pPr marL="0" indent="0">
               <a:buNone/>
             </a:pPr>
             <a:r>
@@ -23953,7 +23821,7 @@
           <a:bodyPr wrap="square" lIns="0" tIns="0" rIns="0" bIns="0" rtlCol="0" anchor="ctr"/>
           <a:lstStyle/>
           <a:p>
-            <a:pPr indent="0" marL="0">
+            <a:pPr marL="0" indent="0">
               <a:lnSpc>
                 <a:spcPts val="1500"/>
               </a:lnSpc>
@@ -24017,7 +23885,7 @@
           <a:bodyPr wrap="square" lIns="0" tIns="0" rIns="0" bIns="0" rtlCol="0" anchor="ctr"/>
           <a:lstStyle/>
           <a:p>
-            <a:pPr indent="0" marL="0">
+            <a:pPr marL="0" indent="0">
               <a:buNone/>
             </a:pPr>
             <a:r>
@@ -24056,7 +23924,7 @@
           <a:bodyPr wrap="square" lIns="0" tIns="0" rIns="0" bIns="0" rtlCol="0" anchor="ctr"/>
           <a:lstStyle/>
           <a:p>
-            <a:pPr indent="0" marL="0">
+            <a:pPr marL="0" indent="0">
               <a:buNone/>
             </a:pPr>
             <a:r>
@@ -24095,7 +23963,7 @@
           <a:bodyPr wrap="square" lIns="0" tIns="0" rIns="0" bIns="0" rtlCol="0" anchor="ctr"/>
           <a:lstStyle/>
           <a:p>
-            <a:pPr indent="0" marL="0">
+            <a:pPr marL="0" indent="0">
               <a:lnSpc>
                 <a:spcPts val="1500"/>
               </a:lnSpc>
@@ -24159,7 +24027,7 @@
           <a:bodyPr wrap="square" lIns="0" tIns="0" rIns="0" bIns="0" rtlCol="0" anchor="ctr"/>
           <a:lstStyle/>
           <a:p>
-            <a:pPr indent="0" marL="0">
+            <a:pPr marL="0" indent="0">
               <a:buNone/>
             </a:pPr>
             <a:r>
@@ -24198,7 +24066,7 @@
           <a:bodyPr wrap="square" lIns="0" tIns="0" rIns="0" bIns="0" rtlCol="0" anchor="ctr"/>
           <a:lstStyle/>
           <a:p>
-            <a:pPr indent="0" marL="0">
+            <a:pPr marL="0" indent="0">
               <a:buNone/>
             </a:pPr>
             <a:r>
@@ -24237,7 +24105,7 @@
           <a:bodyPr wrap="square" lIns="0" tIns="0" rIns="0" bIns="0" rtlCol="0" anchor="ctr"/>
           <a:lstStyle/>
           <a:p>
-            <a:pPr indent="0" marL="0">
+            <a:pPr marL="0" indent="0">
               <a:lnSpc>
                 <a:spcPts val="1500"/>
               </a:lnSpc>
@@ -24279,7 +24147,7 @@
           <a:bodyPr wrap="square" lIns="0" tIns="0" rIns="0" bIns="0" rtlCol="0" anchor="ctr"/>
           <a:lstStyle/>
           <a:p>
-            <a:pPr algn="r" indent="0" marL="0">
+            <a:pPr marL="0" indent="0" algn="r">
               <a:buNone/>
             </a:pPr>
             <a:r>
@@ -24313,6 +24181,7 @@
         <a:solidFill>
           <a:srgbClr val="FFFFFF"/>
         </a:solidFill>
+        <a:effectLst/>
       </p:bgPr>
     </p:bg>
     <p:spTree>
@@ -24350,11 +24219,11 @@
           <a:bodyPr wrap="square" lIns="0" tIns="0" rIns="0" bIns="0" rtlCol="0" anchor="ctr"/>
           <a:lstStyle/>
           <a:p>
-            <a:pPr algn="l" indent="0" marL="0">
+            <a:pPr marL="0" indent="0" algn="l">
               <a:buNone/>
             </a:pPr>
             <a:r>
-              <a:rPr lang="en-US" sz="1200" b="1" spc="200" kern="0" dirty="0">
+              <a:rPr lang="en-US" sz="1200" b="1" kern="0" spc="200" dirty="0">
                 <a:solidFill>
                   <a:srgbClr val="6C4BC1"/>
                 </a:solidFill>
@@ -24389,7 +24258,7 @@
           <a:bodyPr wrap="square" lIns="0" tIns="0" rIns="0" bIns="0" rtlCol="0" anchor="ctr"/>
           <a:lstStyle/>
           <a:p>
-            <a:pPr indent="0" marL="0">
+            <a:pPr marL="0" indent="0">
               <a:buNone/>
             </a:pPr>
             <a:r>
@@ -24428,7 +24297,7 @@
           <a:bodyPr wrap="square" lIns="0" tIns="0" rIns="0" bIns="0" rtlCol="0" anchor="ctr"/>
           <a:lstStyle/>
           <a:p>
-            <a:pPr indent="0" marL="0">
+            <a:pPr marL="0" indent="0">
               <a:buNone/>
             </a:pPr>
             <a:r>
@@ -24469,11 +24338,41 @@
             <a:tbl>
               <a:tblPr/>
               <a:tblGrid>
-                <a:gridCol w="1737360"/>
-                <a:gridCol w="1737360"/>
-                <a:gridCol w="1737360"/>
-                <a:gridCol w="1737360"/>
-                <a:gridCol w="1737360"/>
+                <a:gridCol w="1737360">
+                  <a:extLst>
+                    <a:ext uri="{9D8B030D-6E8A-4147-A177-3AD203B41FA5}">
+                      <a16:colId xmlns:a16="http://schemas.microsoft.com/office/drawing/2014/main" val="20000"/>
+                    </a:ext>
+                  </a:extLst>
+                </a:gridCol>
+                <a:gridCol w="1737360">
+                  <a:extLst>
+                    <a:ext uri="{9D8B030D-6E8A-4147-A177-3AD203B41FA5}">
+                      <a16:colId xmlns:a16="http://schemas.microsoft.com/office/drawing/2014/main" val="20001"/>
+                    </a:ext>
+                  </a:extLst>
+                </a:gridCol>
+                <a:gridCol w="1737360">
+                  <a:extLst>
+                    <a:ext uri="{9D8B030D-6E8A-4147-A177-3AD203B41FA5}">
+                      <a16:colId xmlns:a16="http://schemas.microsoft.com/office/drawing/2014/main" val="20002"/>
+                    </a:ext>
+                  </a:extLst>
+                </a:gridCol>
+                <a:gridCol w="1737360">
+                  <a:extLst>
+                    <a:ext uri="{9D8B030D-6E8A-4147-A177-3AD203B41FA5}">
+                      <a16:colId xmlns:a16="http://schemas.microsoft.com/office/drawing/2014/main" val="20003"/>
+                    </a:ext>
+                  </a:extLst>
+                </a:gridCol>
+                <a:gridCol w="1737360">
+                  <a:extLst>
+                    <a:ext uri="{9D8B030D-6E8A-4147-A177-3AD203B41FA5}">
+                      <a16:colId xmlns:a16="http://schemas.microsoft.com/office/drawing/2014/main" val="20004"/>
+                    </a:ext>
+                  </a:extLst>
+                </a:gridCol>
               </a:tblGrid>
               <a:tr h="502920">
                 <a:tc>
@@ -24481,7 +24380,7 @@
                     <a:bodyPr/>
                     <a:lstStyle/>
                     <a:p>
-                      <a:pPr algn="ctr" indent="0" marL="0">
+                      <a:pPr marL="0" indent="0" algn="ctr">
                         <a:buNone/>
                       </a:pPr>
                       <a:r>
@@ -24502,7 +24401,7 @@
                       </a:endParaRPr>
                     </a:p>
                   </a:txBody>
-                  <a:tcPr marL="91440" marR="91440" marT="45720" marB="45720" anchor="ctr">
+                  <a:tcPr anchor="ctr">
                     <a:lnL w="38100" cap="flat" cmpd="sng" algn="ctr">
                       <a:solidFill>
                         <a:srgbClr val="FFFFFF"/>
@@ -24549,7 +24448,7 @@
                     <a:bodyPr/>
                     <a:lstStyle/>
                     <a:p>
-                      <a:pPr algn="ctr" indent="0" marL="0">
+                      <a:pPr marL="0" indent="0" algn="ctr">
                         <a:buNone/>
                       </a:pPr>
                       <a:r>
@@ -24570,7 +24469,7 @@
                       </a:endParaRPr>
                     </a:p>
                   </a:txBody>
-                  <a:tcPr marL="91440" marR="91440" marT="45720" marB="45720" anchor="ctr">
+                  <a:tcPr anchor="ctr">
                     <a:lnL w="38100" cap="flat" cmpd="sng" algn="ctr">
                       <a:solidFill>
                         <a:srgbClr val="FFFFFF"/>
@@ -24617,7 +24516,7 @@
                     <a:bodyPr/>
                     <a:lstStyle/>
                     <a:p>
-                      <a:pPr algn="ctr" indent="0" marL="0">
+                      <a:pPr marL="0" indent="0" algn="ctr">
                         <a:buNone/>
                       </a:pPr>
                       <a:r>
@@ -24638,7 +24537,7 @@
                       </a:endParaRPr>
                     </a:p>
                   </a:txBody>
-                  <a:tcPr marL="91440" marR="91440" marT="45720" marB="45720" anchor="ctr">
+                  <a:tcPr anchor="ctr">
                     <a:lnL w="38100" cap="flat" cmpd="sng" algn="ctr">
                       <a:solidFill>
                         <a:srgbClr val="FFFFFF"/>
@@ -24685,7 +24584,7 @@
                     <a:bodyPr/>
                     <a:lstStyle/>
                     <a:p>
-                      <a:pPr algn="ctr" indent="0" marL="0">
+                      <a:pPr marL="0" indent="0" algn="ctr">
                         <a:buNone/>
                       </a:pPr>
                       <a:r>
@@ -24706,7 +24605,7 @@
                       </a:endParaRPr>
                     </a:p>
                   </a:txBody>
-                  <a:tcPr marL="91440" marR="91440" marT="45720" marB="45720" anchor="ctr">
+                  <a:tcPr anchor="ctr">
                     <a:lnL w="38100" cap="flat" cmpd="sng" algn="ctr">
                       <a:solidFill>
                         <a:srgbClr val="FFFFFF"/>
@@ -24753,7 +24652,7 @@
                     <a:bodyPr/>
                     <a:lstStyle/>
                     <a:p>
-                      <a:pPr algn="ctr" indent="0" marL="0">
+                      <a:pPr marL="0" indent="0" algn="ctr">
                         <a:buNone/>
                       </a:pPr>
                       <a:r>
@@ -24774,7 +24673,7 @@
                       </a:endParaRPr>
                     </a:p>
                   </a:txBody>
-                  <a:tcPr marL="91440" marR="91440" marT="45720" marB="45720" anchor="ctr">
+                  <a:tcPr anchor="ctr">
                     <a:lnL w="38100" cap="flat" cmpd="sng" algn="ctr">
                       <a:solidFill>
                         <a:srgbClr val="FFFFFF"/>
@@ -24816,6 +24715,11 @@
                     </a:solidFill>
                   </a:tcPr>
                 </a:tc>
+                <a:extLst>
+                  <a:ext uri="{0D108BD9-81ED-4DB2-BD59-A6C34878D82A}">
+                    <a16:rowId xmlns:a16="http://schemas.microsoft.com/office/drawing/2014/main" val="10000"/>
+                  </a:ext>
+                </a:extLst>
               </a:tr>
               <a:tr h="548640">
                 <a:tc>
@@ -24823,7 +24727,7 @@
                     <a:bodyPr/>
                     <a:lstStyle/>
                     <a:p>
-                      <a:pPr algn="ctr" indent="0" marL="0">
+                      <a:pPr marL="0" indent="0" algn="ctr">
                         <a:buNone/>
                       </a:pPr>
                       <a:r>
@@ -24844,7 +24748,7 @@
                       </a:endParaRPr>
                     </a:p>
                   </a:txBody>
-                  <a:tcPr marL="91440" marR="91440" marT="45720" marB="45720" anchor="ctr">
+                  <a:tcPr anchor="ctr">
                     <a:lnL w="38100" cap="flat" cmpd="sng" algn="ctr">
                       <a:solidFill>
                         <a:srgbClr val="FFFFFF"/>
@@ -24891,7 +24795,7 @@
                     <a:bodyPr/>
                     <a:lstStyle/>
                     <a:p>
-                      <a:pPr algn="ctr" indent="0" marL="0">
+                      <a:pPr marL="0" indent="0" algn="ctr">
                         <a:buNone/>
                       </a:pPr>
                       <a:r>
@@ -24912,7 +24816,7 @@
                       </a:endParaRPr>
                     </a:p>
                   </a:txBody>
-                  <a:tcPr marL="91440" marR="91440" marT="45720" marB="45720" anchor="ctr">
+                  <a:tcPr anchor="ctr">
                     <a:lnL w="38100" cap="flat" cmpd="sng" algn="ctr">
                       <a:solidFill>
                         <a:srgbClr val="FFFFFF"/>
@@ -24959,7 +24863,7 @@
                     <a:bodyPr/>
                     <a:lstStyle/>
                     <a:p>
-                      <a:pPr algn="ctr" indent="0" marL="0">
+                      <a:pPr marL="0" indent="0" algn="ctr">
                         <a:buNone/>
                       </a:pPr>
                       <a:r>
@@ -24980,7 +24884,7 @@
                       </a:endParaRPr>
                     </a:p>
                   </a:txBody>
-                  <a:tcPr marL="91440" marR="91440" marT="45720" marB="45720" anchor="ctr">
+                  <a:tcPr anchor="ctr">
                     <a:lnL w="38100" cap="flat" cmpd="sng" algn="ctr">
                       <a:solidFill>
                         <a:srgbClr val="FFFFFF"/>
@@ -25027,7 +24931,7 @@
                     <a:bodyPr/>
                     <a:lstStyle/>
                     <a:p>
-                      <a:pPr algn="ctr" indent="0" marL="0">
+                      <a:pPr marL="0" indent="0" algn="ctr">
                         <a:buNone/>
                       </a:pPr>
                       <a:r>
@@ -25048,7 +24952,7 @@
                       </a:endParaRPr>
                     </a:p>
                   </a:txBody>
-                  <a:tcPr marL="91440" marR="91440" marT="45720" marB="45720" anchor="ctr">
+                  <a:tcPr anchor="ctr">
                     <a:lnL w="38100" cap="flat" cmpd="sng" algn="ctr">
                       <a:solidFill>
                         <a:srgbClr val="FFFFFF"/>
@@ -25095,7 +24999,7 @@
                     <a:bodyPr/>
                     <a:lstStyle/>
                     <a:p>
-                      <a:pPr algn="ctr" indent="0" marL="0">
+                      <a:pPr marL="0" indent="0" algn="ctr">
                         <a:buNone/>
                       </a:pPr>
                       <a:r>
@@ -25116,7 +25020,7 @@
                       </a:endParaRPr>
                     </a:p>
                   </a:txBody>
-                  <a:tcPr marL="91440" marR="91440" marT="45720" marB="45720" anchor="ctr">
+                  <a:tcPr anchor="ctr">
                     <a:lnL w="38100" cap="flat" cmpd="sng" algn="ctr">
                       <a:solidFill>
                         <a:srgbClr val="FFFFFF"/>
@@ -25158,6 +25062,11 @@
                     </a:solidFill>
                   </a:tcPr>
                 </a:tc>
+                <a:extLst>
+                  <a:ext uri="{0D108BD9-81ED-4DB2-BD59-A6C34878D82A}">
+                    <a16:rowId xmlns:a16="http://schemas.microsoft.com/office/drawing/2014/main" val="10001"/>
+                  </a:ext>
+                </a:extLst>
               </a:tr>
               <a:tr h="548640">
                 <a:tc>
@@ -25165,7 +25074,7 @@
                     <a:bodyPr/>
                     <a:lstStyle/>
                     <a:p>
-                      <a:pPr algn="ctr" indent="0" marL="0">
+                      <a:pPr marL="0" indent="0" algn="ctr">
                         <a:buNone/>
                       </a:pPr>
                       <a:r>
@@ -25186,7 +25095,7 @@
                       </a:endParaRPr>
                     </a:p>
                   </a:txBody>
-                  <a:tcPr marL="91440" marR="91440" marT="45720" marB="45720" anchor="ctr">
+                  <a:tcPr anchor="ctr">
                     <a:lnL w="38100" cap="flat" cmpd="sng" algn="ctr">
                       <a:solidFill>
                         <a:srgbClr val="FFFFFF"/>
@@ -25233,7 +25142,7 @@
                     <a:bodyPr/>
                     <a:lstStyle/>
                     <a:p>
-                      <a:pPr algn="ctr" indent="0" marL="0">
+                      <a:pPr marL="0" indent="0" algn="ctr">
                         <a:buNone/>
                       </a:pPr>
                       <a:r>
@@ -25254,7 +25163,7 @@
                       </a:endParaRPr>
                     </a:p>
                   </a:txBody>
-                  <a:tcPr marL="91440" marR="91440" marT="45720" marB="45720" anchor="ctr">
+                  <a:tcPr anchor="ctr">
                     <a:lnL w="38100" cap="flat" cmpd="sng" algn="ctr">
                       <a:solidFill>
                         <a:srgbClr val="FFFFFF"/>
@@ -25301,7 +25210,7 @@
                     <a:bodyPr/>
                     <a:lstStyle/>
                     <a:p>
-                      <a:pPr algn="ctr" indent="0" marL="0">
+                      <a:pPr marL="0" indent="0" algn="ctr">
                         <a:buNone/>
                       </a:pPr>
                       <a:r>
@@ -25322,7 +25231,7 @@
                       </a:endParaRPr>
                     </a:p>
                   </a:txBody>
-                  <a:tcPr marL="91440" marR="91440" marT="45720" marB="45720" anchor="ctr">
+                  <a:tcPr anchor="ctr">
                     <a:lnL w="38100" cap="flat" cmpd="sng" algn="ctr">
                       <a:solidFill>
                         <a:srgbClr val="FFFFFF"/>
@@ -25369,7 +25278,7 @@
                     <a:bodyPr/>
                     <a:lstStyle/>
                     <a:p>
-                      <a:pPr algn="ctr" indent="0" marL="0">
+                      <a:pPr marL="0" indent="0" algn="ctr">
                         <a:buNone/>
                       </a:pPr>
                       <a:r>
@@ -25390,7 +25299,7 @@
                       </a:endParaRPr>
                     </a:p>
                   </a:txBody>
-                  <a:tcPr marL="91440" marR="91440" marT="45720" marB="45720" anchor="ctr">
+                  <a:tcPr anchor="ctr">
                     <a:lnL w="38100" cap="flat" cmpd="sng" algn="ctr">
                       <a:solidFill>
                         <a:srgbClr val="FFFFFF"/>
@@ -25437,7 +25346,7 @@
                     <a:bodyPr/>
                     <a:lstStyle/>
                     <a:p>
-                      <a:pPr algn="ctr" indent="0" marL="0">
+                      <a:pPr marL="0" indent="0" algn="ctr">
                         <a:buNone/>
                       </a:pPr>
                       <a:r>
@@ -25458,7 +25367,7 @@
                       </a:endParaRPr>
                     </a:p>
                   </a:txBody>
-                  <a:tcPr marL="91440" marR="91440" marT="45720" marB="45720" anchor="ctr">
+                  <a:tcPr anchor="ctr">
                     <a:lnL w="38100" cap="flat" cmpd="sng" algn="ctr">
                       <a:solidFill>
                         <a:srgbClr val="FFFFFF"/>
@@ -25500,6 +25409,11 @@
                     </a:solidFill>
                   </a:tcPr>
                 </a:tc>
+                <a:extLst>
+                  <a:ext uri="{0D108BD9-81ED-4DB2-BD59-A6C34878D82A}">
+                    <a16:rowId xmlns:a16="http://schemas.microsoft.com/office/drawing/2014/main" val="10002"/>
+                  </a:ext>
+                </a:extLst>
               </a:tr>
               <a:tr h="548640">
                 <a:tc>
@@ -25507,7 +25421,7 @@
                     <a:bodyPr/>
                     <a:lstStyle/>
                     <a:p>
-                      <a:pPr algn="ctr" indent="0" marL="0">
+                      <a:pPr marL="0" indent="0" algn="ctr">
                         <a:buNone/>
                       </a:pPr>
                       <a:r>
@@ -25528,7 +25442,7 @@
                       </a:endParaRPr>
                     </a:p>
                   </a:txBody>
-                  <a:tcPr marL="91440" marR="91440" marT="45720" marB="45720" anchor="ctr">
+                  <a:tcPr anchor="ctr">
                     <a:lnL w="38100" cap="flat" cmpd="sng" algn="ctr">
                       <a:solidFill>
                         <a:srgbClr val="FFFFFF"/>
@@ -25575,7 +25489,7 @@
                     <a:bodyPr/>
                     <a:lstStyle/>
                     <a:p>
-                      <a:pPr algn="ctr" indent="0" marL="0">
+                      <a:pPr marL="0" indent="0" algn="ctr">
                         <a:buNone/>
                       </a:pPr>
                       <a:r>
@@ -25596,7 +25510,7 @@
                       </a:endParaRPr>
                     </a:p>
                   </a:txBody>
-                  <a:tcPr marL="91440" marR="91440" marT="45720" marB="45720" anchor="ctr">
+                  <a:tcPr anchor="ctr">
                     <a:lnL w="38100" cap="flat" cmpd="sng" algn="ctr">
                       <a:solidFill>
                         <a:srgbClr val="FFFFFF"/>
@@ -25643,7 +25557,7 @@
                     <a:bodyPr/>
                     <a:lstStyle/>
                     <a:p>
-                      <a:pPr algn="ctr" indent="0" marL="0">
+                      <a:pPr marL="0" indent="0" algn="ctr">
                         <a:buNone/>
                       </a:pPr>
                       <a:r>
@@ -25664,7 +25578,7 @@
                       </a:endParaRPr>
                     </a:p>
                   </a:txBody>
-                  <a:tcPr marL="91440" marR="91440" marT="45720" marB="45720" anchor="ctr">
+                  <a:tcPr anchor="ctr">
                     <a:lnL w="38100" cap="flat" cmpd="sng" algn="ctr">
                       <a:solidFill>
                         <a:srgbClr val="FFFFFF"/>
@@ -25711,7 +25625,7 @@
                     <a:bodyPr/>
                     <a:lstStyle/>
                     <a:p>
-                      <a:pPr algn="ctr" indent="0" marL="0">
+                      <a:pPr marL="0" indent="0" algn="ctr">
                         <a:buNone/>
                       </a:pPr>
                       <a:r>
@@ -25732,7 +25646,7 @@
                       </a:endParaRPr>
                     </a:p>
                   </a:txBody>
-                  <a:tcPr marL="91440" marR="91440" marT="45720" marB="45720" anchor="ctr">
+                  <a:tcPr anchor="ctr">
                     <a:lnL w="38100" cap="flat" cmpd="sng" algn="ctr">
                       <a:solidFill>
                         <a:srgbClr val="FFFFFF"/>
@@ -25779,7 +25693,7 @@
                     <a:bodyPr/>
                     <a:lstStyle/>
                     <a:p>
-                      <a:pPr algn="ctr" indent="0" marL="0">
+                      <a:pPr marL="0" indent="0" algn="ctr">
                         <a:buNone/>
                       </a:pPr>
                       <a:r>
@@ -25800,7 +25714,7 @@
                       </a:endParaRPr>
                     </a:p>
                   </a:txBody>
-                  <a:tcPr marL="91440" marR="91440" marT="45720" marB="45720" anchor="ctr">
+                  <a:tcPr anchor="ctr">
                     <a:lnL w="38100" cap="flat" cmpd="sng" algn="ctr">
                       <a:solidFill>
                         <a:srgbClr val="FFFFFF"/>
@@ -25842,6 +25756,11 @@
                     </a:solidFill>
                   </a:tcPr>
                 </a:tc>
+                <a:extLst>
+                  <a:ext uri="{0D108BD9-81ED-4DB2-BD59-A6C34878D82A}">
+                    <a16:rowId xmlns:a16="http://schemas.microsoft.com/office/drawing/2014/main" val="10003"/>
+                  </a:ext>
+                </a:extLst>
               </a:tr>
               <a:tr h="548640">
                 <a:tc>
@@ -25849,7 +25768,7 @@
                     <a:bodyPr/>
                     <a:lstStyle/>
                     <a:p>
-                      <a:pPr algn="ctr" indent="0" marL="0">
+                      <a:pPr marL="0" indent="0" algn="ctr">
                         <a:buNone/>
                       </a:pPr>
                       <a:r>
@@ -25870,7 +25789,7 @@
                       </a:endParaRPr>
                     </a:p>
                   </a:txBody>
-                  <a:tcPr marL="91440" marR="91440" marT="45720" marB="45720" anchor="ctr">
+                  <a:tcPr anchor="ctr">
                     <a:lnL w="38100" cap="flat" cmpd="sng" algn="ctr">
                       <a:solidFill>
                         <a:srgbClr val="FFFFFF"/>
@@ -25917,7 +25836,7 @@
                     <a:bodyPr/>
                     <a:lstStyle/>
                     <a:p>
-                      <a:pPr algn="ctr" indent="0" marL="0">
+                      <a:pPr marL="0" indent="0" algn="ctr">
                         <a:buNone/>
                       </a:pPr>
                       <a:r>
@@ -25938,7 +25857,7 @@
                       </a:endParaRPr>
                     </a:p>
                   </a:txBody>
-                  <a:tcPr marL="91440" marR="91440" marT="45720" marB="45720" anchor="ctr">
+                  <a:tcPr anchor="ctr">
                     <a:lnL w="38100" cap="flat" cmpd="sng" algn="ctr">
                       <a:solidFill>
                         <a:srgbClr val="FFFFFF"/>
@@ -25985,7 +25904,7 @@
                     <a:bodyPr/>
                     <a:lstStyle/>
                     <a:p>
-                      <a:pPr algn="ctr" indent="0" marL="0">
+                      <a:pPr marL="0" indent="0" algn="ctr">
                         <a:buNone/>
                       </a:pPr>
                       <a:r>
@@ -26006,7 +25925,7 @@
                       </a:endParaRPr>
                     </a:p>
                   </a:txBody>
-                  <a:tcPr marL="91440" marR="91440" marT="45720" marB="45720" anchor="ctr">
+                  <a:tcPr anchor="ctr">
                     <a:lnL w="38100" cap="flat" cmpd="sng" algn="ctr">
                       <a:solidFill>
                         <a:srgbClr val="FFFFFF"/>
@@ -26053,7 +25972,7 @@
                     <a:bodyPr/>
                     <a:lstStyle/>
                     <a:p>
-                      <a:pPr algn="ctr" indent="0" marL="0">
+                      <a:pPr marL="0" indent="0" algn="ctr">
                         <a:buNone/>
                       </a:pPr>
                       <a:r>
@@ -26074,7 +25993,7 @@
                       </a:endParaRPr>
                     </a:p>
                   </a:txBody>
-                  <a:tcPr marL="91440" marR="91440" marT="45720" marB="45720" anchor="ctr">
+                  <a:tcPr anchor="ctr">
                     <a:lnL w="38100" cap="flat" cmpd="sng" algn="ctr">
                       <a:solidFill>
                         <a:srgbClr val="FFFFFF"/>
@@ -26121,7 +26040,7 @@
                     <a:bodyPr/>
                     <a:lstStyle/>
                     <a:p>
-                      <a:pPr algn="ctr" indent="0" marL="0">
+                      <a:pPr marL="0" indent="0" algn="ctr">
                         <a:buNone/>
                       </a:pPr>
                       <a:r>
@@ -26142,7 +26061,7 @@
                       </a:endParaRPr>
                     </a:p>
                   </a:txBody>
-                  <a:tcPr marL="91440" marR="91440" marT="45720" marB="45720" anchor="ctr">
+                  <a:tcPr anchor="ctr">
                     <a:lnL w="38100" cap="flat" cmpd="sng" algn="ctr">
                       <a:solidFill>
                         <a:srgbClr val="FFFFFF"/>
@@ -26184,6 +26103,11 @@
                     </a:solidFill>
                   </a:tcPr>
                 </a:tc>
+                <a:extLst>
+                  <a:ext uri="{0D108BD9-81ED-4DB2-BD59-A6C34878D82A}">
+                    <a16:rowId xmlns:a16="http://schemas.microsoft.com/office/drawing/2014/main" val="10004"/>
+                  </a:ext>
+                </a:extLst>
               </a:tr>
             </a:tbl>
           </a:graphicData>
@@ -26210,7 +26134,7 @@
           <a:bodyPr wrap="square" lIns="0" tIns="0" rIns="0" bIns="0" rtlCol="0" anchor="ctr"/>
           <a:lstStyle/>
           <a:p>
-            <a:pPr algn="ctr" indent="0" marL="0">
+            <a:pPr marL="0" indent="0" algn="ctr">
               <a:buNone/>
             </a:pPr>
             <a:r>
@@ -26249,7 +26173,7 @@
           <a:bodyPr wrap="square" lIns="0" tIns="0" rIns="0" bIns="0" rtlCol="0" anchor="ctr"/>
           <a:lstStyle/>
           <a:p>
-            <a:pPr algn="r" indent="0" marL="0">
+            <a:pPr marL="0" indent="0" algn="r">
               <a:buNone/>
             </a:pPr>
             <a:r>
@@ -26283,6 +26207,7 @@
         <a:solidFill>
           <a:srgbClr val="FFFFFF"/>
         </a:solidFill>
+        <a:effectLst/>
       </p:bgPr>
     </p:bg>
     <p:spTree>
@@ -26320,11 +26245,11 @@
           <a:bodyPr wrap="square" lIns="0" tIns="0" rIns="0" bIns="0" rtlCol="0" anchor="ctr"/>
           <a:lstStyle/>
           <a:p>
-            <a:pPr algn="l" indent="0" marL="0">
+            <a:pPr marL="0" indent="0" algn="l">
               <a:buNone/>
             </a:pPr>
             <a:r>
-              <a:rPr lang="en-US" sz="1200" b="1" spc="200" kern="0" dirty="0">
+              <a:rPr lang="en-US" sz="1200" b="1" kern="0" spc="200" dirty="0">
                 <a:solidFill>
                   <a:srgbClr val="6C4BC1"/>
                 </a:solidFill>
@@ -26359,7 +26284,7 @@
           <a:bodyPr wrap="square" lIns="0" tIns="0" rIns="0" bIns="0" rtlCol="0" anchor="ctr"/>
           <a:lstStyle/>
           <a:p>
-            <a:pPr indent="0" marL="0">
+            <a:pPr marL="0" indent="0">
               <a:buNone/>
             </a:pPr>
             <a:r>
@@ -26398,7 +26323,7 @@
           <a:bodyPr wrap="square" lIns="0" tIns="0" rIns="0" bIns="0" rtlCol="0" anchor="ctr"/>
           <a:lstStyle/>
           <a:p>
-            <a:pPr indent="0" marL="0">
+            <a:pPr marL="0" indent="0">
               <a:buNone/>
             </a:pPr>
             <a:r>
@@ -26459,7 +26384,7 @@
           <a:bodyPr wrap="square" lIns="0" tIns="0" rIns="0" bIns="0" rtlCol="0" anchor="ctr"/>
           <a:lstStyle/>
           <a:p>
-            <a:pPr algn="ctr" indent="0" marL="0">
+            <a:pPr marL="0" indent="0" algn="ctr">
               <a:lnSpc>
                 <a:spcPts val="1500"/>
               </a:lnSpc>
@@ -26501,7 +26426,7 @@
           <a:bodyPr wrap="square" lIns="0" tIns="0" rIns="0" bIns="0" rtlCol="0" anchor="ctr"/>
           <a:lstStyle/>
           <a:p>
-            <a:pPr algn="ctr" indent="0" marL="0">
+            <a:pPr marL="0" indent="0" algn="ctr">
               <a:buNone/>
             </a:pPr>
             <a:r>
@@ -26562,7 +26487,7 @@
           <a:bodyPr wrap="square" lIns="0" tIns="0" rIns="0" bIns="0" rtlCol="0" anchor="ctr"/>
           <a:lstStyle/>
           <a:p>
-            <a:pPr algn="ctr" indent="0" marL="0">
+            <a:pPr marL="0" indent="0" algn="ctr">
               <a:lnSpc>
                 <a:spcPts val="1500"/>
               </a:lnSpc>
@@ -26604,7 +26529,7 @@
           <a:bodyPr wrap="square" lIns="0" tIns="0" rIns="0" bIns="0" rtlCol="0" anchor="ctr"/>
           <a:lstStyle/>
           <a:p>
-            <a:pPr algn="ctr" indent="0" marL="0">
+            <a:pPr marL="0" indent="0" algn="ctr">
               <a:buNone/>
             </a:pPr>
             <a:r>
@@ -26643,7 +26568,7 @@
           <a:bodyPr wrap="square" lIns="0" tIns="0" rIns="0" bIns="0" rtlCol="0" anchor="ctr"/>
           <a:lstStyle/>
           <a:p>
-            <a:pPr algn="ctr" indent="0" marL="0">
+            <a:pPr marL="0" indent="0" algn="ctr">
               <a:buNone/>
             </a:pPr>
             <a:r>
@@ -26704,7 +26629,7 @@
           <a:bodyPr wrap="square" lIns="0" tIns="0" rIns="0" bIns="0" rtlCol="0" anchor="ctr"/>
           <a:lstStyle/>
           <a:p>
-            <a:pPr algn="ctr" indent="0" marL="0">
+            <a:pPr marL="0" indent="0" algn="ctr">
               <a:lnSpc>
                 <a:spcPts val="1500"/>
               </a:lnSpc>
@@ -26746,7 +26671,7 @@
           <a:bodyPr wrap="square" lIns="0" tIns="0" rIns="0" bIns="0" rtlCol="0" anchor="ctr"/>
           <a:lstStyle/>
           <a:p>
-            <a:pPr algn="ctr" indent="0" marL="0">
+            <a:pPr marL="0" indent="0" algn="ctr">
               <a:buNone/>
             </a:pPr>
             <a:r>
@@ -26785,7 +26710,7 @@
           <a:bodyPr wrap="square" lIns="0" tIns="0" rIns="0" bIns="0" rtlCol="0" anchor="ctr"/>
           <a:lstStyle/>
           <a:p>
-            <a:pPr algn="ctr" indent="0" marL="0">
+            <a:pPr marL="0" indent="0" algn="ctr">
               <a:buNone/>
             </a:pPr>
             <a:r>
@@ -26846,7 +26771,7 @@
           <a:bodyPr wrap="square" lIns="0" tIns="0" rIns="0" bIns="0" rtlCol="0" anchor="ctr"/>
           <a:lstStyle/>
           <a:p>
-            <a:pPr algn="ctr" indent="0" marL="0">
+            <a:pPr marL="0" indent="0" algn="ctr">
               <a:lnSpc>
                 <a:spcPts val="1500"/>
               </a:lnSpc>
@@ -26888,7 +26813,7 @@
           <a:bodyPr wrap="square" lIns="0" tIns="0" rIns="0" bIns="0" rtlCol="0" anchor="ctr"/>
           <a:lstStyle/>
           <a:p>
-            <a:pPr algn="ctr" indent="0" marL="0">
+            <a:pPr marL="0" indent="0" algn="ctr">
               <a:buNone/>
             </a:pPr>
             <a:r>
@@ -26927,7 +26852,7 @@
           <a:bodyPr wrap="square" lIns="0" tIns="0" rIns="0" bIns="0" rtlCol="0" anchor="ctr"/>
           <a:lstStyle/>
           <a:p>
-            <a:pPr algn="ctr" indent="0" marL="0">
+            <a:pPr marL="0" indent="0" algn="ctr">
               <a:buNone/>
             </a:pPr>
             <a:r>
@@ -26988,7 +26913,7 @@
           <a:bodyPr wrap="square" lIns="0" tIns="0" rIns="0" bIns="0" rtlCol="0" anchor="ctr"/>
           <a:lstStyle/>
           <a:p>
-            <a:pPr algn="ctr" indent="0" marL="0">
+            <a:pPr marL="0" indent="0" algn="ctr">
               <a:lnSpc>
                 <a:spcPts val="1500"/>
               </a:lnSpc>
@@ -27030,7 +26955,7 @@
           <a:bodyPr wrap="square" lIns="0" tIns="0" rIns="0" bIns="0" rtlCol="0" anchor="ctr"/>
           <a:lstStyle/>
           <a:p>
-            <a:pPr algn="ctr" indent="0" marL="0">
+            <a:pPr marL="0" indent="0" algn="ctr">
               <a:buNone/>
             </a:pPr>
             <a:r>
@@ -27069,7 +26994,7 @@
           <a:bodyPr wrap="square" lIns="0" tIns="0" rIns="0" bIns="0" rtlCol="0" anchor="ctr"/>
           <a:lstStyle/>
           <a:p>
-            <a:pPr algn="ctr" indent="0" marL="0">
+            <a:pPr marL="0" indent="0" algn="ctr">
               <a:buNone/>
             </a:pPr>
             <a:r>
@@ -27108,7 +27033,7 @@
           <a:bodyPr wrap="square" lIns="0" tIns="0" rIns="0" bIns="0" rtlCol="0" anchor="ctr"/>
           <a:lstStyle/>
           <a:p>
-            <a:pPr algn="r" indent="0" marL="0">
+            <a:pPr marL="0" indent="0" algn="r">
               <a:buNone/>
             </a:pPr>
             <a:r>
@@ -27142,6 +27067,7 @@
         <a:solidFill>
           <a:srgbClr val="FFFFFF"/>
         </a:solidFill>
+        <a:effectLst/>
       </p:bgPr>
     </p:bg>
     <p:spTree>
@@ -27179,11 +27105,11 @@
           <a:bodyPr wrap="square" lIns="0" tIns="0" rIns="0" bIns="0" rtlCol="0" anchor="ctr"/>
           <a:lstStyle/>
           <a:p>
-            <a:pPr algn="l" indent="0" marL="0">
+            <a:pPr marL="0" indent="0" algn="l">
               <a:buNone/>
             </a:pPr>
             <a:r>
-              <a:rPr lang="en-US" sz="1200" b="1" spc="200" kern="0" dirty="0">
+              <a:rPr lang="en-US" sz="1200" b="1" kern="0" spc="200" dirty="0">
                 <a:solidFill>
                   <a:srgbClr val="6C4BC1"/>
                 </a:solidFill>
@@ -27219,14 +27145,14 @@
       </p:sp>
       <p:pic>
         <p:nvPicPr>
-          <p:cNvPr id="4" name="Image 0" descr="preencoded.png">    </p:cNvPr>
+          <p:cNvPr id="4" name="Image 0" descr="preencoded.png"/>
           <p:cNvPicPr>
             <a:picLocks noChangeAspect="1"/>
           </p:cNvPicPr>
           <p:nvPr/>
         </p:nvPicPr>
         <p:blipFill>
-          <a:blip r:embed="rId1"/>
+          <a:blip r:embed="rId3"/>
           <a:stretch>
             <a:fillRect/>
           </a:stretch>
@@ -27262,7 +27188,7 @@
           <a:bodyPr wrap="square" lIns="0" tIns="0" rIns="0" bIns="0" rtlCol="0" anchor="ctr"/>
           <a:lstStyle/>
           <a:p>
-            <a:pPr indent="0" marL="0">
+            <a:pPr marL="0" indent="0">
               <a:buNone/>
             </a:pPr>
             <a:r>
@@ -27301,7 +27227,7 @@
           <a:bodyPr wrap="square" lIns="0" tIns="0" rIns="0" bIns="0" rtlCol="0" anchor="ctr"/>
           <a:lstStyle/>
           <a:p>
-            <a:pPr indent="0" marL="0">
+            <a:pPr marL="0" indent="0">
               <a:buNone/>
             </a:pPr>
             <a:r>
@@ -27342,10 +27268,34 @@
             <a:tbl>
               <a:tblPr/>
               <a:tblGrid>
-                <a:gridCol w="1485900"/>
-                <a:gridCol w="1485900"/>
-                <a:gridCol w="1485900"/>
-                <a:gridCol w="1485900"/>
+                <a:gridCol w="1485900">
+                  <a:extLst>
+                    <a:ext uri="{9D8B030D-6E8A-4147-A177-3AD203B41FA5}">
+                      <a16:colId xmlns:a16="http://schemas.microsoft.com/office/drawing/2014/main" val="20000"/>
+                    </a:ext>
+                  </a:extLst>
+                </a:gridCol>
+                <a:gridCol w="1485900">
+                  <a:extLst>
+                    <a:ext uri="{9D8B030D-6E8A-4147-A177-3AD203B41FA5}">
+                      <a16:colId xmlns:a16="http://schemas.microsoft.com/office/drawing/2014/main" val="20001"/>
+                    </a:ext>
+                  </a:extLst>
+                </a:gridCol>
+                <a:gridCol w="1485900">
+                  <a:extLst>
+                    <a:ext uri="{9D8B030D-6E8A-4147-A177-3AD203B41FA5}">
+                      <a16:colId xmlns:a16="http://schemas.microsoft.com/office/drawing/2014/main" val="20002"/>
+                    </a:ext>
+                  </a:extLst>
+                </a:gridCol>
+                <a:gridCol w="1485900">
+                  <a:extLst>
+                    <a:ext uri="{9D8B030D-6E8A-4147-A177-3AD203B41FA5}">
+                      <a16:colId xmlns:a16="http://schemas.microsoft.com/office/drawing/2014/main" val="20003"/>
+                    </a:ext>
+                  </a:extLst>
+                </a:gridCol>
               </a:tblGrid>
               <a:tr h="502920">
                 <a:tc>
@@ -27353,7 +27303,7 @@
                     <a:bodyPr/>
                     <a:lstStyle/>
                     <a:p>
-                      <a:pPr algn="ctr" indent="0" marL="0">
+                      <a:pPr marL="0" indent="0" algn="ctr">
                         <a:buNone/>
                       </a:pPr>
                       <a:r>
@@ -27374,7 +27324,7 @@
                       </a:endParaRPr>
                     </a:p>
                   </a:txBody>
-                  <a:tcPr marL="91440" marR="91440" marT="45720" marB="45720" anchor="ctr">
+                  <a:tcPr anchor="ctr">
                     <a:lnL w="38100" cap="flat" cmpd="sng" algn="ctr">
                       <a:solidFill>
                         <a:srgbClr val="FFFFFF"/>
@@ -27421,7 +27371,7 @@
                     <a:bodyPr/>
                     <a:lstStyle/>
                     <a:p>
-                      <a:pPr algn="ctr" indent="0" marL="0">
+                      <a:pPr marL="0" indent="0" algn="ctr">
                         <a:buNone/>
                       </a:pPr>
                       <a:r>
@@ -27442,7 +27392,7 @@
                       </a:endParaRPr>
                     </a:p>
                   </a:txBody>
-                  <a:tcPr marL="91440" marR="91440" marT="45720" marB="45720" anchor="ctr">
+                  <a:tcPr anchor="ctr">
                     <a:lnL w="38100" cap="flat" cmpd="sng" algn="ctr">
                       <a:solidFill>
                         <a:srgbClr val="FFFFFF"/>
@@ -27489,7 +27439,7 @@
                     <a:bodyPr/>
                     <a:lstStyle/>
                     <a:p>
-                      <a:pPr algn="ctr" indent="0" marL="0">
+                      <a:pPr marL="0" indent="0" algn="ctr">
                         <a:buNone/>
                       </a:pPr>
                       <a:r>
@@ -27510,7 +27460,7 @@
                       </a:endParaRPr>
                     </a:p>
                   </a:txBody>
-                  <a:tcPr marL="91440" marR="91440" marT="45720" marB="45720" anchor="ctr">
+                  <a:tcPr anchor="ctr">
                     <a:lnL w="38100" cap="flat" cmpd="sng" algn="ctr">
                       <a:solidFill>
                         <a:srgbClr val="FFFFFF"/>
@@ -27557,7 +27507,7 @@
                     <a:bodyPr/>
                     <a:lstStyle/>
                     <a:p>
-                      <a:pPr algn="ctr" indent="0" marL="0">
+                      <a:pPr marL="0" indent="0" algn="ctr">
                         <a:buNone/>
                       </a:pPr>
                       <a:r>
@@ -27578,7 +27528,7 @@
                       </a:endParaRPr>
                     </a:p>
                   </a:txBody>
-                  <a:tcPr marL="91440" marR="91440" marT="45720" marB="45720" anchor="ctr">
+                  <a:tcPr anchor="ctr">
                     <a:lnL w="38100" cap="flat" cmpd="sng" algn="ctr">
                       <a:solidFill>
                         <a:srgbClr val="FFFFFF"/>
@@ -27620,6 +27570,11 @@
                     </a:solidFill>
                   </a:tcPr>
                 </a:tc>
+                <a:extLst>
+                  <a:ext uri="{0D108BD9-81ED-4DB2-BD59-A6C34878D82A}">
+                    <a16:rowId xmlns:a16="http://schemas.microsoft.com/office/drawing/2014/main" val="10000"/>
+                  </a:ext>
+                </a:extLst>
               </a:tr>
               <a:tr h="502920">
                 <a:tc>
@@ -27627,7 +27582,7 @@
                     <a:bodyPr/>
                     <a:lstStyle/>
                     <a:p>
-                      <a:pPr algn="ctr" indent="0" marL="0">
+                      <a:pPr marL="0" indent="0" algn="ctr">
                         <a:buNone/>
                       </a:pPr>
                       <a:r>
@@ -27648,7 +27603,7 @@
                       </a:endParaRPr>
                     </a:p>
                   </a:txBody>
-                  <a:tcPr marL="91440" marR="91440" marT="45720" marB="45720" anchor="ctr">
+                  <a:tcPr anchor="ctr">
                     <a:lnL w="38100" cap="flat" cmpd="sng" algn="ctr">
                       <a:solidFill>
                         <a:srgbClr val="FFFFFF"/>
@@ -27695,7 +27650,7 @@
                     <a:bodyPr/>
                     <a:lstStyle/>
                     <a:p>
-                      <a:pPr algn="ctr" indent="0" marL="0">
+                      <a:pPr marL="0" indent="0" algn="ctr">
                         <a:buNone/>
                       </a:pPr>
                       <a:r>
@@ -27716,7 +27671,7 @@
                       </a:endParaRPr>
                     </a:p>
                   </a:txBody>
-                  <a:tcPr marL="91440" marR="91440" marT="45720" marB="45720" anchor="ctr">
+                  <a:tcPr anchor="ctr">
                     <a:lnL w="38100" cap="flat" cmpd="sng" algn="ctr">
                       <a:solidFill>
                         <a:srgbClr val="FFFFFF"/>
@@ -27763,7 +27718,7 @@
                     <a:bodyPr/>
                     <a:lstStyle/>
                     <a:p>
-                      <a:pPr algn="ctr" indent="0" marL="0">
+                      <a:pPr marL="0" indent="0" algn="ctr">
                         <a:buNone/>
                       </a:pPr>
                       <a:r>
@@ -27784,7 +27739,7 @@
                       </a:endParaRPr>
                     </a:p>
                   </a:txBody>
-                  <a:tcPr marL="91440" marR="91440" marT="45720" marB="45720" anchor="ctr">
+                  <a:tcPr anchor="ctr">
                     <a:lnL w="38100" cap="flat" cmpd="sng" algn="ctr">
                       <a:solidFill>
                         <a:srgbClr val="FFFFFF"/>
@@ -27831,7 +27786,7 @@
                     <a:bodyPr/>
                     <a:lstStyle/>
                     <a:p>
-                      <a:pPr algn="ctr" indent="0" marL="0">
+                      <a:pPr marL="0" indent="0" algn="ctr">
                         <a:buNone/>
                       </a:pPr>
                       <a:r>
@@ -27852,7 +27807,7 @@
                       </a:endParaRPr>
                     </a:p>
                   </a:txBody>
-                  <a:tcPr marL="91440" marR="91440" marT="45720" marB="45720" anchor="ctr">
+                  <a:tcPr anchor="ctr">
                     <a:lnL w="38100" cap="flat" cmpd="sng" algn="ctr">
                       <a:solidFill>
                         <a:srgbClr val="FFFFFF"/>
@@ -27894,6 +27849,11 @@
                     </a:solidFill>
                   </a:tcPr>
                 </a:tc>
+                <a:extLst>
+                  <a:ext uri="{0D108BD9-81ED-4DB2-BD59-A6C34878D82A}">
+                    <a16:rowId xmlns:a16="http://schemas.microsoft.com/office/drawing/2014/main" val="10001"/>
+                  </a:ext>
+                </a:extLst>
               </a:tr>
               <a:tr h="502920">
                 <a:tc>
@@ -27901,7 +27861,7 @@
                     <a:bodyPr/>
                     <a:lstStyle/>
                     <a:p>
-                      <a:pPr algn="ctr" indent="0" marL="0">
+                      <a:pPr marL="0" indent="0" algn="ctr">
                         <a:buNone/>
                       </a:pPr>
                       <a:r>
@@ -27922,7 +27882,7 @@
                       </a:endParaRPr>
                     </a:p>
                   </a:txBody>
-                  <a:tcPr marL="91440" marR="91440" marT="45720" marB="45720" anchor="ctr">
+                  <a:tcPr anchor="ctr">
                     <a:lnL w="38100" cap="flat" cmpd="sng" algn="ctr">
                       <a:solidFill>
                         <a:srgbClr val="FFFFFF"/>
@@ -27969,7 +27929,7 @@
                     <a:bodyPr/>
                     <a:lstStyle/>
                     <a:p>
-                      <a:pPr algn="ctr" indent="0" marL="0">
+                      <a:pPr marL="0" indent="0" algn="ctr">
                         <a:buNone/>
                       </a:pPr>
                       <a:r>
@@ -27990,7 +27950,7 @@
                       </a:endParaRPr>
                     </a:p>
                   </a:txBody>
-                  <a:tcPr marL="91440" marR="91440" marT="45720" marB="45720" anchor="ctr">
+                  <a:tcPr anchor="ctr">
                     <a:lnL w="38100" cap="flat" cmpd="sng" algn="ctr">
                       <a:solidFill>
                         <a:srgbClr val="FFFFFF"/>
@@ -28037,7 +27997,7 @@
                     <a:bodyPr/>
                     <a:lstStyle/>
                     <a:p>
-                      <a:pPr algn="ctr" indent="0" marL="0">
+                      <a:pPr marL="0" indent="0" algn="ctr">
                         <a:buNone/>
                       </a:pPr>
                       <a:r>
@@ -28058,7 +28018,7 @@
                       </a:endParaRPr>
                     </a:p>
                   </a:txBody>
-                  <a:tcPr marL="91440" marR="91440" marT="45720" marB="45720" anchor="ctr">
+                  <a:tcPr anchor="ctr">
                     <a:lnL w="38100" cap="flat" cmpd="sng" algn="ctr">
                       <a:solidFill>
                         <a:srgbClr val="FFFFFF"/>
@@ -28105,7 +28065,7 @@
                     <a:bodyPr/>
                     <a:lstStyle/>
                     <a:p>
-                      <a:pPr algn="ctr" indent="0" marL="0">
+                      <a:pPr marL="0" indent="0" algn="ctr">
                         <a:buNone/>
                       </a:pPr>
                       <a:r>
@@ -28126,7 +28086,7 @@
                       </a:endParaRPr>
                     </a:p>
                   </a:txBody>
-                  <a:tcPr marL="91440" marR="91440" marT="45720" marB="45720" anchor="ctr">
+                  <a:tcPr anchor="ctr">
                     <a:lnL w="38100" cap="flat" cmpd="sng" algn="ctr">
                       <a:solidFill>
                         <a:srgbClr val="FFFFFF"/>
@@ -28168,6 +28128,11 @@
                     </a:solidFill>
                   </a:tcPr>
                 </a:tc>
+                <a:extLst>
+                  <a:ext uri="{0D108BD9-81ED-4DB2-BD59-A6C34878D82A}">
+                    <a16:rowId xmlns:a16="http://schemas.microsoft.com/office/drawing/2014/main" val="10002"/>
+                  </a:ext>
+                </a:extLst>
               </a:tr>
               <a:tr h="502920">
                 <a:tc>
@@ -28175,7 +28140,7 @@
                     <a:bodyPr/>
                     <a:lstStyle/>
                     <a:p>
-                      <a:pPr algn="ctr" indent="0" marL="0">
+                      <a:pPr marL="0" indent="0" algn="ctr">
                         <a:buNone/>
                       </a:pPr>
                       <a:r>
@@ -28196,7 +28161,7 @@
                       </a:endParaRPr>
                     </a:p>
                   </a:txBody>
-                  <a:tcPr marL="91440" marR="91440" marT="45720" marB="45720" anchor="ctr">
+                  <a:tcPr anchor="ctr">
                     <a:lnL w="38100" cap="flat" cmpd="sng" algn="ctr">
                       <a:solidFill>
                         <a:srgbClr val="FFFFFF"/>
@@ -28243,7 +28208,7 @@
                     <a:bodyPr/>
                     <a:lstStyle/>
                     <a:p>
-                      <a:pPr algn="ctr" indent="0" marL="0">
+                      <a:pPr marL="0" indent="0" algn="ctr">
                         <a:buNone/>
                       </a:pPr>
                       <a:r>
@@ -28264,7 +28229,7 @@
                       </a:endParaRPr>
                     </a:p>
                   </a:txBody>
-                  <a:tcPr marL="91440" marR="91440" marT="45720" marB="45720" anchor="ctr">
+                  <a:tcPr anchor="ctr">
                     <a:lnL w="38100" cap="flat" cmpd="sng" algn="ctr">
                       <a:solidFill>
                         <a:srgbClr val="FFFFFF"/>
@@ -28311,7 +28276,7 @@
                     <a:bodyPr/>
                     <a:lstStyle/>
                     <a:p>
-                      <a:pPr algn="ctr" indent="0" marL="0">
+                      <a:pPr marL="0" indent="0" algn="ctr">
                         <a:buNone/>
                       </a:pPr>
                       <a:r>
@@ -28332,7 +28297,7 @@
                       </a:endParaRPr>
                     </a:p>
                   </a:txBody>
-                  <a:tcPr marL="91440" marR="91440" marT="45720" marB="45720" anchor="ctr">
+                  <a:tcPr anchor="ctr">
                     <a:lnL w="38100" cap="flat" cmpd="sng" algn="ctr">
                       <a:solidFill>
                         <a:srgbClr val="FFFFFF"/>
@@ -28379,7 +28344,7 @@
                     <a:bodyPr/>
                     <a:lstStyle/>
                     <a:p>
-                      <a:pPr algn="ctr" indent="0" marL="0">
+                      <a:pPr marL="0" indent="0" algn="ctr">
                         <a:buNone/>
                       </a:pPr>
                       <a:r>
@@ -28400,7 +28365,7 @@
                       </a:endParaRPr>
                     </a:p>
                   </a:txBody>
-                  <a:tcPr marL="91440" marR="91440" marT="45720" marB="45720" anchor="ctr">
+                  <a:tcPr anchor="ctr">
                     <a:lnL w="38100" cap="flat" cmpd="sng" algn="ctr">
                       <a:solidFill>
                         <a:srgbClr val="FFFFFF"/>
@@ -28442,6 +28407,11 @@
                     </a:solidFill>
                   </a:tcPr>
                 </a:tc>
+                <a:extLst>
+                  <a:ext uri="{0D108BD9-81ED-4DB2-BD59-A6C34878D82A}">
+                    <a16:rowId xmlns:a16="http://schemas.microsoft.com/office/drawing/2014/main" val="10003"/>
+                  </a:ext>
+                </a:extLst>
               </a:tr>
               <a:tr h="502920">
                 <a:tc>
@@ -28449,7 +28419,7 @@
                     <a:bodyPr/>
                     <a:lstStyle/>
                     <a:p>
-                      <a:pPr algn="ctr" indent="0" marL="0">
+                      <a:pPr marL="0" indent="0" algn="ctr">
                         <a:buNone/>
                       </a:pPr>
                       <a:r>
@@ -28470,7 +28440,7 @@
                       </a:endParaRPr>
                     </a:p>
                   </a:txBody>
-                  <a:tcPr marL="91440" marR="91440" marT="45720" marB="45720" anchor="ctr">
+                  <a:tcPr anchor="ctr">
                     <a:lnL w="38100" cap="flat" cmpd="sng" algn="ctr">
                       <a:solidFill>
                         <a:srgbClr val="FFFFFF"/>
@@ -28517,7 +28487,7 @@
                     <a:bodyPr/>
                     <a:lstStyle/>
                     <a:p>
-                      <a:pPr algn="ctr" indent="0" marL="0">
+                      <a:pPr marL="0" indent="0" algn="ctr">
                         <a:buNone/>
                       </a:pPr>
                       <a:r>
@@ -28538,7 +28508,7 @@
                       </a:endParaRPr>
                     </a:p>
                   </a:txBody>
-                  <a:tcPr marL="91440" marR="91440" marT="45720" marB="45720" anchor="ctr">
+                  <a:tcPr anchor="ctr">
                     <a:lnL w="38100" cap="flat" cmpd="sng" algn="ctr">
                       <a:solidFill>
                         <a:srgbClr val="FFFFFF"/>
@@ -28585,7 +28555,7 @@
                     <a:bodyPr/>
                     <a:lstStyle/>
                     <a:p>
-                      <a:pPr algn="ctr" indent="0" marL="0">
+                      <a:pPr marL="0" indent="0" algn="ctr">
                         <a:buNone/>
                       </a:pPr>
                       <a:r>
@@ -28606,7 +28576,7 @@
                       </a:endParaRPr>
                     </a:p>
                   </a:txBody>
-                  <a:tcPr marL="91440" marR="91440" marT="45720" marB="45720" anchor="ctr">
+                  <a:tcPr anchor="ctr">
                     <a:lnL w="38100" cap="flat" cmpd="sng" algn="ctr">
                       <a:solidFill>
                         <a:srgbClr val="FFFFFF"/>
@@ -28653,7 +28623,7 @@
                     <a:bodyPr/>
                     <a:lstStyle/>
                     <a:p>
-                      <a:pPr algn="ctr" indent="0" marL="0">
+                      <a:pPr marL="0" indent="0" algn="ctr">
                         <a:buNone/>
                       </a:pPr>
                       <a:r>
@@ -28674,7 +28644,7 @@
                       </a:endParaRPr>
                     </a:p>
                   </a:txBody>
-                  <a:tcPr marL="91440" marR="91440" marT="45720" marB="45720" anchor="ctr">
+                  <a:tcPr anchor="ctr">
                     <a:lnL w="38100" cap="flat" cmpd="sng" algn="ctr">
                       <a:solidFill>
                         <a:srgbClr val="FFFFFF"/>
@@ -28716,6 +28686,11 @@
                     </a:solidFill>
                   </a:tcPr>
                 </a:tc>
+                <a:extLst>
+                  <a:ext uri="{0D108BD9-81ED-4DB2-BD59-A6C34878D82A}">
+                    <a16:rowId xmlns:a16="http://schemas.microsoft.com/office/drawing/2014/main" val="10004"/>
+                  </a:ext>
+                </a:extLst>
               </a:tr>
             </a:tbl>
           </a:graphicData>
@@ -28764,7 +28739,7 @@
           <a:bodyPr wrap="square" lIns="0" tIns="0" rIns="0" bIns="0" rtlCol="0" anchor="ctr"/>
           <a:lstStyle/>
           <a:p>
-            <a:pPr algn="ctr" indent="0" marL="0">
+            <a:pPr marL="0" indent="0" algn="ctr">
               <a:buNone/>
             </a:pPr>
             <a:r>
@@ -28784,7 +28759,7 @@
       </p:sp>
       <p:sp>
         <p:nvSpPr>
-          <p:cNvPr id="10" name="Text 6"/>
+          <p:cNvPr id="7" name="Text 6"/>
           <p:cNvSpPr/>
           <p:nvPr/>
         </p:nvSpPr>
@@ -28803,7 +28778,7 @@
           <a:bodyPr wrap="square" lIns="0" tIns="0" rIns="0" bIns="0" rtlCol="0" anchor="ctr"/>
           <a:lstStyle/>
           <a:p>
-            <a:pPr algn="r" indent="0" marL="0">
+            <a:pPr marL="0" indent="0" algn="r">
               <a:buNone/>
             </a:pPr>
             <a:r>
@@ -29122,4 +29097,319 @@
     </a:ext>
   </a:extLst>
 </a:theme>
+</file>
+
+<file path=ppt/theme/theme2.xml><?xml version="1.0" encoding="utf-8"?>
+<a:theme xmlns:a="http://schemas.openxmlformats.org/drawingml/2006/main" name="Tema do Office">
+  <a:themeElements>
+    <a:clrScheme name="Office">
+      <a:dk1>
+        <a:sysClr val="windowText" lastClr="000000"/>
+      </a:dk1>
+      <a:lt1>
+        <a:sysClr val="window" lastClr="FFFFFF"/>
+      </a:lt1>
+      <a:dk2>
+        <a:srgbClr val="0E2841"/>
+      </a:dk2>
+      <a:lt2>
+        <a:srgbClr val="E8E8E8"/>
+      </a:lt2>
+      <a:accent1>
+        <a:srgbClr val="156082"/>
+      </a:accent1>
+      <a:accent2>
+        <a:srgbClr val="E97132"/>
+      </a:accent2>
+      <a:accent3>
+        <a:srgbClr val="196B24"/>
+      </a:accent3>
+      <a:accent4>
+        <a:srgbClr val="0F9ED5"/>
+      </a:accent4>
+      <a:accent5>
+        <a:srgbClr val="A02B93"/>
+      </a:accent5>
+      <a:accent6>
+        <a:srgbClr val="4EA72E"/>
+      </a:accent6>
+      <a:hlink>
+        <a:srgbClr val="467886"/>
+      </a:hlink>
+      <a:folHlink>
+        <a:srgbClr val="96607D"/>
+      </a:folHlink>
+    </a:clrScheme>
+    <a:fontScheme name="Office">
+      <a:majorFont>
+        <a:latin typeface="Aptos Display" panose="02110004020202020204"/>
+        <a:ea typeface=""/>
+        <a:cs typeface=""/>
+        <a:font script="Jpan" typeface="游ゴシック Light"/>
+        <a:font script="Hang" typeface="맑은 고딕"/>
+        <a:font script="Hans" typeface="等线 Light"/>
+        <a:font script="Hant" typeface="新細明體"/>
+        <a:font script="Arab" typeface="Times New Roman"/>
+        <a:font script="Hebr" typeface="Times New Roman"/>
+        <a:font script="Thai" typeface="Angsana New"/>
+        <a:font script="Ethi" typeface="Nyala"/>
+        <a:font script="Beng" typeface="Vrinda"/>
+        <a:font script="Gujr" typeface="Shruti"/>
+        <a:font script="Khmr" typeface="MoolBoran"/>
+        <a:font script="Knda" typeface="Tunga"/>
+        <a:font script="Guru" typeface="Raavi"/>
+        <a:font script="Cans" typeface="Euphemia"/>
+        <a:font script="Cher" typeface="Plantagenet Cherokee"/>
+        <a:font script="Yiii" typeface="Microsoft Yi Baiti"/>
+        <a:font script="Tibt" typeface="Microsoft Himalaya"/>
+        <a:font script="Thaa" typeface="MV Boli"/>
+        <a:font script="Deva" typeface="Mangal"/>
+        <a:font script="Telu" typeface="Gautami"/>
+        <a:font script="Taml" typeface="Latha"/>
+        <a:font script="Syrc" typeface="Estrangelo Edessa"/>
+        <a:font script="Orya" typeface="Kalinga"/>
+        <a:font script="Mlym" typeface="Kartika"/>
+        <a:font script="Laoo" typeface="DokChampa"/>
+        <a:font script="Sinh" typeface="Iskoola Pota"/>
+        <a:font script="Mong" typeface="Mongolian Baiti"/>
+        <a:font script="Viet" typeface="Times New Roman"/>
+        <a:font script="Uigh" typeface="Microsoft Uighur"/>
+        <a:font script="Geor" typeface="Sylfaen"/>
+        <a:font script="Armn" typeface="Arial"/>
+        <a:font script="Bugi" typeface="Leelawadee UI"/>
+        <a:font script="Bopo" typeface="Microsoft JhengHei"/>
+        <a:font script="Java" typeface="Javanese Text"/>
+        <a:font script="Lisu" typeface="Segoe UI"/>
+        <a:font script="Mymr" typeface="Myanmar Text"/>
+        <a:font script="Nkoo" typeface="Ebrima"/>
+        <a:font script="Olck" typeface="Nirmala UI"/>
+        <a:font script="Osma" typeface="Ebrima"/>
+        <a:font script="Phag" typeface="Phagspa"/>
+        <a:font script="Syrn" typeface="Estrangelo Edessa"/>
+        <a:font script="Syrj" typeface="Estrangelo Edessa"/>
+        <a:font script="Syre" typeface="Estrangelo Edessa"/>
+        <a:font script="Sora" typeface="Nirmala UI"/>
+        <a:font script="Tale" typeface="Microsoft Tai Le"/>
+        <a:font script="Talu" typeface="Microsoft New Tai Lue"/>
+        <a:font script="Tfng" typeface="Ebrima"/>
+      </a:majorFont>
+      <a:minorFont>
+        <a:latin typeface="Aptos" panose="02110004020202020204"/>
+        <a:ea typeface=""/>
+        <a:cs typeface=""/>
+        <a:font script="Jpan" typeface="游ゴシック"/>
+        <a:font script="Hang" typeface="맑은 고딕"/>
+        <a:font script="Hans" typeface="等线"/>
+        <a:font script="Hant" typeface="新細明體"/>
+        <a:font script="Arab" typeface="Arial"/>
+        <a:font script="Hebr" typeface="Arial"/>
+        <a:font script="Thai" typeface="Cordia New"/>
+        <a:font script="Ethi" typeface="Nyala"/>
+        <a:font script="Beng" typeface="Vrinda"/>
+        <a:font script="Gujr" typeface="Shruti"/>
+        <a:font script="Khmr" typeface="DaunPenh"/>
+        <a:font script="Knda" typeface="Tunga"/>
+        <a:font script="Guru" typeface="Raavi"/>
+        <a:font script="Cans" typeface="Euphemia"/>
+        <a:font script="Cher" typeface="Plantagenet Cherokee"/>
+        <a:font script="Yiii" typeface="Microsoft Yi Baiti"/>
+        <a:font script="Tibt" typeface="Microsoft Himalaya"/>
+        <a:font script="Thaa" typeface="MV Boli"/>
+        <a:font script="Deva" typeface="Mangal"/>
+        <a:font script="Telu" typeface="Gautami"/>
+        <a:font script="Taml" typeface="Latha"/>
+        <a:font script="Syrc" typeface="Estrangelo Edessa"/>
+        <a:font script="Orya" typeface="Kalinga"/>
+        <a:font script="Mlym" typeface="Kartika"/>
+        <a:font script="Laoo" typeface="DokChampa"/>
+        <a:font script="Sinh" typeface="Iskoola Pota"/>
+        <a:font script="Mong" typeface="Mongolian Baiti"/>
+        <a:font script="Viet" typeface="Arial"/>
+        <a:font script="Uigh" typeface="Microsoft Uighur"/>
+        <a:font script="Geor" typeface="Sylfaen"/>
+        <a:font script="Armn" typeface="Arial"/>
+        <a:font script="Bugi" typeface="Leelawadee UI"/>
+        <a:font script="Bopo" typeface="Microsoft JhengHei"/>
+        <a:font script="Java" typeface="Javanese Text"/>
+        <a:font script="Lisu" typeface="Segoe UI"/>
+        <a:font script="Mymr" typeface="Myanmar Text"/>
+        <a:font script="Nkoo" typeface="Ebrima"/>
+        <a:font script="Olck" typeface="Nirmala UI"/>
+        <a:font script="Osma" typeface="Ebrima"/>
+        <a:font script="Phag" typeface="Phagspa"/>
+        <a:font script="Syrn" typeface="Estrangelo Edessa"/>
+        <a:font script="Syrj" typeface="Estrangelo Edessa"/>
+        <a:font script="Syre" typeface="Estrangelo Edessa"/>
+        <a:font script="Sora" typeface="Nirmala UI"/>
+        <a:font script="Tale" typeface="Microsoft Tai Le"/>
+        <a:font script="Talu" typeface="Microsoft New Tai Lue"/>
+        <a:font script="Tfng" typeface="Ebrima"/>
+      </a:minorFont>
+    </a:fontScheme>
+    <a:fmtScheme name="Office">
+      <a:fillStyleLst>
+        <a:solidFill>
+          <a:schemeClr val="phClr"/>
+        </a:solidFill>
+        <a:gradFill rotWithShape="1">
+          <a:gsLst>
+            <a:gs pos="0">
+              <a:schemeClr val="phClr">
+                <a:lumMod val="110000"/>
+                <a:satMod val="105000"/>
+                <a:tint val="67000"/>
+              </a:schemeClr>
+            </a:gs>
+            <a:gs pos="50000">
+              <a:schemeClr val="phClr">
+                <a:lumMod val="105000"/>
+                <a:satMod val="103000"/>
+                <a:tint val="73000"/>
+              </a:schemeClr>
+            </a:gs>
+            <a:gs pos="100000">
+              <a:schemeClr val="phClr">
+                <a:lumMod val="105000"/>
+                <a:satMod val="109000"/>
+                <a:tint val="81000"/>
+              </a:schemeClr>
+            </a:gs>
+          </a:gsLst>
+          <a:lin ang="5400000" scaled="0"/>
+        </a:gradFill>
+        <a:gradFill rotWithShape="1">
+          <a:gsLst>
+            <a:gs pos="0">
+              <a:schemeClr val="phClr">
+                <a:satMod val="103000"/>
+                <a:lumMod val="102000"/>
+                <a:tint val="94000"/>
+              </a:schemeClr>
+            </a:gs>
+            <a:gs pos="50000">
+              <a:schemeClr val="phClr">
+                <a:satMod val="110000"/>
+                <a:lumMod val="100000"/>
+                <a:shade val="100000"/>
+              </a:schemeClr>
+            </a:gs>
+            <a:gs pos="100000">
+              <a:schemeClr val="phClr">
+                <a:lumMod val="99000"/>
+                <a:satMod val="120000"/>
+                <a:shade val="78000"/>
+              </a:schemeClr>
+            </a:gs>
+          </a:gsLst>
+          <a:lin ang="5400000" scaled="0"/>
+        </a:gradFill>
+      </a:fillStyleLst>
+      <a:lnStyleLst>
+        <a:ln w="12700" cap="flat" cmpd="sng" algn="ctr">
+          <a:solidFill>
+            <a:schemeClr val="phClr"/>
+          </a:solidFill>
+          <a:prstDash val="solid"/>
+          <a:miter lim="800000"/>
+        </a:ln>
+        <a:ln w="19050" cap="flat" cmpd="sng" algn="ctr">
+          <a:solidFill>
+            <a:schemeClr val="phClr"/>
+          </a:solidFill>
+          <a:prstDash val="solid"/>
+          <a:miter lim="800000"/>
+        </a:ln>
+        <a:ln w="25400" cap="flat" cmpd="sng" algn="ctr">
+          <a:solidFill>
+            <a:schemeClr val="phClr"/>
+          </a:solidFill>
+          <a:prstDash val="solid"/>
+          <a:miter lim="800000"/>
+        </a:ln>
+      </a:lnStyleLst>
+      <a:effectStyleLst>
+        <a:effectStyle>
+          <a:effectLst/>
+        </a:effectStyle>
+        <a:effectStyle>
+          <a:effectLst/>
+        </a:effectStyle>
+        <a:effectStyle>
+          <a:effectLst>
+            <a:outerShdw blurRad="57150" dist="19050" dir="5400000" algn="ctr" rotWithShape="0">
+              <a:srgbClr val="000000">
+                <a:alpha val="63000"/>
+              </a:srgbClr>
+            </a:outerShdw>
+          </a:effectLst>
+        </a:effectStyle>
+      </a:effectStyleLst>
+      <a:bgFillStyleLst>
+        <a:solidFill>
+          <a:schemeClr val="phClr"/>
+        </a:solidFill>
+        <a:solidFill>
+          <a:schemeClr val="phClr">
+            <a:tint val="95000"/>
+            <a:satMod val="170000"/>
+          </a:schemeClr>
+        </a:solidFill>
+        <a:gradFill rotWithShape="1">
+          <a:gsLst>
+            <a:gs pos="0">
+              <a:schemeClr val="phClr">
+                <a:tint val="93000"/>
+                <a:satMod val="150000"/>
+                <a:shade val="98000"/>
+                <a:lumMod val="102000"/>
+              </a:schemeClr>
+            </a:gs>
+            <a:gs pos="50000">
+              <a:schemeClr val="phClr">
+                <a:tint val="98000"/>
+                <a:satMod val="130000"/>
+                <a:shade val="90000"/>
+                <a:lumMod val="103000"/>
+              </a:schemeClr>
+            </a:gs>
+            <a:gs pos="100000">
+              <a:schemeClr val="phClr">
+                <a:shade val="63000"/>
+                <a:satMod val="120000"/>
+              </a:schemeClr>
+            </a:gs>
+          </a:gsLst>
+          <a:lin ang="5400000" scaled="0"/>
+        </a:gradFill>
+      </a:bgFillStyleLst>
+    </a:fmtScheme>
+  </a:themeElements>
+  <a:objectDefaults>
+    <a:lnDef>
+      <a:spPr/>
+      <a:bodyPr/>
+      <a:lstStyle/>
+      <a:style>
+        <a:lnRef idx="2">
+          <a:schemeClr val="accent1"/>
+        </a:lnRef>
+        <a:fillRef idx="0">
+          <a:schemeClr val="accent1"/>
+        </a:fillRef>
+        <a:effectRef idx="1">
+          <a:schemeClr val="accent1"/>
+        </a:effectRef>
+        <a:fontRef idx="minor">
+          <a:schemeClr val="tx1"/>
+        </a:fontRef>
+      </a:style>
+    </a:lnDef>
+  </a:objectDefaults>
+  <a:extraClrSchemeLst/>
+  <a:extLst>
+    <a:ext uri="{05A4C25C-085E-4340-85A3-A5531E510DB2}">
+      <thm15:themeFamily xmlns:thm15="http://schemas.microsoft.com/office/thememl/2012/main" name="Office Theme" id="{2E142A2C-CD16-42D6-873A-C26D2A0506FA}" vid="{1BDDFF52-6CD6-40A5-AB3C-68EB2F1E4D0A}"/>
+    </a:ext>
+  </a:extLst>
+</a:theme>
 </file>